--- a/assets/files/presentasi-interaktif.pptx
+++ b/assets/files/presentasi-interaktif.pptx
@@ -2,7 +2,7 @@
 <file path=ppt/presentation.xml><?xml version="1.0" encoding="utf-8"?>
 <p:presentation xmlns:a="http://schemas.openxmlformats.org/drawingml/2006/main" xmlns:r="http://schemas.openxmlformats.org/officeDocument/2006/relationships" xmlns:p="http://schemas.openxmlformats.org/presentationml/2006/main" saveSubsetFonts="1">
   <p:sldMasterIdLst>
-    <p:sldMasterId id="2147483648" r:id="rId1"/>
+    <p:sldMasterId id="2147483660" r:id="rId1"/>
   </p:sldMasterIdLst>
   <p:sldIdLst>
     <p:sldId id="256" r:id="rId2"/>
@@ -15,9 +15,9 @@
   <p:notesSz cx="6858000" cy="9144000"/>
   <p:defaultTextStyle>
     <a:defPPr>
-      <a:defRPr lang="id-ID"/>
+      <a:defRPr lang="en-US"/>
     </a:defPPr>
-    <a:lvl1pPr marL="0" algn="l" defTabSz="914400" rtl="0" eaLnBrk="1" latinLnBrk="0" hangingPunct="1">
+    <a:lvl1pPr marL="0" algn="l" defTabSz="457200" rtl="0" eaLnBrk="1" latinLnBrk="0" hangingPunct="1">
       <a:defRPr sz="1800" kern="1200">
         <a:solidFill>
           <a:schemeClr val="tx1"/>
@@ -27,7 +27,7 @@
         <a:cs typeface="+mn-cs"/>
       </a:defRPr>
     </a:lvl1pPr>
-    <a:lvl2pPr marL="457200" algn="l" defTabSz="914400" rtl="0" eaLnBrk="1" latinLnBrk="0" hangingPunct="1">
+    <a:lvl2pPr marL="457200" algn="l" defTabSz="457200" rtl="0" eaLnBrk="1" latinLnBrk="0" hangingPunct="1">
       <a:defRPr sz="1800" kern="1200">
         <a:solidFill>
           <a:schemeClr val="tx1"/>
@@ -37,7 +37,7 @@
         <a:cs typeface="+mn-cs"/>
       </a:defRPr>
     </a:lvl2pPr>
-    <a:lvl3pPr marL="914400" algn="l" defTabSz="914400" rtl="0" eaLnBrk="1" latinLnBrk="0" hangingPunct="1">
+    <a:lvl3pPr marL="914400" algn="l" defTabSz="457200" rtl="0" eaLnBrk="1" latinLnBrk="0" hangingPunct="1">
       <a:defRPr sz="1800" kern="1200">
         <a:solidFill>
           <a:schemeClr val="tx1"/>
@@ -47,7 +47,7 @@
         <a:cs typeface="+mn-cs"/>
       </a:defRPr>
     </a:lvl3pPr>
-    <a:lvl4pPr marL="1371600" algn="l" defTabSz="914400" rtl="0" eaLnBrk="1" latinLnBrk="0" hangingPunct="1">
+    <a:lvl4pPr marL="1371600" algn="l" defTabSz="457200" rtl="0" eaLnBrk="1" latinLnBrk="0" hangingPunct="1">
       <a:defRPr sz="1800" kern="1200">
         <a:solidFill>
           <a:schemeClr val="tx1"/>
@@ -57,7 +57,7 @@
         <a:cs typeface="+mn-cs"/>
       </a:defRPr>
     </a:lvl4pPr>
-    <a:lvl5pPr marL="1828800" algn="l" defTabSz="914400" rtl="0" eaLnBrk="1" latinLnBrk="0" hangingPunct="1">
+    <a:lvl5pPr marL="1828800" algn="l" defTabSz="457200" rtl="0" eaLnBrk="1" latinLnBrk="0" hangingPunct="1">
       <a:defRPr sz="1800" kern="1200">
         <a:solidFill>
           <a:schemeClr val="tx1"/>
@@ -67,7 +67,7 @@
         <a:cs typeface="+mn-cs"/>
       </a:defRPr>
     </a:lvl5pPr>
-    <a:lvl6pPr marL="2286000" algn="l" defTabSz="914400" rtl="0" eaLnBrk="1" latinLnBrk="0" hangingPunct="1">
+    <a:lvl6pPr marL="2286000" algn="l" defTabSz="457200" rtl="0" eaLnBrk="1" latinLnBrk="0" hangingPunct="1">
       <a:defRPr sz="1800" kern="1200">
         <a:solidFill>
           <a:schemeClr val="tx1"/>
@@ -77,7 +77,7 @@
         <a:cs typeface="+mn-cs"/>
       </a:defRPr>
     </a:lvl6pPr>
-    <a:lvl7pPr marL="2743200" algn="l" defTabSz="914400" rtl="0" eaLnBrk="1" latinLnBrk="0" hangingPunct="1">
+    <a:lvl7pPr marL="2743200" algn="l" defTabSz="457200" rtl="0" eaLnBrk="1" latinLnBrk="0" hangingPunct="1">
       <a:defRPr sz="1800" kern="1200">
         <a:solidFill>
           <a:schemeClr val="tx1"/>
@@ -87,7 +87,7 @@
         <a:cs typeface="+mn-cs"/>
       </a:defRPr>
     </a:lvl7pPr>
-    <a:lvl8pPr marL="3200400" algn="l" defTabSz="914400" rtl="0" eaLnBrk="1" latinLnBrk="0" hangingPunct="1">
+    <a:lvl8pPr marL="3200400" algn="l" defTabSz="457200" rtl="0" eaLnBrk="1" latinLnBrk="0" hangingPunct="1">
       <a:defRPr sz="1800" kern="1200">
         <a:solidFill>
           <a:schemeClr val="tx1"/>
@@ -97,7 +97,7 @@
         <a:cs typeface="+mn-cs"/>
       </a:defRPr>
     </a:lvl8pPr>
-    <a:lvl9pPr marL="3657600" algn="l" defTabSz="914400" rtl="0" eaLnBrk="1" latinLnBrk="0" hangingPunct="1">
+    <a:lvl9pPr marL="3657600" algn="l" defTabSz="457200" rtl="0" eaLnBrk="1" latinLnBrk="0" hangingPunct="1">
       <a:defRPr sz="1800" kern="1200">
         <a:solidFill>
           <a:schemeClr val="tx1"/>
@@ -108,7 +108,39 @@
       </a:defRPr>
     </a:lvl9pPr>
   </p:defaultTextStyle>
+  <p:extLst>
+    <p:ext uri="{EFAFB233-063F-42B5-8137-9DF3F51BA10A}">
+      <p15:sldGuideLst xmlns:p15="http://schemas.microsoft.com/office/powerpoint/2012/main"/>
+    </p:ext>
+  </p:extLst>
 </p:presentation>
+</file>
+
+<file path=ppt/authors.xml><?xml version="1.0" encoding="utf-8"?>
+<p188:authorLst xmlns:a="http://schemas.openxmlformats.org/drawingml/2006/main" xmlns:r="http://schemas.openxmlformats.org/officeDocument/2006/relationships" xmlns:p188="http://schemas.microsoft.com/office/powerpoint/2018/8/main">
+  <p188:author id="{9F700349-370D-CFA4-24E5-77F4F624ABBF}" name="ONY" initials="O" userId="ONY" providerId="None"/>
+</p188:authorLst>
+</file>
+
+<file path=ppt/comments/modernComment_100_DCC6C6BE.xml><?xml version="1.0" encoding="utf-8"?>
+<p188:cmLst xmlns:a="http://schemas.openxmlformats.org/drawingml/2006/main" xmlns:r="http://schemas.openxmlformats.org/officeDocument/2006/relationships" xmlns:p188="http://schemas.microsoft.com/office/powerpoint/2018/8/main">
+  <p188:cm id="{F6A6D91F-A11C-4687-9D87-74A696D2750E}" authorId="{9F700349-370D-CFA4-24E5-77F4F624ABBF}" created="2026-07-06T15:20:07.942">
+    <pc:sldMkLst xmlns:pc="http://schemas.microsoft.com/office/powerpoint/2013/main/command">
+      <pc:docMk/>
+      <pc:sldMk cId="3704014526" sldId="256"/>
+    </pc:sldMkLst>
+    <p188:txBody>
+      <a:bodyPr/>
+      <a:lstStyle/>
+      <a:p>
+        <a:r>
+          <a:rPr lang="id-ID"/>
+          <a:t>Menu Utama</a:t>
+        </a:r>
+      </a:p>
+    </p188:txBody>
+  </p188:cm>
+</p188:cmLst>
 </file>
 
 <file path=ppt/slideLayouts/slideLayout1.xml><?xml version="1.0" encoding="utf-8"?>
@@ -130,13 +162,7 @@
       </p:grpSpPr>
       <p:sp>
         <p:nvSpPr>
-          <p:cNvPr id="2" name="Title 1">
-            <a:extLst>
-              <a:ext uri="{FF2B5EF4-FFF2-40B4-BE49-F238E27FC236}">
-                <a16:creationId xmlns:a16="http://schemas.microsoft.com/office/drawing/2014/main" id="{022E968A-2779-985E-C418-E01938DB4A6E}"/>
-              </a:ext>
-            </a:extLst>
-          </p:cNvPr>
+          <p:cNvPr id="2" name="Title 1"/>
           <p:cNvSpPr>
             <a:spLocks noGrp="1"/>
           </p:cNvSpPr>
@@ -146,15 +172,17 @@
         </p:nvSpPr>
         <p:spPr>
           <a:xfrm>
-            <a:off x="1524000" y="1122363"/>
-            <a:ext cx="9144000" cy="2387600"/>
-          </a:xfrm>
-        </p:spPr>
-        <p:txBody>
-          <a:bodyPr anchor="b"/>
+            <a:off x="2417779" y="802298"/>
+            <a:ext cx="8637073" cy="2541431"/>
+          </a:xfrm>
+        </p:spPr>
+        <p:txBody>
+          <a:bodyPr bIns="0" anchor="b">
+            <a:normAutofit/>
+          </a:bodyPr>
           <a:lstStyle>
-            <a:lvl1pPr algn="ctr">
-              <a:defRPr sz="6000"/>
+            <a:lvl1pPr algn="l">
+              <a:defRPr sz="6600"/>
             </a:lvl1pPr>
           </a:lstStyle>
           <a:p>
@@ -162,19 +190,13 @@
               <a:rPr lang="en-US"/>
               <a:t>Click to edit Master title style</a:t>
             </a:r>
-            <a:endParaRPr lang="id-ID"/>
-          </a:p>
-        </p:txBody>
-      </p:sp>
-      <p:sp>
-        <p:nvSpPr>
-          <p:cNvPr id="3" name="Subtitle 2">
-            <a:extLst>
-              <a:ext uri="{FF2B5EF4-FFF2-40B4-BE49-F238E27FC236}">
-                <a16:creationId xmlns:a16="http://schemas.microsoft.com/office/drawing/2014/main" id="{FE3735EB-F48E-6D51-C213-46E0FF3BBB6F}"/>
-              </a:ext>
-            </a:extLst>
-          </p:cNvPr>
+            <a:endParaRPr lang="en-US" dirty="0"/>
+          </a:p>
+        </p:txBody>
+      </p:sp>
+      <p:sp>
+        <p:nvSpPr>
+          <p:cNvPr id="3" name="Subtitle 2"/>
           <p:cNvSpPr>
             <a:spLocks noGrp="1"/>
           </p:cNvSpPr>
@@ -184,20 +206,26 @@
         </p:nvSpPr>
         <p:spPr>
           <a:xfrm>
-            <a:off x="1524000" y="3602038"/>
-            <a:ext cx="9144000" cy="1655762"/>
-          </a:xfrm>
-        </p:spPr>
-        <p:txBody>
-          <a:bodyPr/>
+            <a:off x="2417780" y="3531204"/>
+            <a:ext cx="8637072" cy="977621"/>
+          </a:xfrm>
+        </p:spPr>
+        <p:txBody>
+          <a:bodyPr tIns="91440" bIns="91440">
+            <a:normAutofit/>
+          </a:bodyPr>
           <a:lstStyle>
-            <a:lvl1pPr marL="0" indent="0" algn="ctr">
-              <a:buNone/>
-              <a:defRPr sz="2400"/>
+            <a:lvl1pPr marL="0" indent="0" algn="l">
+              <a:buNone/>
+              <a:defRPr sz="1800" b="0" cap="all" baseline="0">
+                <a:solidFill>
+                  <a:schemeClr val="tx1"/>
+                </a:solidFill>
+              </a:defRPr>
             </a:lvl1pPr>
             <a:lvl2pPr marL="457200" indent="0" algn="ctr">
               <a:buNone/>
-              <a:defRPr sz="2000"/>
+              <a:defRPr sz="1800"/>
             </a:lvl2pPr>
             <a:lvl3pPr marL="914400" indent="0" algn="ctr">
               <a:buNone/>
@@ -233,19 +261,13 @@
               <a:rPr lang="en-US"/>
               <a:t>Click to edit Master subtitle style</a:t>
             </a:r>
-            <a:endParaRPr lang="id-ID"/>
-          </a:p>
-        </p:txBody>
-      </p:sp>
-      <p:sp>
-        <p:nvSpPr>
-          <p:cNvPr id="4" name="Date Placeholder 3">
-            <a:extLst>
-              <a:ext uri="{FF2B5EF4-FFF2-40B4-BE49-F238E27FC236}">
-                <a16:creationId xmlns:a16="http://schemas.microsoft.com/office/drawing/2014/main" id="{679868E2-A1A0-2A0D-81C6-BD791E91F4F3}"/>
-              </a:ext>
-            </a:extLst>
-          </p:cNvPr>
+            <a:endParaRPr lang="en-US" dirty="0"/>
+          </a:p>
+        </p:txBody>
+      </p:sp>
+      <p:sp>
+        <p:nvSpPr>
+          <p:cNvPr id="4" name="Date Placeholder 3"/>
           <p:cNvSpPr>
             <a:spLocks noGrp="1"/>
           </p:cNvSpPr>
@@ -260,7 +282,7 @@
           <a:p>
             <a:fld id="{9934508E-F4F0-45DC-A7F4-4636DDC6725B}" type="datetimeFigureOut">
               <a:rPr lang="id-ID" smtClean="0"/>
-              <a:t>26/06/2026</a:t>
+              <a:t>06/07/2026</a:t>
             </a:fld>
             <a:endParaRPr lang="id-ID"/>
           </a:p>
@@ -268,13 +290,7 @@
       </p:sp>
       <p:sp>
         <p:nvSpPr>
-          <p:cNvPr id="5" name="Footer Placeholder 4">
-            <a:extLst>
-              <a:ext uri="{FF2B5EF4-FFF2-40B4-BE49-F238E27FC236}">
-                <a16:creationId xmlns:a16="http://schemas.microsoft.com/office/drawing/2014/main" id="{DFDEEBCE-D69B-82B1-55F1-5087AC5841BD}"/>
-              </a:ext>
-            </a:extLst>
-          </p:cNvPr>
+          <p:cNvPr id="5" name="Footer Placeholder 4"/>
           <p:cNvSpPr>
             <a:spLocks noGrp="1"/>
           </p:cNvSpPr>
@@ -282,7 +298,12 @@
             <p:ph type="ftr" sz="quarter" idx="11"/>
           </p:nvPr>
         </p:nvSpPr>
-        <p:spPr/>
+        <p:spPr>
+          <a:xfrm>
+            <a:off x="2416500" y="329307"/>
+            <a:ext cx="4973915" cy="309201"/>
+          </a:xfrm>
+        </p:spPr>
         <p:txBody>
           <a:bodyPr/>
           <a:lstStyle/>
@@ -293,13 +314,7 @@
       </p:sp>
       <p:sp>
         <p:nvSpPr>
-          <p:cNvPr id="6" name="Slide Number Placeholder 5">
-            <a:extLst>
-              <a:ext uri="{FF2B5EF4-FFF2-40B4-BE49-F238E27FC236}">
-                <a16:creationId xmlns:a16="http://schemas.microsoft.com/office/drawing/2014/main" id="{B9D89E97-DFD8-9294-E017-9EE56816F03E}"/>
-              </a:ext>
-            </a:extLst>
-          </p:cNvPr>
+          <p:cNvPr id="6" name="Slide Number Placeholder 5"/>
           <p:cNvSpPr>
             <a:spLocks noGrp="1"/>
           </p:cNvSpPr>
@@ -307,7 +322,12 @@
             <p:ph type="sldNum" sz="quarter" idx="12"/>
           </p:nvPr>
         </p:nvSpPr>
-        <p:spPr/>
+        <p:spPr>
+          <a:xfrm>
+            <a:off x="1437664" y="798973"/>
+            <a:ext cx="811019" cy="503578"/>
+          </a:xfrm>
+        </p:spPr>
         <p:txBody>
           <a:bodyPr/>
           <a:lstStyle/>
@@ -320,10 +340,41 @@
           </a:p>
         </p:txBody>
       </p:sp>
+      <p:cxnSp>
+        <p:nvCxnSpPr>
+          <p:cNvPr id="15" name="Straight Connector 14"/>
+          <p:cNvCxnSpPr/>
+          <p:nvPr/>
+        </p:nvCxnSpPr>
+        <p:spPr>
+          <a:xfrm>
+            <a:off x="2417780" y="3528542"/>
+            <a:ext cx="8637072" cy="0"/>
+          </a:xfrm>
+          <a:prstGeom prst="line">
+            <a:avLst/>
+          </a:prstGeom>
+          <a:ln w="31750"/>
+        </p:spPr>
+        <p:style>
+          <a:lnRef idx="3">
+            <a:schemeClr val="accent1"/>
+          </a:lnRef>
+          <a:fillRef idx="0">
+            <a:schemeClr val="accent1"/>
+          </a:fillRef>
+          <a:effectRef idx="2">
+            <a:schemeClr val="accent1"/>
+          </a:effectRef>
+          <a:fontRef idx="minor">
+            <a:schemeClr val="tx1"/>
+          </a:fontRef>
+        </p:style>
+      </p:cxnSp>
     </p:spTree>
     <p:extLst>
       <p:ext uri="{BB962C8B-B14F-4D97-AF65-F5344CB8AC3E}">
-        <p14:creationId xmlns:p14="http://schemas.microsoft.com/office/powerpoint/2010/main" val="200009405"/>
+        <p14:creationId xmlns:p14="http://schemas.microsoft.com/office/powerpoint/2010/main" val="472806725"/>
       </p:ext>
     </p:extLst>
   </p:cSld>
@@ -352,13 +403,7 @@
       </p:grpSpPr>
       <p:sp>
         <p:nvSpPr>
-          <p:cNvPr id="2" name="Title 1">
-            <a:extLst>
-              <a:ext uri="{FF2B5EF4-FFF2-40B4-BE49-F238E27FC236}">
-                <a16:creationId xmlns:a16="http://schemas.microsoft.com/office/drawing/2014/main" id="{2EAABFFB-A2EE-CC04-B938-B36AF5A29DA9}"/>
-              </a:ext>
-            </a:extLst>
-          </p:cNvPr>
+          <p:cNvPr id="2" name="Title 1"/>
           <p:cNvSpPr>
             <a:spLocks noGrp="1"/>
           </p:cNvSpPr>
@@ -375,19 +420,13 @@
               <a:rPr lang="en-US"/>
               <a:t>Click to edit Master title style</a:t>
             </a:r>
-            <a:endParaRPr lang="id-ID"/>
-          </a:p>
-        </p:txBody>
-      </p:sp>
-      <p:sp>
-        <p:nvSpPr>
-          <p:cNvPr id="3" name="Vertical Text Placeholder 2">
-            <a:extLst>
-              <a:ext uri="{FF2B5EF4-FFF2-40B4-BE49-F238E27FC236}">
-                <a16:creationId xmlns:a16="http://schemas.microsoft.com/office/drawing/2014/main" id="{8C421CAE-C01D-99C1-1283-B4050869FCCB}"/>
-              </a:ext>
-            </a:extLst>
-          </p:cNvPr>
+            <a:endParaRPr lang="en-US" dirty="0"/>
+          </a:p>
+        </p:txBody>
+      </p:sp>
+      <p:sp>
+        <p:nvSpPr>
+          <p:cNvPr id="3" name="Vertical Text Placeholder 2"/>
           <p:cNvSpPr>
             <a:spLocks noGrp="1"/>
           </p:cNvSpPr>
@@ -433,19 +472,13 @@
               <a:rPr lang="en-US"/>
               <a:t>Fifth level</a:t>
             </a:r>
-            <a:endParaRPr lang="id-ID"/>
-          </a:p>
-        </p:txBody>
-      </p:sp>
-      <p:sp>
-        <p:nvSpPr>
-          <p:cNvPr id="4" name="Date Placeholder 3">
-            <a:extLst>
-              <a:ext uri="{FF2B5EF4-FFF2-40B4-BE49-F238E27FC236}">
-                <a16:creationId xmlns:a16="http://schemas.microsoft.com/office/drawing/2014/main" id="{45F21976-D172-DF7E-0F58-4E9AFE87E7EF}"/>
-              </a:ext>
-            </a:extLst>
-          </p:cNvPr>
+            <a:endParaRPr lang="en-US" dirty="0"/>
+          </a:p>
+        </p:txBody>
+      </p:sp>
+      <p:sp>
+        <p:nvSpPr>
+          <p:cNvPr id="4" name="Date Placeholder 3"/>
           <p:cNvSpPr>
             <a:spLocks noGrp="1"/>
           </p:cNvSpPr>
@@ -460,7 +493,7 @@
           <a:p>
             <a:fld id="{9934508E-F4F0-45DC-A7F4-4636DDC6725B}" type="datetimeFigureOut">
               <a:rPr lang="id-ID" smtClean="0"/>
-              <a:t>26/06/2026</a:t>
+              <a:t>06/07/2026</a:t>
             </a:fld>
             <a:endParaRPr lang="id-ID"/>
           </a:p>
@@ -468,13 +501,7 @@
       </p:sp>
       <p:sp>
         <p:nvSpPr>
-          <p:cNvPr id="5" name="Footer Placeholder 4">
-            <a:extLst>
-              <a:ext uri="{FF2B5EF4-FFF2-40B4-BE49-F238E27FC236}">
-                <a16:creationId xmlns:a16="http://schemas.microsoft.com/office/drawing/2014/main" id="{6112036D-63CF-6392-82D8-D8C98C4769F3}"/>
-              </a:ext>
-            </a:extLst>
-          </p:cNvPr>
+          <p:cNvPr id="5" name="Footer Placeholder 4"/>
           <p:cNvSpPr>
             <a:spLocks noGrp="1"/>
           </p:cNvSpPr>
@@ -493,13 +520,7 @@
       </p:sp>
       <p:sp>
         <p:nvSpPr>
-          <p:cNvPr id="6" name="Slide Number Placeholder 5">
-            <a:extLst>
-              <a:ext uri="{FF2B5EF4-FFF2-40B4-BE49-F238E27FC236}">
-                <a16:creationId xmlns:a16="http://schemas.microsoft.com/office/drawing/2014/main" id="{8EA8C023-AF5E-CD1D-415C-85DFC1378922}"/>
-              </a:ext>
-            </a:extLst>
-          </p:cNvPr>
+          <p:cNvPr id="6" name="Slide Number Placeholder 5"/>
           <p:cNvSpPr>
             <a:spLocks noGrp="1"/>
           </p:cNvSpPr>
@@ -520,10 +541,41 @@
           </a:p>
         </p:txBody>
       </p:sp>
+      <p:cxnSp>
+        <p:nvCxnSpPr>
+          <p:cNvPr id="26" name="Straight Connector 25"/>
+          <p:cNvCxnSpPr/>
+          <p:nvPr/>
+        </p:nvCxnSpPr>
+        <p:spPr>
+          <a:xfrm>
+            <a:off x="1453896" y="1847088"/>
+            <a:ext cx="9607522" cy="0"/>
+          </a:xfrm>
+          <a:prstGeom prst="line">
+            <a:avLst/>
+          </a:prstGeom>
+          <a:ln w="31750"/>
+        </p:spPr>
+        <p:style>
+          <a:lnRef idx="3">
+            <a:schemeClr val="accent1"/>
+          </a:lnRef>
+          <a:fillRef idx="0">
+            <a:schemeClr val="accent1"/>
+          </a:fillRef>
+          <a:effectRef idx="2">
+            <a:schemeClr val="accent1"/>
+          </a:effectRef>
+          <a:fontRef idx="minor">
+            <a:schemeClr val="tx1"/>
+          </a:fontRef>
+        </p:style>
+      </p:cxnSp>
     </p:spTree>
     <p:extLst>
       <p:ext uri="{BB962C8B-B14F-4D97-AF65-F5344CB8AC3E}">
-        <p14:creationId xmlns:p14="http://schemas.microsoft.com/office/powerpoint/2010/main" val="1717875748"/>
+        <p14:creationId xmlns:p14="http://schemas.microsoft.com/office/powerpoint/2010/main" val="106523727"/>
       </p:ext>
     </p:extLst>
   </p:cSld>
@@ -552,13 +604,7 @@
       </p:grpSpPr>
       <p:sp>
         <p:nvSpPr>
-          <p:cNvPr id="2" name="Vertical Title 1">
-            <a:extLst>
-              <a:ext uri="{FF2B5EF4-FFF2-40B4-BE49-F238E27FC236}">
-                <a16:creationId xmlns:a16="http://schemas.microsoft.com/office/drawing/2014/main" id="{6D71476F-D4B9-7B4D-1218-71674AD4FF9F}"/>
-              </a:ext>
-            </a:extLst>
-          </p:cNvPr>
+          <p:cNvPr id="2" name="Vertical Title 1"/>
           <p:cNvSpPr>
             <a:spLocks noGrp="1"/>
           </p:cNvSpPr>
@@ -568,31 +614,29 @@
         </p:nvSpPr>
         <p:spPr>
           <a:xfrm>
-            <a:off x="8724900" y="365125"/>
-            <a:ext cx="2628900" cy="5811838"/>
+            <a:off x="9439111" y="798973"/>
+            <a:ext cx="1615742" cy="4659889"/>
           </a:xfrm>
         </p:spPr>
         <p:txBody>
           <a:bodyPr vert="eaVert"/>
-          <a:lstStyle/>
+          <a:lstStyle>
+            <a:lvl1pPr algn="l">
+              <a:defRPr/>
+            </a:lvl1pPr>
+          </a:lstStyle>
           <a:p>
             <a:r>
               <a:rPr lang="en-US"/>
               <a:t>Click to edit Master title style</a:t>
             </a:r>
-            <a:endParaRPr lang="id-ID"/>
-          </a:p>
-        </p:txBody>
-      </p:sp>
-      <p:sp>
-        <p:nvSpPr>
-          <p:cNvPr id="3" name="Vertical Text Placeholder 2">
-            <a:extLst>
-              <a:ext uri="{FF2B5EF4-FFF2-40B4-BE49-F238E27FC236}">
-                <a16:creationId xmlns:a16="http://schemas.microsoft.com/office/drawing/2014/main" id="{5B33D292-0D9D-D507-C1DB-65F05519D0B4}"/>
-              </a:ext>
-            </a:extLst>
-          </p:cNvPr>
+            <a:endParaRPr lang="en-US" dirty="0"/>
+          </a:p>
+        </p:txBody>
+      </p:sp>
+      <p:sp>
+        <p:nvSpPr>
+          <p:cNvPr id="3" name="Vertical Text Placeholder 2"/>
           <p:cNvSpPr>
             <a:spLocks noGrp="1"/>
           </p:cNvSpPr>
@@ -602,8 +646,8 @@
         </p:nvSpPr>
         <p:spPr>
           <a:xfrm>
-            <a:off x="838200" y="365125"/>
-            <a:ext cx="7734300" cy="5811838"/>
+            <a:off x="1444672" y="798973"/>
+            <a:ext cx="7828830" cy="4659889"/>
           </a:xfrm>
         </p:spPr>
         <p:txBody>
@@ -643,19 +687,13 @@
               <a:rPr lang="en-US"/>
               <a:t>Fifth level</a:t>
             </a:r>
-            <a:endParaRPr lang="id-ID"/>
-          </a:p>
-        </p:txBody>
-      </p:sp>
-      <p:sp>
-        <p:nvSpPr>
-          <p:cNvPr id="4" name="Date Placeholder 3">
-            <a:extLst>
-              <a:ext uri="{FF2B5EF4-FFF2-40B4-BE49-F238E27FC236}">
-                <a16:creationId xmlns:a16="http://schemas.microsoft.com/office/drawing/2014/main" id="{727604C7-B415-4D22-EDC9-D04A66C42B28}"/>
-              </a:ext>
-            </a:extLst>
-          </p:cNvPr>
+            <a:endParaRPr lang="en-US" dirty="0"/>
+          </a:p>
+        </p:txBody>
+      </p:sp>
+      <p:sp>
+        <p:nvSpPr>
+          <p:cNvPr id="4" name="Date Placeholder 3"/>
           <p:cNvSpPr>
             <a:spLocks noGrp="1"/>
           </p:cNvSpPr>
@@ -670,7 +708,7 @@
           <a:p>
             <a:fld id="{9934508E-F4F0-45DC-A7F4-4636DDC6725B}" type="datetimeFigureOut">
               <a:rPr lang="id-ID" smtClean="0"/>
-              <a:t>26/06/2026</a:t>
+              <a:t>06/07/2026</a:t>
             </a:fld>
             <a:endParaRPr lang="id-ID"/>
           </a:p>
@@ -678,13 +716,7 @@
       </p:sp>
       <p:sp>
         <p:nvSpPr>
-          <p:cNvPr id="5" name="Footer Placeholder 4">
-            <a:extLst>
-              <a:ext uri="{FF2B5EF4-FFF2-40B4-BE49-F238E27FC236}">
-                <a16:creationId xmlns:a16="http://schemas.microsoft.com/office/drawing/2014/main" id="{14B775EC-E833-2BC5-FC9E-A80D475EE363}"/>
-              </a:ext>
-            </a:extLst>
-          </p:cNvPr>
+          <p:cNvPr id="5" name="Footer Placeholder 4"/>
           <p:cNvSpPr>
             <a:spLocks noGrp="1"/>
           </p:cNvSpPr>
@@ -703,13 +735,7 @@
       </p:sp>
       <p:sp>
         <p:nvSpPr>
-          <p:cNvPr id="6" name="Slide Number Placeholder 5">
-            <a:extLst>
-              <a:ext uri="{FF2B5EF4-FFF2-40B4-BE49-F238E27FC236}">
-                <a16:creationId xmlns:a16="http://schemas.microsoft.com/office/drawing/2014/main" id="{82D18D39-91BB-D75D-647A-5872BFF92026}"/>
-              </a:ext>
-            </a:extLst>
-          </p:cNvPr>
+          <p:cNvPr id="6" name="Slide Number Placeholder 5"/>
           <p:cNvSpPr>
             <a:spLocks noGrp="1"/>
           </p:cNvSpPr>
@@ -730,10 +756,41 @@
           </a:p>
         </p:txBody>
       </p:sp>
+      <p:cxnSp>
+        <p:nvCxnSpPr>
+          <p:cNvPr id="15" name="Straight Connector 14"/>
+          <p:cNvCxnSpPr/>
+          <p:nvPr/>
+        </p:nvCxnSpPr>
+        <p:spPr>
+          <a:xfrm>
+            <a:off x="9439111" y="798973"/>
+            <a:ext cx="0" cy="4659889"/>
+          </a:xfrm>
+          <a:prstGeom prst="line">
+            <a:avLst/>
+          </a:prstGeom>
+          <a:ln w="31750"/>
+        </p:spPr>
+        <p:style>
+          <a:lnRef idx="3">
+            <a:schemeClr val="accent1"/>
+          </a:lnRef>
+          <a:fillRef idx="0">
+            <a:schemeClr val="accent1"/>
+          </a:fillRef>
+          <a:effectRef idx="2">
+            <a:schemeClr val="accent1"/>
+          </a:effectRef>
+          <a:fontRef idx="minor">
+            <a:schemeClr val="tx1"/>
+          </a:fontRef>
+        </p:style>
+      </p:cxnSp>
     </p:spTree>
     <p:extLst>
       <p:ext uri="{BB962C8B-B14F-4D97-AF65-F5344CB8AC3E}">
-        <p14:creationId xmlns:p14="http://schemas.microsoft.com/office/powerpoint/2010/main" val="2402371170"/>
+        <p14:creationId xmlns:p14="http://schemas.microsoft.com/office/powerpoint/2010/main" val="2931574717"/>
       </p:ext>
     </p:extLst>
   </p:cSld>
@@ -762,13 +819,7 @@
       </p:grpSpPr>
       <p:sp>
         <p:nvSpPr>
-          <p:cNvPr id="2" name="Title 1">
-            <a:extLst>
-              <a:ext uri="{FF2B5EF4-FFF2-40B4-BE49-F238E27FC236}">
-                <a16:creationId xmlns:a16="http://schemas.microsoft.com/office/drawing/2014/main" id="{0448783C-356B-31DF-CC34-4FEAA09B0FBD}"/>
-              </a:ext>
-            </a:extLst>
-          </p:cNvPr>
+          <p:cNvPr id="2" name="Title 1"/>
           <p:cNvSpPr>
             <a:spLocks noGrp="1"/>
           </p:cNvSpPr>
@@ -785,19 +836,13 @@
               <a:rPr lang="en-US"/>
               <a:t>Click to edit Master title style</a:t>
             </a:r>
-            <a:endParaRPr lang="id-ID"/>
-          </a:p>
-        </p:txBody>
-      </p:sp>
-      <p:sp>
-        <p:nvSpPr>
-          <p:cNvPr id="3" name="Content Placeholder 2">
-            <a:extLst>
-              <a:ext uri="{FF2B5EF4-FFF2-40B4-BE49-F238E27FC236}">
-                <a16:creationId xmlns:a16="http://schemas.microsoft.com/office/drawing/2014/main" id="{1C1A6365-16F4-87CD-949F-E2FEA871EC6C}"/>
-              </a:ext>
-            </a:extLst>
-          </p:cNvPr>
+            <a:endParaRPr lang="en-US" dirty="0"/>
+          </a:p>
+        </p:txBody>
+      </p:sp>
+      <p:sp>
+        <p:nvSpPr>
+          <p:cNvPr id="3" name="Content Placeholder 2"/>
           <p:cNvSpPr>
             <a:spLocks noGrp="1"/>
           </p:cNvSpPr>
@@ -807,7 +852,7 @@
         </p:nvSpPr>
         <p:spPr/>
         <p:txBody>
-          <a:bodyPr/>
+          <a:bodyPr anchor="t"/>
           <a:lstStyle/>
           <a:p>
             <a:pPr lvl="0"/>
@@ -843,19 +888,13 @@
               <a:rPr lang="en-US"/>
               <a:t>Fifth level</a:t>
             </a:r>
-            <a:endParaRPr lang="id-ID"/>
-          </a:p>
-        </p:txBody>
-      </p:sp>
-      <p:sp>
-        <p:nvSpPr>
-          <p:cNvPr id="4" name="Date Placeholder 3">
-            <a:extLst>
-              <a:ext uri="{FF2B5EF4-FFF2-40B4-BE49-F238E27FC236}">
-                <a16:creationId xmlns:a16="http://schemas.microsoft.com/office/drawing/2014/main" id="{3ACF92CD-4437-20B7-EA41-3615DEE4C347}"/>
-              </a:ext>
-            </a:extLst>
-          </p:cNvPr>
+            <a:endParaRPr lang="en-US" dirty="0"/>
+          </a:p>
+        </p:txBody>
+      </p:sp>
+      <p:sp>
+        <p:nvSpPr>
+          <p:cNvPr id="4" name="Date Placeholder 3"/>
           <p:cNvSpPr>
             <a:spLocks noGrp="1"/>
           </p:cNvSpPr>
@@ -870,7 +909,7 @@
           <a:p>
             <a:fld id="{9934508E-F4F0-45DC-A7F4-4636DDC6725B}" type="datetimeFigureOut">
               <a:rPr lang="id-ID" smtClean="0"/>
-              <a:t>26/06/2026</a:t>
+              <a:t>06/07/2026</a:t>
             </a:fld>
             <a:endParaRPr lang="id-ID"/>
           </a:p>
@@ -878,13 +917,7 @@
       </p:sp>
       <p:sp>
         <p:nvSpPr>
-          <p:cNvPr id="5" name="Footer Placeholder 4">
-            <a:extLst>
-              <a:ext uri="{FF2B5EF4-FFF2-40B4-BE49-F238E27FC236}">
-                <a16:creationId xmlns:a16="http://schemas.microsoft.com/office/drawing/2014/main" id="{AA24CE4A-2736-0F50-CE71-C04A85D5F2EB}"/>
-              </a:ext>
-            </a:extLst>
-          </p:cNvPr>
+          <p:cNvPr id="5" name="Footer Placeholder 4"/>
           <p:cNvSpPr>
             <a:spLocks noGrp="1"/>
           </p:cNvSpPr>
@@ -903,13 +936,7 @@
       </p:sp>
       <p:sp>
         <p:nvSpPr>
-          <p:cNvPr id="6" name="Slide Number Placeholder 5">
-            <a:extLst>
-              <a:ext uri="{FF2B5EF4-FFF2-40B4-BE49-F238E27FC236}">
-                <a16:creationId xmlns:a16="http://schemas.microsoft.com/office/drawing/2014/main" id="{A11BCE11-E902-A006-D6C2-4C51D4D16371}"/>
-              </a:ext>
-            </a:extLst>
-          </p:cNvPr>
+          <p:cNvPr id="6" name="Slide Number Placeholder 5"/>
           <p:cNvSpPr>
             <a:spLocks noGrp="1"/>
           </p:cNvSpPr>
@@ -930,10 +957,41 @@
           </a:p>
         </p:txBody>
       </p:sp>
+      <p:cxnSp>
+        <p:nvCxnSpPr>
+          <p:cNvPr id="33" name="Straight Connector 32"/>
+          <p:cNvCxnSpPr/>
+          <p:nvPr/>
+        </p:nvCxnSpPr>
+        <p:spPr>
+          <a:xfrm>
+            <a:off x="1453896" y="1847088"/>
+            <a:ext cx="9607522" cy="0"/>
+          </a:xfrm>
+          <a:prstGeom prst="line">
+            <a:avLst/>
+          </a:prstGeom>
+          <a:ln w="31750"/>
+        </p:spPr>
+        <p:style>
+          <a:lnRef idx="3">
+            <a:schemeClr val="accent1"/>
+          </a:lnRef>
+          <a:fillRef idx="0">
+            <a:schemeClr val="accent1"/>
+          </a:fillRef>
+          <a:effectRef idx="2">
+            <a:schemeClr val="accent1"/>
+          </a:effectRef>
+          <a:fontRef idx="minor">
+            <a:schemeClr val="tx1"/>
+          </a:fontRef>
+        </p:style>
+      </p:cxnSp>
     </p:spTree>
     <p:extLst>
       <p:ext uri="{BB962C8B-B14F-4D97-AF65-F5344CB8AC3E}">
-        <p14:creationId xmlns:p14="http://schemas.microsoft.com/office/powerpoint/2010/main" val="2690843951"/>
+        <p14:creationId xmlns:p14="http://schemas.microsoft.com/office/powerpoint/2010/main" val="3796788499"/>
       </p:ext>
     </p:extLst>
   </p:cSld>
@@ -962,13 +1020,7 @@
       </p:grpSpPr>
       <p:sp>
         <p:nvSpPr>
-          <p:cNvPr id="2" name="Title 1">
-            <a:extLst>
-              <a:ext uri="{FF2B5EF4-FFF2-40B4-BE49-F238E27FC236}">
-                <a16:creationId xmlns:a16="http://schemas.microsoft.com/office/drawing/2014/main" id="{3ABC4BA2-BE16-A55C-BFD2-2C4CBCD25B1C}"/>
-              </a:ext>
-            </a:extLst>
-          </p:cNvPr>
+          <p:cNvPr id="2" name="Title 1"/>
           <p:cNvSpPr>
             <a:spLocks noGrp="1"/>
           </p:cNvSpPr>
@@ -978,15 +1030,17 @@
         </p:nvSpPr>
         <p:spPr>
           <a:xfrm>
-            <a:off x="831850" y="1709738"/>
-            <a:ext cx="10515600" cy="2852737"/>
-          </a:xfrm>
-        </p:spPr>
-        <p:txBody>
-          <a:bodyPr anchor="b"/>
+            <a:off x="1454239" y="1756130"/>
+            <a:ext cx="8643154" cy="1887950"/>
+          </a:xfrm>
+        </p:spPr>
+        <p:txBody>
+          <a:bodyPr anchor="b">
+            <a:normAutofit/>
+          </a:bodyPr>
           <a:lstStyle>
-            <a:lvl1pPr>
-              <a:defRPr sz="6000"/>
+            <a:lvl1pPr algn="l">
+              <a:defRPr sz="3600"/>
             </a:lvl1pPr>
           </a:lstStyle>
           <a:p>
@@ -994,19 +1048,13 @@
               <a:rPr lang="en-US"/>
               <a:t>Click to edit Master title style</a:t>
             </a:r>
-            <a:endParaRPr lang="id-ID"/>
-          </a:p>
-        </p:txBody>
-      </p:sp>
-      <p:sp>
-        <p:nvSpPr>
-          <p:cNvPr id="3" name="Text Placeholder 2">
-            <a:extLst>
-              <a:ext uri="{FF2B5EF4-FFF2-40B4-BE49-F238E27FC236}">
-                <a16:creationId xmlns:a16="http://schemas.microsoft.com/office/drawing/2014/main" id="{9E1FF249-5132-76B9-485E-BA013ED974B2}"/>
-              </a:ext>
-            </a:extLst>
-          </p:cNvPr>
+            <a:endParaRPr lang="en-US" dirty="0"/>
+          </a:p>
+        </p:txBody>
+      </p:sp>
+      <p:sp>
+        <p:nvSpPr>
+          <p:cNvPr id="3" name="Text Placeholder 2"/>
           <p:cNvSpPr>
             <a:spLocks noGrp="1"/>
           </p:cNvSpPr>
@@ -1016,29 +1064,29 @@
         </p:nvSpPr>
         <p:spPr>
           <a:xfrm>
-            <a:off x="831850" y="4589463"/>
-            <a:ext cx="10515600" cy="1500187"/>
-          </a:xfrm>
-        </p:spPr>
-        <p:txBody>
-          <a:bodyPr/>
+            <a:off x="1454239" y="3806195"/>
+            <a:ext cx="8630446" cy="1012929"/>
+          </a:xfrm>
+        </p:spPr>
+        <p:txBody>
+          <a:bodyPr tIns="91440">
+            <a:normAutofit/>
+          </a:bodyPr>
           <a:lstStyle>
-            <a:lvl1pPr marL="0" indent="0">
-              <a:buNone/>
-              <a:defRPr sz="2400">
+            <a:lvl1pPr marL="0" indent="0" algn="l">
+              <a:buNone/>
+              <a:defRPr sz="1800">
                 <a:solidFill>
-                  <a:schemeClr val="tx1">
-                    <a:tint val="82000"/>
-                  </a:schemeClr>
+                  <a:schemeClr val="tx1"/>
                 </a:solidFill>
               </a:defRPr>
             </a:lvl1pPr>
             <a:lvl2pPr marL="457200" indent="0">
               <a:buNone/>
-              <a:defRPr sz="2000">
+              <a:defRPr sz="1800">
                 <a:solidFill>
                   <a:schemeClr val="tx1">
-                    <a:tint val="82000"/>
+                    <a:tint val="75000"/>
                   </a:schemeClr>
                 </a:solidFill>
               </a:defRPr>
@@ -1048,7 +1096,7 @@
               <a:defRPr sz="1800">
                 <a:solidFill>
                   <a:schemeClr val="tx1">
-                    <a:tint val="82000"/>
+                    <a:tint val="75000"/>
                   </a:schemeClr>
                 </a:solidFill>
               </a:defRPr>
@@ -1058,7 +1106,7 @@
               <a:defRPr sz="1600">
                 <a:solidFill>
                   <a:schemeClr val="tx1">
-                    <a:tint val="82000"/>
+                    <a:tint val="75000"/>
                   </a:schemeClr>
                 </a:solidFill>
               </a:defRPr>
@@ -1068,7 +1116,7 @@
               <a:defRPr sz="1600">
                 <a:solidFill>
                   <a:schemeClr val="tx1">
-                    <a:tint val="82000"/>
+                    <a:tint val="75000"/>
                   </a:schemeClr>
                 </a:solidFill>
               </a:defRPr>
@@ -1078,7 +1126,7 @@
               <a:defRPr sz="1600">
                 <a:solidFill>
                   <a:schemeClr val="tx1">
-                    <a:tint val="82000"/>
+                    <a:tint val="75000"/>
                   </a:schemeClr>
                 </a:solidFill>
               </a:defRPr>
@@ -1088,7 +1136,7 @@
               <a:defRPr sz="1600">
                 <a:solidFill>
                   <a:schemeClr val="tx1">
-                    <a:tint val="82000"/>
+                    <a:tint val="75000"/>
                   </a:schemeClr>
                 </a:solidFill>
               </a:defRPr>
@@ -1098,7 +1146,7 @@
               <a:defRPr sz="1600">
                 <a:solidFill>
                   <a:schemeClr val="tx1">
-                    <a:tint val="82000"/>
+                    <a:tint val="75000"/>
                   </a:schemeClr>
                 </a:solidFill>
               </a:defRPr>
@@ -1108,7 +1156,7 @@
               <a:defRPr sz="1600">
                 <a:solidFill>
                   <a:schemeClr val="tx1">
-                    <a:tint val="82000"/>
+                    <a:tint val="75000"/>
                   </a:schemeClr>
                 </a:solidFill>
               </a:defRPr>
@@ -1125,13 +1173,7 @@
       </p:sp>
       <p:sp>
         <p:nvSpPr>
-          <p:cNvPr id="4" name="Date Placeholder 3">
-            <a:extLst>
-              <a:ext uri="{FF2B5EF4-FFF2-40B4-BE49-F238E27FC236}">
-                <a16:creationId xmlns:a16="http://schemas.microsoft.com/office/drawing/2014/main" id="{EADD198D-A963-B1E9-2F40-4E909ECEE7F6}"/>
-              </a:ext>
-            </a:extLst>
-          </p:cNvPr>
+          <p:cNvPr id="4" name="Date Placeholder 3"/>
           <p:cNvSpPr>
             <a:spLocks noGrp="1"/>
           </p:cNvSpPr>
@@ -1146,7 +1188,7 @@
           <a:p>
             <a:fld id="{9934508E-F4F0-45DC-A7F4-4636DDC6725B}" type="datetimeFigureOut">
               <a:rPr lang="id-ID" smtClean="0"/>
-              <a:t>26/06/2026</a:t>
+              <a:t>06/07/2026</a:t>
             </a:fld>
             <a:endParaRPr lang="id-ID"/>
           </a:p>
@@ -1154,13 +1196,7 @@
       </p:sp>
       <p:sp>
         <p:nvSpPr>
-          <p:cNvPr id="5" name="Footer Placeholder 4">
-            <a:extLst>
-              <a:ext uri="{FF2B5EF4-FFF2-40B4-BE49-F238E27FC236}">
-                <a16:creationId xmlns:a16="http://schemas.microsoft.com/office/drawing/2014/main" id="{5952BF9C-750A-257B-DB87-9E03C9E2FD2F}"/>
-              </a:ext>
-            </a:extLst>
-          </p:cNvPr>
+          <p:cNvPr id="5" name="Footer Placeholder 4"/>
           <p:cNvSpPr>
             <a:spLocks noGrp="1"/>
           </p:cNvSpPr>
@@ -1179,13 +1215,7 @@
       </p:sp>
       <p:sp>
         <p:nvSpPr>
-          <p:cNvPr id="6" name="Slide Number Placeholder 5">
-            <a:extLst>
-              <a:ext uri="{FF2B5EF4-FFF2-40B4-BE49-F238E27FC236}">
-                <a16:creationId xmlns:a16="http://schemas.microsoft.com/office/drawing/2014/main" id="{09638E3A-C3EB-4A01-47FA-7099B2DF875D}"/>
-              </a:ext>
-            </a:extLst>
-          </p:cNvPr>
+          <p:cNvPr id="6" name="Slide Number Placeholder 5"/>
           <p:cNvSpPr>
             <a:spLocks noGrp="1"/>
           </p:cNvSpPr>
@@ -1206,10 +1236,41 @@
           </a:p>
         </p:txBody>
       </p:sp>
+      <p:cxnSp>
+        <p:nvCxnSpPr>
+          <p:cNvPr id="15" name="Straight Connector 14"/>
+          <p:cNvCxnSpPr/>
+          <p:nvPr/>
+        </p:nvCxnSpPr>
+        <p:spPr>
+          <a:xfrm>
+            <a:off x="1454239" y="3804985"/>
+            <a:ext cx="8630446" cy="0"/>
+          </a:xfrm>
+          <a:prstGeom prst="line">
+            <a:avLst/>
+          </a:prstGeom>
+          <a:ln w="31750"/>
+        </p:spPr>
+        <p:style>
+          <a:lnRef idx="3">
+            <a:schemeClr val="accent1"/>
+          </a:lnRef>
+          <a:fillRef idx="0">
+            <a:schemeClr val="accent1"/>
+          </a:fillRef>
+          <a:effectRef idx="2">
+            <a:schemeClr val="accent1"/>
+          </a:effectRef>
+          <a:fontRef idx="minor">
+            <a:schemeClr val="tx1"/>
+          </a:fontRef>
+        </p:style>
+      </p:cxnSp>
     </p:spTree>
     <p:extLst>
       <p:ext uri="{BB962C8B-B14F-4D97-AF65-F5344CB8AC3E}">
-        <p14:creationId xmlns:p14="http://schemas.microsoft.com/office/powerpoint/2010/main" val="2769589136"/>
+        <p14:creationId xmlns:p14="http://schemas.microsoft.com/office/powerpoint/2010/main" val="2804697418"/>
       </p:ext>
     </p:extLst>
   </p:cSld>
@@ -1238,13 +1299,7 @@
       </p:grpSpPr>
       <p:sp>
         <p:nvSpPr>
-          <p:cNvPr id="2" name="Title 1">
-            <a:extLst>
-              <a:ext uri="{FF2B5EF4-FFF2-40B4-BE49-F238E27FC236}">
-                <a16:creationId xmlns:a16="http://schemas.microsoft.com/office/drawing/2014/main" id="{8C874C96-D102-47E5-717E-190E04A985BA}"/>
-              </a:ext>
-            </a:extLst>
-          </p:cNvPr>
+          <p:cNvPr id="2" name="Title 1"/>
           <p:cNvSpPr>
             <a:spLocks noGrp="1"/>
           </p:cNvSpPr>
@@ -1252,7 +1307,12 @@
             <p:ph type="title"/>
           </p:nvPr>
         </p:nvSpPr>
-        <p:spPr/>
+        <p:spPr>
+          <a:xfrm>
+            <a:off x="1449217" y="804889"/>
+            <a:ext cx="9605635" cy="1059305"/>
+          </a:xfrm>
+        </p:spPr>
         <p:txBody>
           <a:bodyPr/>
           <a:lstStyle/>
@@ -1261,19 +1321,13 @@
               <a:rPr lang="en-US"/>
               <a:t>Click to edit Master title style</a:t>
             </a:r>
-            <a:endParaRPr lang="id-ID"/>
-          </a:p>
-        </p:txBody>
-      </p:sp>
-      <p:sp>
-        <p:nvSpPr>
-          <p:cNvPr id="3" name="Content Placeholder 2">
-            <a:extLst>
-              <a:ext uri="{FF2B5EF4-FFF2-40B4-BE49-F238E27FC236}">
-                <a16:creationId xmlns:a16="http://schemas.microsoft.com/office/drawing/2014/main" id="{9E374B9A-0E05-92B8-0999-44011E499F7F}"/>
-              </a:ext>
-            </a:extLst>
-          </p:cNvPr>
+            <a:endParaRPr lang="en-US" dirty="0"/>
+          </a:p>
+        </p:txBody>
+      </p:sp>
+      <p:sp>
+        <p:nvSpPr>
+          <p:cNvPr id="3" name="Content Placeholder 2"/>
           <p:cNvSpPr>
             <a:spLocks noGrp="1"/>
           </p:cNvSpPr>
@@ -1283,8 +1337,8 @@
         </p:nvSpPr>
         <p:spPr>
           <a:xfrm>
-            <a:off x="838200" y="1825625"/>
-            <a:ext cx="5181600" cy="4351338"/>
+            <a:off x="1447331" y="2010878"/>
+            <a:ext cx="4645152" cy="3448595"/>
           </a:xfrm>
         </p:spPr>
         <p:txBody>
@@ -1324,19 +1378,13 @@
               <a:rPr lang="en-US"/>
               <a:t>Fifth level</a:t>
             </a:r>
-            <a:endParaRPr lang="id-ID"/>
-          </a:p>
-        </p:txBody>
-      </p:sp>
-      <p:sp>
-        <p:nvSpPr>
-          <p:cNvPr id="4" name="Content Placeholder 3">
-            <a:extLst>
-              <a:ext uri="{FF2B5EF4-FFF2-40B4-BE49-F238E27FC236}">
-                <a16:creationId xmlns:a16="http://schemas.microsoft.com/office/drawing/2014/main" id="{859EF05E-FD65-389A-BDBC-D6CE406A9B3D}"/>
-              </a:ext>
-            </a:extLst>
-          </p:cNvPr>
+            <a:endParaRPr lang="en-US" dirty="0"/>
+          </a:p>
+        </p:txBody>
+      </p:sp>
+      <p:sp>
+        <p:nvSpPr>
+          <p:cNvPr id="4" name="Content Placeholder 3"/>
           <p:cNvSpPr>
             <a:spLocks noGrp="1"/>
           </p:cNvSpPr>
@@ -1346,8 +1394,8 @@
         </p:nvSpPr>
         <p:spPr>
           <a:xfrm>
-            <a:off x="6172200" y="1825625"/>
-            <a:ext cx="5181600" cy="4351338"/>
+            <a:off x="6413771" y="2017343"/>
+            <a:ext cx="4645152" cy="3441520"/>
           </a:xfrm>
         </p:spPr>
         <p:txBody>
@@ -1387,19 +1435,13 @@
               <a:rPr lang="en-US"/>
               <a:t>Fifth level</a:t>
             </a:r>
-            <a:endParaRPr lang="id-ID"/>
-          </a:p>
-        </p:txBody>
-      </p:sp>
-      <p:sp>
-        <p:nvSpPr>
-          <p:cNvPr id="5" name="Date Placeholder 4">
-            <a:extLst>
-              <a:ext uri="{FF2B5EF4-FFF2-40B4-BE49-F238E27FC236}">
-                <a16:creationId xmlns:a16="http://schemas.microsoft.com/office/drawing/2014/main" id="{474FEA34-7E5B-1139-AAEB-16A97266DB4C}"/>
-              </a:ext>
-            </a:extLst>
-          </p:cNvPr>
+            <a:endParaRPr lang="en-US" dirty="0"/>
+          </a:p>
+        </p:txBody>
+      </p:sp>
+      <p:sp>
+        <p:nvSpPr>
+          <p:cNvPr id="5" name="Date Placeholder 4"/>
           <p:cNvSpPr>
             <a:spLocks noGrp="1"/>
           </p:cNvSpPr>
@@ -1414,7 +1456,7 @@
           <a:p>
             <a:fld id="{9934508E-F4F0-45DC-A7F4-4636DDC6725B}" type="datetimeFigureOut">
               <a:rPr lang="id-ID" smtClean="0"/>
-              <a:t>26/06/2026</a:t>
+              <a:t>06/07/2026</a:t>
             </a:fld>
             <a:endParaRPr lang="id-ID"/>
           </a:p>
@@ -1422,13 +1464,7 @@
       </p:sp>
       <p:sp>
         <p:nvSpPr>
-          <p:cNvPr id="6" name="Footer Placeholder 5">
-            <a:extLst>
-              <a:ext uri="{FF2B5EF4-FFF2-40B4-BE49-F238E27FC236}">
-                <a16:creationId xmlns:a16="http://schemas.microsoft.com/office/drawing/2014/main" id="{645B51B6-C174-84D3-5735-265EBBDA1B4E}"/>
-              </a:ext>
-            </a:extLst>
-          </p:cNvPr>
+          <p:cNvPr id="6" name="Footer Placeholder 5"/>
           <p:cNvSpPr>
             <a:spLocks noGrp="1"/>
           </p:cNvSpPr>
@@ -1447,13 +1483,7 @@
       </p:sp>
       <p:sp>
         <p:nvSpPr>
-          <p:cNvPr id="7" name="Slide Number Placeholder 6">
-            <a:extLst>
-              <a:ext uri="{FF2B5EF4-FFF2-40B4-BE49-F238E27FC236}">
-                <a16:creationId xmlns:a16="http://schemas.microsoft.com/office/drawing/2014/main" id="{BF8B22F0-608F-599A-CB0E-A25DCA5EFD20}"/>
-              </a:ext>
-            </a:extLst>
-          </p:cNvPr>
+          <p:cNvPr id="7" name="Slide Number Placeholder 6"/>
           <p:cNvSpPr>
             <a:spLocks noGrp="1"/>
           </p:cNvSpPr>
@@ -1474,10 +1504,41 @@
           </a:p>
         </p:txBody>
       </p:sp>
+      <p:cxnSp>
+        <p:nvCxnSpPr>
+          <p:cNvPr id="35" name="Straight Connector 34"/>
+          <p:cNvCxnSpPr/>
+          <p:nvPr/>
+        </p:nvCxnSpPr>
+        <p:spPr>
+          <a:xfrm>
+            <a:off x="1453896" y="1847088"/>
+            <a:ext cx="9607522" cy="0"/>
+          </a:xfrm>
+          <a:prstGeom prst="line">
+            <a:avLst/>
+          </a:prstGeom>
+          <a:ln w="31750"/>
+        </p:spPr>
+        <p:style>
+          <a:lnRef idx="3">
+            <a:schemeClr val="accent1"/>
+          </a:lnRef>
+          <a:fillRef idx="0">
+            <a:schemeClr val="accent1"/>
+          </a:fillRef>
+          <a:effectRef idx="2">
+            <a:schemeClr val="accent1"/>
+          </a:effectRef>
+          <a:fontRef idx="minor">
+            <a:schemeClr val="tx1"/>
+          </a:fontRef>
+        </p:style>
+      </p:cxnSp>
     </p:spTree>
     <p:extLst>
       <p:ext uri="{BB962C8B-B14F-4D97-AF65-F5344CB8AC3E}">
-        <p14:creationId xmlns:p14="http://schemas.microsoft.com/office/powerpoint/2010/main" val="2253047745"/>
+        <p14:creationId xmlns:p14="http://schemas.microsoft.com/office/powerpoint/2010/main" val="919394746"/>
       </p:ext>
     </p:extLst>
   </p:cSld>
@@ -1506,13 +1567,7 @@
       </p:grpSpPr>
       <p:sp>
         <p:nvSpPr>
-          <p:cNvPr id="2" name="Title 1">
-            <a:extLst>
-              <a:ext uri="{FF2B5EF4-FFF2-40B4-BE49-F238E27FC236}">
-                <a16:creationId xmlns:a16="http://schemas.microsoft.com/office/drawing/2014/main" id="{76DFD2B5-02BE-81D4-1A91-68EDC259543F}"/>
-              </a:ext>
-            </a:extLst>
-          </p:cNvPr>
+          <p:cNvPr id="2" name="Title 1"/>
           <p:cNvSpPr>
             <a:spLocks noGrp="1"/>
           </p:cNvSpPr>
@@ -1522,8 +1577,8 @@
         </p:nvSpPr>
         <p:spPr>
           <a:xfrm>
-            <a:off x="839788" y="365125"/>
-            <a:ext cx="10515600" cy="1325563"/>
+            <a:off x="1447191" y="804163"/>
+            <a:ext cx="9607661" cy="1056319"/>
           </a:xfrm>
         </p:spPr>
         <p:txBody>
@@ -1534,19 +1589,13 @@
               <a:rPr lang="en-US"/>
               <a:t>Click to edit Master title style</a:t>
             </a:r>
-            <a:endParaRPr lang="id-ID"/>
-          </a:p>
-        </p:txBody>
-      </p:sp>
-      <p:sp>
-        <p:nvSpPr>
-          <p:cNvPr id="3" name="Text Placeholder 2">
-            <a:extLst>
-              <a:ext uri="{FF2B5EF4-FFF2-40B4-BE49-F238E27FC236}">
-                <a16:creationId xmlns:a16="http://schemas.microsoft.com/office/drawing/2014/main" id="{27A20CEB-0E1F-3CA5-8AE1-54EABD5698D5}"/>
-              </a:ext>
-            </a:extLst>
-          </p:cNvPr>
+            <a:endParaRPr lang="en-US" dirty="0"/>
+          </a:p>
+        </p:txBody>
+      </p:sp>
+      <p:sp>
+        <p:nvSpPr>
+          <p:cNvPr id="3" name="Text Placeholder 2"/>
           <p:cNvSpPr>
             <a:spLocks noGrp="1"/>
           </p:cNvSpPr>
@@ -1556,16 +1605,25 @@
         </p:nvSpPr>
         <p:spPr>
           <a:xfrm>
-            <a:off x="839788" y="1681163"/>
-            <a:ext cx="5157787" cy="823912"/>
-          </a:xfrm>
-        </p:spPr>
-        <p:txBody>
-          <a:bodyPr anchor="b"/>
+            <a:off x="1447191" y="2019549"/>
+            <a:ext cx="4645152" cy="801943"/>
+          </a:xfrm>
+        </p:spPr>
+        <p:txBody>
+          <a:bodyPr anchor="b">
+            <a:normAutofit/>
+          </a:bodyPr>
           <a:lstStyle>
             <a:lvl1pPr marL="0" indent="0">
-              <a:buNone/>
-              <a:defRPr sz="2400" b="1"/>
+              <a:lnSpc>
+                <a:spcPct val="100000"/>
+              </a:lnSpc>
+              <a:buNone/>
+              <a:defRPr sz="2200" b="0" cap="all" baseline="0">
+                <a:solidFill>
+                  <a:schemeClr val="accent1"/>
+                </a:solidFill>
+              </a:defRPr>
             </a:lvl1pPr>
             <a:lvl2pPr marL="457200" indent="0">
               <a:buNone/>
@@ -1611,13 +1669,7 @@
       </p:sp>
       <p:sp>
         <p:nvSpPr>
-          <p:cNvPr id="4" name="Content Placeholder 3">
-            <a:extLst>
-              <a:ext uri="{FF2B5EF4-FFF2-40B4-BE49-F238E27FC236}">
-                <a16:creationId xmlns:a16="http://schemas.microsoft.com/office/drawing/2014/main" id="{D7016DEF-1D92-F9A8-364D-B8596AB66F99}"/>
-              </a:ext>
-            </a:extLst>
-          </p:cNvPr>
+          <p:cNvPr id="4" name="Content Placeholder 3"/>
           <p:cNvSpPr>
             <a:spLocks noGrp="1"/>
           </p:cNvSpPr>
@@ -1627,8 +1679,8 @@
         </p:nvSpPr>
         <p:spPr>
           <a:xfrm>
-            <a:off x="839788" y="2505075"/>
-            <a:ext cx="5157787" cy="3684588"/>
+            <a:off x="1447191" y="2824269"/>
+            <a:ext cx="4645152" cy="2644457"/>
           </a:xfrm>
         </p:spPr>
         <p:txBody>
@@ -1668,19 +1720,13 @@
               <a:rPr lang="en-US"/>
               <a:t>Fifth level</a:t>
             </a:r>
-            <a:endParaRPr lang="id-ID"/>
-          </a:p>
-        </p:txBody>
-      </p:sp>
-      <p:sp>
-        <p:nvSpPr>
-          <p:cNvPr id="5" name="Text Placeholder 4">
-            <a:extLst>
-              <a:ext uri="{FF2B5EF4-FFF2-40B4-BE49-F238E27FC236}">
-                <a16:creationId xmlns:a16="http://schemas.microsoft.com/office/drawing/2014/main" id="{5C0BD775-9016-D538-A194-4769638E1990}"/>
-              </a:ext>
-            </a:extLst>
-          </p:cNvPr>
+            <a:endParaRPr lang="en-US" dirty="0"/>
+          </a:p>
+        </p:txBody>
+      </p:sp>
+      <p:sp>
+        <p:nvSpPr>
+          <p:cNvPr id="5" name="Text Placeholder 4"/>
           <p:cNvSpPr>
             <a:spLocks noGrp="1"/>
           </p:cNvSpPr>
@@ -1690,16 +1736,25 @@
         </p:nvSpPr>
         <p:spPr>
           <a:xfrm>
-            <a:off x="6172200" y="1681163"/>
-            <a:ext cx="5183188" cy="823912"/>
-          </a:xfrm>
-        </p:spPr>
-        <p:txBody>
-          <a:bodyPr anchor="b"/>
+            <a:off x="6412362" y="2023003"/>
+            <a:ext cx="4645152" cy="802237"/>
+          </a:xfrm>
+        </p:spPr>
+        <p:txBody>
+          <a:bodyPr anchor="b">
+            <a:normAutofit/>
+          </a:bodyPr>
           <a:lstStyle>
             <a:lvl1pPr marL="0" indent="0">
-              <a:buNone/>
-              <a:defRPr sz="2400" b="1"/>
+              <a:lnSpc>
+                <a:spcPct val="100000"/>
+              </a:lnSpc>
+              <a:buNone/>
+              <a:defRPr sz="2200" b="0" cap="all" baseline="0">
+                <a:solidFill>
+                  <a:schemeClr val="accent1"/>
+                </a:solidFill>
+              </a:defRPr>
             </a:lvl1pPr>
             <a:lvl2pPr marL="457200" indent="0">
               <a:buNone/>
@@ -1745,13 +1800,7 @@
       </p:sp>
       <p:sp>
         <p:nvSpPr>
-          <p:cNvPr id="6" name="Content Placeholder 5">
-            <a:extLst>
-              <a:ext uri="{FF2B5EF4-FFF2-40B4-BE49-F238E27FC236}">
-                <a16:creationId xmlns:a16="http://schemas.microsoft.com/office/drawing/2014/main" id="{0B62BA28-5025-8347-C9DC-827C08B9BF4F}"/>
-              </a:ext>
-            </a:extLst>
-          </p:cNvPr>
+          <p:cNvPr id="6" name="Content Placeholder 5"/>
           <p:cNvSpPr>
             <a:spLocks noGrp="1"/>
           </p:cNvSpPr>
@@ -1761,8 +1810,8 @@
         </p:nvSpPr>
         <p:spPr>
           <a:xfrm>
-            <a:off x="6172200" y="2505075"/>
-            <a:ext cx="5183188" cy="3684588"/>
+            <a:off x="6412362" y="2821491"/>
+            <a:ext cx="4645152" cy="2637371"/>
           </a:xfrm>
         </p:spPr>
         <p:txBody>
@@ -1802,19 +1851,13 @@
               <a:rPr lang="en-US"/>
               <a:t>Fifth level</a:t>
             </a:r>
-            <a:endParaRPr lang="id-ID"/>
-          </a:p>
-        </p:txBody>
-      </p:sp>
-      <p:sp>
-        <p:nvSpPr>
-          <p:cNvPr id="7" name="Date Placeholder 6">
-            <a:extLst>
-              <a:ext uri="{FF2B5EF4-FFF2-40B4-BE49-F238E27FC236}">
-                <a16:creationId xmlns:a16="http://schemas.microsoft.com/office/drawing/2014/main" id="{932D83F0-790A-49DB-7E08-8BCB0A1DFCC9}"/>
-              </a:ext>
-            </a:extLst>
-          </p:cNvPr>
+            <a:endParaRPr lang="en-US" dirty="0"/>
+          </a:p>
+        </p:txBody>
+      </p:sp>
+      <p:sp>
+        <p:nvSpPr>
+          <p:cNvPr id="7" name="Date Placeholder 6"/>
           <p:cNvSpPr>
             <a:spLocks noGrp="1"/>
           </p:cNvSpPr>
@@ -1829,7 +1872,7 @@
           <a:p>
             <a:fld id="{9934508E-F4F0-45DC-A7F4-4636DDC6725B}" type="datetimeFigureOut">
               <a:rPr lang="id-ID" smtClean="0"/>
-              <a:t>26/06/2026</a:t>
+              <a:t>06/07/2026</a:t>
             </a:fld>
             <a:endParaRPr lang="id-ID"/>
           </a:p>
@@ -1837,13 +1880,7 @@
       </p:sp>
       <p:sp>
         <p:nvSpPr>
-          <p:cNvPr id="8" name="Footer Placeholder 7">
-            <a:extLst>
-              <a:ext uri="{FF2B5EF4-FFF2-40B4-BE49-F238E27FC236}">
-                <a16:creationId xmlns:a16="http://schemas.microsoft.com/office/drawing/2014/main" id="{A798DD29-81AA-60ED-2E08-A98A91FB1EBE}"/>
-              </a:ext>
-            </a:extLst>
-          </p:cNvPr>
+          <p:cNvPr id="8" name="Footer Placeholder 7"/>
           <p:cNvSpPr>
             <a:spLocks noGrp="1"/>
           </p:cNvSpPr>
@@ -1862,13 +1899,7 @@
       </p:sp>
       <p:sp>
         <p:nvSpPr>
-          <p:cNvPr id="9" name="Slide Number Placeholder 8">
-            <a:extLst>
-              <a:ext uri="{FF2B5EF4-FFF2-40B4-BE49-F238E27FC236}">
-                <a16:creationId xmlns:a16="http://schemas.microsoft.com/office/drawing/2014/main" id="{9F1715C8-A3BA-6E1D-40F9-55A9FB918210}"/>
-              </a:ext>
-            </a:extLst>
-          </p:cNvPr>
+          <p:cNvPr id="9" name="Slide Number Placeholder 8"/>
           <p:cNvSpPr>
             <a:spLocks noGrp="1"/>
           </p:cNvSpPr>
@@ -1889,10 +1920,41 @@
           </a:p>
         </p:txBody>
       </p:sp>
+      <p:cxnSp>
+        <p:nvCxnSpPr>
+          <p:cNvPr id="29" name="Straight Connector 28"/>
+          <p:cNvCxnSpPr/>
+          <p:nvPr/>
+        </p:nvCxnSpPr>
+        <p:spPr>
+          <a:xfrm>
+            <a:off x="1453896" y="1847088"/>
+            <a:ext cx="9607522" cy="0"/>
+          </a:xfrm>
+          <a:prstGeom prst="line">
+            <a:avLst/>
+          </a:prstGeom>
+          <a:ln w="31750"/>
+        </p:spPr>
+        <p:style>
+          <a:lnRef idx="3">
+            <a:schemeClr val="accent1"/>
+          </a:lnRef>
+          <a:fillRef idx="0">
+            <a:schemeClr val="accent1"/>
+          </a:fillRef>
+          <a:effectRef idx="2">
+            <a:schemeClr val="accent1"/>
+          </a:effectRef>
+          <a:fontRef idx="minor">
+            <a:schemeClr val="tx1"/>
+          </a:fontRef>
+        </p:style>
+      </p:cxnSp>
     </p:spTree>
     <p:extLst>
       <p:ext uri="{BB962C8B-B14F-4D97-AF65-F5344CB8AC3E}">
-        <p14:creationId xmlns:p14="http://schemas.microsoft.com/office/powerpoint/2010/main" val="2169374733"/>
+        <p14:creationId xmlns:p14="http://schemas.microsoft.com/office/powerpoint/2010/main" val="2890434433"/>
       </p:ext>
     </p:extLst>
   </p:cSld>
@@ -1921,13 +1983,7 @@
       </p:grpSpPr>
       <p:sp>
         <p:nvSpPr>
-          <p:cNvPr id="2" name="Title 1">
-            <a:extLst>
-              <a:ext uri="{FF2B5EF4-FFF2-40B4-BE49-F238E27FC236}">
-                <a16:creationId xmlns:a16="http://schemas.microsoft.com/office/drawing/2014/main" id="{B5EA343B-CE77-5CD3-4B95-3D19588D4129}"/>
-              </a:ext>
-            </a:extLst>
-          </p:cNvPr>
+          <p:cNvPr id="2" name="Title 1"/>
           <p:cNvSpPr>
             <a:spLocks noGrp="1"/>
           </p:cNvSpPr>
@@ -1944,19 +2000,13 @@
               <a:rPr lang="en-US"/>
               <a:t>Click to edit Master title style</a:t>
             </a:r>
-            <a:endParaRPr lang="id-ID"/>
-          </a:p>
-        </p:txBody>
-      </p:sp>
-      <p:sp>
-        <p:nvSpPr>
-          <p:cNvPr id="3" name="Date Placeholder 2">
-            <a:extLst>
-              <a:ext uri="{FF2B5EF4-FFF2-40B4-BE49-F238E27FC236}">
-                <a16:creationId xmlns:a16="http://schemas.microsoft.com/office/drawing/2014/main" id="{B09E6EC7-0DF2-A52C-BFC5-872121CBCEAB}"/>
-              </a:ext>
-            </a:extLst>
-          </p:cNvPr>
+            <a:endParaRPr lang="en-US" dirty="0"/>
+          </a:p>
+        </p:txBody>
+      </p:sp>
+      <p:sp>
+        <p:nvSpPr>
+          <p:cNvPr id="3" name="Date Placeholder 2"/>
           <p:cNvSpPr>
             <a:spLocks noGrp="1"/>
           </p:cNvSpPr>
@@ -1971,7 +2021,7 @@
           <a:p>
             <a:fld id="{9934508E-F4F0-45DC-A7F4-4636DDC6725B}" type="datetimeFigureOut">
               <a:rPr lang="id-ID" smtClean="0"/>
-              <a:t>26/06/2026</a:t>
+              <a:t>06/07/2026</a:t>
             </a:fld>
             <a:endParaRPr lang="id-ID"/>
           </a:p>
@@ -1979,13 +2029,7 @@
       </p:sp>
       <p:sp>
         <p:nvSpPr>
-          <p:cNvPr id="4" name="Footer Placeholder 3">
-            <a:extLst>
-              <a:ext uri="{FF2B5EF4-FFF2-40B4-BE49-F238E27FC236}">
-                <a16:creationId xmlns:a16="http://schemas.microsoft.com/office/drawing/2014/main" id="{03D362F4-21B3-8D6E-4C72-B9B499BB32DB}"/>
-              </a:ext>
-            </a:extLst>
-          </p:cNvPr>
+          <p:cNvPr id="4" name="Footer Placeholder 3"/>
           <p:cNvSpPr>
             <a:spLocks noGrp="1"/>
           </p:cNvSpPr>
@@ -2004,13 +2048,7 @@
       </p:sp>
       <p:sp>
         <p:nvSpPr>
-          <p:cNvPr id="5" name="Slide Number Placeholder 4">
-            <a:extLst>
-              <a:ext uri="{FF2B5EF4-FFF2-40B4-BE49-F238E27FC236}">
-                <a16:creationId xmlns:a16="http://schemas.microsoft.com/office/drawing/2014/main" id="{8E840FA2-C51B-4980-7406-7DB04B507605}"/>
-              </a:ext>
-            </a:extLst>
-          </p:cNvPr>
+          <p:cNvPr id="5" name="Slide Number Placeholder 4"/>
           <p:cNvSpPr>
             <a:spLocks noGrp="1"/>
           </p:cNvSpPr>
@@ -2031,10 +2069,41 @@
           </a:p>
         </p:txBody>
       </p:sp>
+      <p:cxnSp>
+        <p:nvCxnSpPr>
+          <p:cNvPr id="25" name="Straight Connector 24"/>
+          <p:cNvCxnSpPr/>
+          <p:nvPr/>
+        </p:nvCxnSpPr>
+        <p:spPr>
+          <a:xfrm>
+            <a:off x="1453896" y="1847088"/>
+            <a:ext cx="9607522" cy="0"/>
+          </a:xfrm>
+          <a:prstGeom prst="line">
+            <a:avLst/>
+          </a:prstGeom>
+          <a:ln w="31750"/>
+        </p:spPr>
+        <p:style>
+          <a:lnRef idx="3">
+            <a:schemeClr val="accent1"/>
+          </a:lnRef>
+          <a:fillRef idx="0">
+            <a:schemeClr val="accent1"/>
+          </a:fillRef>
+          <a:effectRef idx="2">
+            <a:schemeClr val="accent1"/>
+          </a:effectRef>
+          <a:fontRef idx="minor">
+            <a:schemeClr val="tx1"/>
+          </a:fontRef>
+        </p:style>
+      </p:cxnSp>
     </p:spTree>
     <p:extLst>
       <p:ext uri="{BB962C8B-B14F-4D97-AF65-F5344CB8AC3E}">
-        <p14:creationId xmlns:p14="http://schemas.microsoft.com/office/powerpoint/2010/main" val="3652533362"/>
+        <p14:creationId xmlns:p14="http://schemas.microsoft.com/office/powerpoint/2010/main" val="72736417"/>
       </p:ext>
     </p:extLst>
   </p:cSld>
@@ -2063,13 +2132,7 @@
       </p:grpSpPr>
       <p:sp>
         <p:nvSpPr>
-          <p:cNvPr id="2" name="Date Placeholder 1">
-            <a:extLst>
-              <a:ext uri="{FF2B5EF4-FFF2-40B4-BE49-F238E27FC236}">
-                <a16:creationId xmlns:a16="http://schemas.microsoft.com/office/drawing/2014/main" id="{554190AE-DFE0-BA40-78FB-E43D862E756C}"/>
-              </a:ext>
-            </a:extLst>
-          </p:cNvPr>
+          <p:cNvPr id="2" name="Date Placeholder 1"/>
           <p:cNvSpPr>
             <a:spLocks noGrp="1"/>
           </p:cNvSpPr>
@@ -2084,7 +2147,7 @@
           <a:p>
             <a:fld id="{9934508E-F4F0-45DC-A7F4-4636DDC6725B}" type="datetimeFigureOut">
               <a:rPr lang="id-ID" smtClean="0"/>
-              <a:t>26/06/2026</a:t>
+              <a:t>06/07/2026</a:t>
             </a:fld>
             <a:endParaRPr lang="id-ID"/>
           </a:p>
@@ -2092,13 +2155,7 @@
       </p:sp>
       <p:sp>
         <p:nvSpPr>
-          <p:cNvPr id="3" name="Footer Placeholder 2">
-            <a:extLst>
-              <a:ext uri="{FF2B5EF4-FFF2-40B4-BE49-F238E27FC236}">
-                <a16:creationId xmlns:a16="http://schemas.microsoft.com/office/drawing/2014/main" id="{56F5FCFA-6202-460C-9C31-C51F53F31532}"/>
-              </a:ext>
-            </a:extLst>
-          </p:cNvPr>
+          <p:cNvPr id="3" name="Footer Placeholder 2"/>
           <p:cNvSpPr>
             <a:spLocks noGrp="1"/>
           </p:cNvSpPr>
@@ -2117,13 +2174,7 @@
       </p:sp>
       <p:sp>
         <p:nvSpPr>
-          <p:cNvPr id="4" name="Slide Number Placeholder 3">
-            <a:extLst>
-              <a:ext uri="{FF2B5EF4-FFF2-40B4-BE49-F238E27FC236}">
-                <a16:creationId xmlns:a16="http://schemas.microsoft.com/office/drawing/2014/main" id="{D49BAA71-31E3-FC58-A5D7-5B0F0E05C0EB}"/>
-              </a:ext>
-            </a:extLst>
-          </p:cNvPr>
+          <p:cNvPr id="4" name="Slide Number Placeholder 3"/>
           <p:cNvSpPr>
             <a:spLocks noGrp="1"/>
           </p:cNvSpPr>
@@ -2147,7 +2198,7 @@
     </p:spTree>
     <p:extLst>
       <p:ext uri="{BB962C8B-B14F-4D97-AF65-F5344CB8AC3E}">
-        <p14:creationId xmlns:p14="http://schemas.microsoft.com/office/powerpoint/2010/main" val="3817525371"/>
+        <p14:creationId xmlns:p14="http://schemas.microsoft.com/office/powerpoint/2010/main" val="246532448"/>
       </p:ext>
     </p:extLst>
   </p:cSld>
@@ -2176,13 +2227,7 @@
       </p:grpSpPr>
       <p:sp>
         <p:nvSpPr>
-          <p:cNvPr id="2" name="Title 1">
-            <a:extLst>
-              <a:ext uri="{FF2B5EF4-FFF2-40B4-BE49-F238E27FC236}">
-                <a16:creationId xmlns:a16="http://schemas.microsoft.com/office/drawing/2014/main" id="{9F93EEBC-DCB7-EE06-50DF-69E7B623B295}"/>
-              </a:ext>
-            </a:extLst>
-          </p:cNvPr>
+          <p:cNvPr id="2" name="Title 1"/>
           <p:cNvSpPr>
             <a:spLocks noGrp="1"/>
           </p:cNvSpPr>
@@ -2192,15 +2237,17 @@
         </p:nvSpPr>
         <p:spPr>
           <a:xfrm>
-            <a:off x="839788" y="457200"/>
-            <a:ext cx="3932237" cy="1600200"/>
-          </a:xfrm>
-        </p:spPr>
-        <p:txBody>
-          <a:bodyPr anchor="b"/>
+            <a:off x="1444671" y="798973"/>
+            <a:ext cx="3273099" cy="2247117"/>
+          </a:xfrm>
+        </p:spPr>
+        <p:txBody>
+          <a:bodyPr anchor="b">
+            <a:normAutofit/>
+          </a:bodyPr>
           <a:lstStyle>
-            <a:lvl1pPr>
-              <a:defRPr sz="3200"/>
+            <a:lvl1pPr algn="l">
+              <a:defRPr sz="2400"/>
             </a:lvl1pPr>
           </a:lstStyle>
           <a:p>
@@ -2208,19 +2255,13 @@
               <a:rPr lang="en-US"/>
               <a:t>Click to edit Master title style</a:t>
             </a:r>
-            <a:endParaRPr lang="id-ID"/>
-          </a:p>
-        </p:txBody>
-      </p:sp>
-      <p:sp>
-        <p:nvSpPr>
-          <p:cNvPr id="3" name="Content Placeholder 2">
-            <a:extLst>
-              <a:ext uri="{FF2B5EF4-FFF2-40B4-BE49-F238E27FC236}">
-                <a16:creationId xmlns:a16="http://schemas.microsoft.com/office/drawing/2014/main" id="{E024CA0B-711C-420C-059F-8DB759E297BB}"/>
-              </a:ext>
-            </a:extLst>
-          </p:cNvPr>
+            <a:endParaRPr lang="en-US" dirty="0"/>
+          </a:p>
+        </p:txBody>
+      </p:sp>
+      <p:sp>
+        <p:nvSpPr>
+          <p:cNvPr id="3" name="Content Placeholder 2"/>
           <p:cNvSpPr>
             <a:spLocks noGrp="1"/>
           </p:cNvSpPr>
@@ -2230,105 +2271,71 @@
         </p:nvSpPr>
         <p:spPr>
           <a:xfrm>
-            <a:off x="5183188" y="987425"/>
-            <a:ext cx="6172200" cy="4873625"/>
+            <a:off x="5043714" y="798974"/>
+            <a:ext cx="6012470" cy="4658826"/>
+          </a:xfrm>
+        </p:spPr>
+        <p:txBody>
+          <a:bodyPr anchor="ctr"/>
+          <a:lstStyle/>
+          <a:p>
+            <a:pPr lvl="0"/>
+            <a:r>
+              <a:rPr lang="en-US"/>
+              <a:t>Click to edit Master text styles</a:t>
+            </a:r>
+          </a:p>
+          <a:p>
+            <a:pPr lvl="1"/>
+            <a:r>
+              <a:rPr lang="en-US"/>
+              <a:t>Second level</a:t>
+            </a:r>
+          </a:p>
+          <a:p>
+            <a:pPr lvl="2"/>
+            <a:r>
+              <a:rPr lang="en-US"/>
+              <a:t>Third level</a:t>
+            </a:r>
+          </a:p>
+          <a:p>
+            <a:pPr lvl="3"/>
+            <a:r>
+              <a:rPr lang="en-US"/>
+              <a:t>Fourth level</a:t>
+            </a:r>
+          </a:p>
+          <a:p>
+            <a:pPr lvl="4"/>
+            <a:r>
+              <a:rPr lang="en-US"/>
+              <a:t>Fifth level</a:t>
+            </a:r>
+            <a:endParaRPr lang="en-US" dirty="0"/>
+          </a:p>
+        </p:txBody>
+      </p:sp>
+      <p:sp>
+        <p:nvSpPr>
+          <p:cNvPr id="4" name="Text Placeholder 3"/>
+          <p:cNvSpPr>
+            <a:spLocks noGrp="1"/>
+          </p:cNvSpPr>
+          <p:nvPr>
+            <p:ph type="body" sz="half" idx="2"/>
+          </p:nvPr>
+        </p:nvSpPr>
+        <p:spPr>
+          <a:xfrm>
+            <a:off x="1444671" y="3205491"/>
+            <a:ext cx="3275013" cy="2248181"/>
           </a:xfrm>
         </p:spPr>
         <p:txBody>
           <a:bodyPr/>
           <a:lstStyle>
-            <a:lvl1pPr>
-              <a:defRPr sz="3200"/>
-            </a:lvl1pPr>
-            <a:lvl2pPr>
-              <a:defRPr sz="2800"/>
-            </a:lvl2pPr>
-            <a:lvl3pPr>
-              <a:defRPr sz="2400"/>
-            </a:lvl3pPr>
-            <a:lvl4pPr>
-              <a:defRPr sz="2000"/>
-            </a:lvl4pPr>
-            <a:lvl5pPr>
-              <a:defRPr sz="2000"/>
-            </a:lvl5pPr>
-            <a:lvl6pPr>
-              <a:defRPr sz="2000"/>
-            </a:lvl6pPr>
-            <a:lvl7pPr>
-              <a:defRPr sz="2000"/>
-            </a:lvl7pPr>
-            <a:lvl8pPr>
-              <a:defRPr sz="2000"/>
-            </a:lvl8pPr>
-            <a:lvl9pPr>
-              <a:defRPr sz="2000"/>
-            </a:lvl9pPr>
-          </a:lstStyle>
-          <a:p>
-            <a:pPr lvl="0"/>
-            <a:r>
-              <a:rPr lang="en-US"/>
-              <a:t>Click to edit Master text styles</a:t>
-            </a:r>
-          </a:p>
-          <a:p>
-            <a:pPr lvl="1"/>
-            <a:r>
-              <a:rPr lang="en-US"/>
-              <a:t>Second level</a:t>
-            </a:r>
-          </a:p>
-          <a:p>
-            <a:pPr lvl="2"/>
-            <a:r>
-              <a:rPr lang="en-US"/>
-              <a:t>Third level</a:t>
-            </a:r>
-          </a:p>
-          <a:p>
-            <a:pPr lvl="3"/>
-            <a:r>
-              <a:rPr lang="en-US"/>
-              <a:t>Fourth level</a:t>
-            </a:r>
-          </a:p>
-          <a:p>
-            <a:pPr lvl="4"/>
-            <a:r>
-              <a:rPr lang="en-US"/>
-              <a:t>Fifth level</a:t>
-            </a:r>
-            <a:endParaRPr lang="id-ID"/>
-          </a:p>
-        </p:txBody>
-      </p:sp>
-      <p:sp>
-        <p:nvSpPr>
-          <p:cNvPr id="4" name="Text Placeholder 3">
-            <a:extLst>
-              <a:ext uri="{FF2B5EF4-FFF2-40B4-BE49-F238E27FC236}">
-                <a16:creationId xmlns:a16="http://schemas.microsoft.com/office/drawing/2014/main" id="{00873675-48F0-2FC0-54EC-B47B9778E311}"/>
-              </a:ext>
-            </a:extLst>
-          </p:cNvPr>
-          <p:cNvSpPr>
-            <a:spLocks noGrp="1"/>
-          </p:cNvSpPr>
-          <p:nvPr>
-            <p:ph type="body" sz="half" idx="2"/>
-          </p:nvPr>
-        </p:nvSpPr>
-        <p:spPr>
-          <a:xfrm>
-            <a:off x="839788" y="2057400"/>
-            <a:ext cx="3932237" cy="3811588"/>
-          </a:xfrm>
-        </p:spPr>
-        <p:txBody>
-          <a:bodyPr/>
-          <a:lstStyle>
-            <a:lvl1pPr marL="0" indent="0">
+            <a:lvl1pPr marL="0" indent="0" algn="l">
               <a:buNone/>
               <a:defRPr sz="1600"/>
             </a:lvl1pPr>
@@ -2376,13 +2383,7 @@
       </p:sp>
       <p:sp>
         <p:nvSpPr>
-          <p:cNvPr id="5" name="Date Placeholder 4">
-            <a:extLst>
-              <a:ext uri="{FF2B5EF4-FFF2-40B4-BE49-F238E27FC236}">
-                <a16:creationId xmlns:a16="http://schemas.microsoft.com/office/drawing/2014/main" id="{54667BFE-0B72-9D46-AD5B-4213D6EE7318}"/>
-              </a:ext>
-            </a:extLst>
-          </p:cNvPr>
+          <p:cNvPr id="5" name="Date Placeholder 4"/>
           <p:cNvSpPr>
             <a:spLocks noGrp="1"/>
           </p:cNvSpPr>
@@ -2397,7 +2398,7 @@
           <a:p>
             <a:fld id="{9934508E-F4F0-45DC-A7F4-4636DDC6725B}" type="datetimeFigureOut">
               <a:rPr lang="id-ID" smtClean="0"/>
-              <a:t>26/06/2026</a:t>
+              <a:t>06/07/2026</a:t>
             </a:fld>
             <a:endParaRPr lang="id-ID"/>
           </a:p>
@@ -2405,13 +2406,7 @@
       </p:sp>
       <p:sp>
         <p:nvSpPr>
-          <p:cNvPr id="6" name="Footer Placeholder 5">
-            <a:extLst>
-              <a:ext uri="{FF2B5EF4-FFF2-40B4-BE49-F238E27FC236}">
-                <a16:creationId xmlns:a16="http://schemas.microsoft.com/office/drawing/2014/main" id="{0BC6ED3B-C46D-E2DE-345D-293045CB312E}"/>
-              </a:ext>
-            </a:extLst>
-          </p:cNvPr>
+          <p:cNvPr id="6" name="Footer Placeholder 5"/>
           <p:cNvSpPr>
             <a:spLocks noGrp="1"/>
           </p:cNvSpPr>
@@ -2430,13 +2425,7 @@
       </p:sp>
       <p:sp>
         <p:nvSpPr>
-          <p:cNvPr id="7" name="Slide Number Placeholder 6">
-            <a:extLst>
-              <a:ext uri="{FF2B5EF4-FFF2-40B4-BE49-F238E27FC236}">
-                <a16:creationId xmlns:a16="http://schemas.microsoft.com/office/drawing/2014/main" id="{C8E4FFA3-F8CC-A6E2-658B-75054C02D59A}"/>
-              </a:ext>
-            </a:extLst>
-          </p:cNvPr>
+          <p:cNvPr id="7" name="Slide Number Placeholder 6"/>
           <p:cNvSpPr>
             <a:spLocks noGrp="1"/>
           </p:cNvSpPr>
@@ -2457,10 +2446,41 @@
           </a:p>
         </p:txBody>
       </p:sp>
+      <p:cxnSp>
+        <p:nvCxnSpPr>
+          <p:cNvPr id="17" name="Straight Connector 16"/>
+          <p:cNvCxnSpPr/>
+          <p:nvPr/>
+        </p:nvCxnSpPr>
+        <p:spPr>
+          <a:xfrm>
+            <a:off x="1448280" y="3205491"/>
+            <a:ext cx="3269490" cy="0"/>
+          </a:xfrm>
+          <a:prstGeom prst="line">
+            <a:avLst/>
+          </a:prstGeom>
+          <a:ln w="31750"/>
+        </p:spPr>
+        <p:style>
+          <a:lnRef idx="3">
+            <a:schemeClr val="accent1"/>
+          </a:lnRef>
+          <a:fillRef idx="0">
+            <a:schemeClr val="accent1"/>
+          </a:fillRef>
+          <a:effectRef idx="2">
+            <a:schemeClr val="accent1"/>
+          </a:effectRef>
+          <a:fontRef idx="minor">
+            <a:schemeClr val="tx1"/>
+          </a:fontRef>
+        </p:style>
+      </p:cxnSp>
     </p:spTree>
     <p:extLst>
       <p:ext uri="{BB962C8B-B14F-4D97-AF65-F5344CB8AC3E}">
-        <p14:creationId xmlns:p14="http://schemas.microsoft.com/office/powerpoint/2010/main" val="822905040"/>
+        <p14:creationId xmlns:p14="http://schemas.microsoft.com/office/powerpoint/2010/main" val="612304294"/>
       </p:ext>
     </p:extLst>
   </p:cSld>
@@ -2487,15 +2507,143 @@
           <a:chExt cx="0" cy="0"/>
         </a:xfrm>
       </p:grpSpPr>
-      <p:sp>
-        <p:nvSpPr>
-          <p:cNvPr id="2" name="Title 1">
-            <a:extLst>
-              <a:ext uri="{FF2B5EF4-FFF2-40B4-BE49-F238E27FC236}">
-                <a16:creationId xmlns:a16="http://schemas.microsoft.com/office/drawing/2014/main" id="{025C94BB-A704-BC90-71F4-8A78EDE8B020}"/>
-              </a:ext>
-            </a:extLst>
-          </p:cNvPr>
+      <p:grpSp>
+        <p:nvGrpSpPr>
+          <p:cNvPr id="8" name="Group 7"/>
+          <p:cNvGrpSpPr/>
+          <p:nvPr/>
+        </p:nvGrpSpPr>
+        <p:grpSpPr>
+          <a:xfrm>
+            <a:off x="7477387" y="482170"/>
+            <a:ext cx="4074533" cy="5149101"/>
+            <a:chOff x="7477387" y="482170"/>
+            <a:chExt cx="4074533" cy="5149101"/>
+          </a:xfrm>
+        </p:grpSpPr>
+        <p:sp>
+          <p:nvSpPr>
+            <p:cNvPr id="18" name="Rectangle 17"/>
+            <p:cNvSpPr/>
+            <p:nvPr/>
+          </p:nvSpPr>
+          <p:spPr bwMode="black">
+            <a:xfrm>
+              <a:off x="7477387" y="482170"/>
+              <a:ext cx="4074533" cy="5149101"/>
+            </a:xfrm>
+            <a:prstGeom prst="rect">
+              <a:avLst/>
+            </a:prstGeom>
+            <a:gradFill>
+              <a:gsLst>
+                <a:gs pos="0">
+                  <a:srgbClr val="000001"/>
+                </a:gs>
+                <a:gs pos="100000">
+                  <a:srgbClr val="191919"/>
+                </a:gs>
+              </a:gsLst>
+            </a:gradFill>
+            <a:ln w="76200" cmpd="sng">
+              <a:noFill/>
+              <a:miter lim="800000"/>
+            </a:ln>
+            <a:effectLst>
+              <a:outerShdw blurRad="127000" dist="228600" dir="4740000" sx="98000" sy="98000" algn="tl" rotWithShape="0">
+                <a:srgbClr val="000000">
+                  <a:alpha val="34000"/>
+                </a:srgbClr>
+              </a:outerShdw>
+            </a:effectLst>
+            <a:scene3d>
+              <a:camera prst="orthographicFront"/>
+              <a:lightRig rig="threePt" dir="t"/>
+            </a:scene3d>
+            <a:sp3d>
+              <a:bevelT w="152400" h="50800" prst="softRound"/>
+            </a:sp3d>
+          </p:spPr>
+          <p:style>
+            <a:lnRef idx="1">
+              <a:schemeClr val="accent1"/>
+            </a:lnRef>
+            <a:fillRef idx="3">
+              <a:schemeClr val="accent1"/>
+            </a:fillRef>
+            <a:effectRef idx="2">
+              <a:schemeClr val="accent1"/>
+            </a:effectRef>
+            <a:fontRef idx="minor">
+              <a:schemeClr val="lt1"/>
+            </a:fontRef>
+          </p:style>
+        </p:sp>
+        <p:sp>
+          <p:nvSpPr>
+            <p:cNvPr id="19" name="Rectangle 18"/>
+            <p:cNvSpPr/>
+            <p:nvPr/>
+          </p:nvSpPr>
+          <p:spPr bwMode="blackWhite">
+            <a:xfrm>
+              <a:off x="7790446" y="812506"/>
+              <a:ext cx="3450289" cy="4466452"/>
+            </a:xfrm>
+            <a:prstGeom prst="rect">
+              <a:avLst/>
+            </a:prstGeom>
+            <a:gradFill>
+              <a:gsLst>
+                <a:gs pos="0">
+                  <a:srgbClr val="DADADA"/>
+                </a:gs>
+                <a:gs pos="100000">
+                  <a:srgbClr val="FFFFFE"/>
+                </a:gs>
+              </a:gsLst>
+              <a:lin ang="16200000" scaled="0"/>
+            </a:gradFill>
+            <a:ln w="50800" cmpd="sng">
+              <a:solidFill>
+                <a:srgbClr val="191919"/>
+              </a:solidFill>
+              <a:miter lim="800000"/>
+            </a:ln>
+            <a:effectLst>
+              <a:innerShdw blurRad="63500" dist="88900" dir="14100000">
+                <a:srgbClr val="000000">
+                  <a:alpha val="30000"/>
+                </a:srgbClr>
+              </a:innerShdw>
+            </a:effectLst>
+            <a:scene3d>
+              <a:camera prst="orthographicFront"/>
+              <a:lightRig rig="threePt" dir="t"/>
+            </a:scene3d>
+            <a:sp3d>
+              <a:bevelT prst="relaxedInset"/>
+            </a:sp3d>
+          </p:spPr>
+          <p:style>
+            <a:lnRef idx="1">
+              <a:schemeClr val="accent1"/>
+            </a:lnRef>
+            <a:fillRef idx="3">
+              <a:schemeClr val="accent1"/>
+            </a:fillRef>
+            <a:effectRef idx="2">
+              <a:schemeClr val="accent1"/>
+            </a:effectRef>
+            <a:fontRef idx="minor">
+              <a:schemeClr val="lt1"/>
+            </a:fontRef>
+          </p:style>
+        </p:sp>
+      </p:grpSp>
+      <p:sp>
+        <p:nvSpPr>
+          <p:cNvPr id="2" name="Title 1"/>
           <p:cNvSpPr>
             <a:spLocks noGrp="1"/>
           </p:cNvSpPr>
@@ -2505,12 +2653,14 @@
         </p:nvSpPr>
         <p:spPr>
           <a:xfrm>
-            <a:off x="839788" y="457200"/>
-            <a:ext cx="3932237" cy="1600200"/>
-          </a:xfrm>
-        </p:spPr>
-        <p:txBody>
-          <a:bodyPr anchor="b"/>
+            <a:off x="1451206" y="1129513"/>
+            <a:ext cx="5532328" cy="1830584"/>
+          </a:xfrm>
+        </p:spPr>
+        <p:txBody>
+          <a:bodyPr anchor="b">
+            <a:normAutofit/>
+          </a:bodyPr>
           <a:lstStyle>
             <a:lvl1pPr>
               <a:defRPr sz="3200"/>
@@ -2521,21 +2671,15 @@
               <a:rPr lang="en-US"/>
               <a:t>Click to edit Master title style</a:t>
             </a:r>
-            <a:endParaRPr lang="id-ID"/>
-          </a:p>
-        </p:txBody>
-      </p:sp>
-      <p:sp>
-        <p:nvSpPr>
-          <p:cNvPr id="3" name="Picture Placeholder 2">
-            <a:extLst>
-              <a:ext uri="{FF2B5EF4-FFF2-40B4-BE49-F238E27FC236}">
-                <a16:creationId xmlns:a16="http://schemas.microsoft.com/office/drawing/2014/main" id="{7A916A76-A999-EE1D-E120-A42FB4FB44EF}"/>
-              </a:ext>
-            </a:extLst>
-          </p:cNvPr>
-          <p:cNvSpPr>
-            <a:spLocks noGrp="1"/>
+            <a:endParaRPr lang="en-US" dirty="0"/>
+          </a:p>
+        </p:txBody>
+      </p:sp>
+      <p:sp>
+        <p:nvSpPr>
+          <p:cNvPr id="3" name="Picture Placeholder 2"/>
+          <p:cNvSpPr>
+            <a:spLocks noGrp="1" noChangeAspect="1"/>
           </p:cNvSpPr>
           <p:nvPr>
             <p:ph type="pic" idx="1"/>
@@ -2543,14 +2687,24 @@
         </p:nvSpPr>
         <p:spPr>
           <a:xfrm>
-            <a:off x="5183188" y="987425"/>
-            <a:ext cx="6172200" cy="4873625"/>
-          </a:xfrm>
-        </p:spPr>
-        <p:txBody>
-          <a:bodyPr/>
+            <a:off x="8124389" y="1122542"/>
+            <a:ext cx="2791171" cy="3866327"/>
+          </a:xfrm>
+          <a:solidFill>
+            <a:schemeClr val="bg1">
+              <a:lumMod val="85000"/>
+            </a:schemeClr>
+          </a:solidFill>
+          <a:ln w="9525" cap="sq">
+            <a:noFill/>
+            <a:miter lim="800000"/>
+          </a:ln>
+          <a:effectLst/>
+        </p:spPr>
+        <p:txBody>
+          <a:bodyPr anchor="t"/>
           <a:lstStyle>
-            <a:lvl1pPr marL="0" indent="0">
+            <a:lvl1pPr marL="0" indent="0" algn="ctr">
               <a:buNone/>
               <a:defRPr sz="3200"/>
             </a:lvl1pPr>
@@ -2588,19 +2742,17 @@
             </a:lvl9pPr>
           </a:lstStyle>
           <a:p>
-            <a:endParaRPr lang="id-ID"/>
-          </a:p>
-        </p:txBody>
-      </p:sp>
-      <p:sp>
-        <p:nvSpPr>
-          <p:cNvPr id="4" name="Text Placeholder 3">
-            <a:extLst>
-              <a:ext uri="{FF2B5EF4-FFF2-40B4-BE49-F238E27FC236}">
-                <a16:creationId xmlns:a16="http://schemas.microsoft.com/office/drawing/2014/main" id="{FC942179-1CDC-262C-29F5-41EE8CCE8BBB}"/>
-              </a:ext>
-            </a:extLst>
-          </p:cNvPr>
+            <a:r>
+              <a:rPr lang="en-US"/>
+              <a:t>Click icon to add picture</a:t>
+            </a:r>
+            <a:endParaRPr lang="en-US" dirty="0"/>
+          </a:p>
+        </p:txBody>
+      </p:sp>
+      <p:sp>
+        <p:nvSpPr>
+          <p:cNvPr id="4" name="Text Placeholder 3"/>
           <p:cNvSpPr>
             <a:spLocks noGrp="1"/>
           </p:cNvSpPr>
@@ -2610,16 +2762,18 @@
         </p:nvSpPr>
         <p:spPr>
           <a:xfrm>
-            <a:off x="839788" y="2057400"/>
-            <a:ext cx="3932237" cy="3811588"/>
-          </a:xfrm>
-        </p:spPr>
-        <p:txBody>
-          <a:bodyPr/>
+            <a:off x="1450329" y="3145992"/>
+            <a:ext cx="5524404" cy="2003742"/>
+          </a:xfrm>
+        </p:spPr>
+        <p:txBody>
+          <a:bodyPr>
+            <a:normAutofit/>
+          </a:bodyPr>
           <a:lstStyle>
-            <a:lvl1pPr marL="0" indent="0">
-              <a:buNone/>
-              <a:defRPr sz="1600"/>
+            <a:lvl1pPr marL="0" indent="0" algn="l">
+              <a:buNone/>
+              <a:defRPr sz="1800"/>
             </a:lvl1pPr>
             <a:lvl2pPr marL="457200" indent="0">
               <a:buNone/>
@@ -2665,13 +2819,7 @@
       </p:sp>
       <p:sp>
         <p:nvSpPr>
-          <p:cNvPr id="5" name="Date Placeholder 4">
-            <a:extLst>
-              <a:ext uri="{FF2B5EF4-FFF2-40B4-BE49-F238E27FC236}">
-                <a16:creationId xmlns:a16="http://schemas.microsoft.com/office/drawing/2014/main" id="{43EFD49E-7210-A1CC-339E-A61F3587D86B}"/>
-              </a:ext>
-            </a:extLst>
-          </p:cNvPr>
+          <p:cNvPr id="5" name="Date Placeholder 4"/>
           <p:cNvSpPr>
             <a:spLocks noGrp="1"/>
           </p:cNvSpPr>
@@ -2679,14 +2827,23 @@
             <p:ph type="dt" sz="half" idx="10"/>
           </p:nvPr>
         </p:nvSpPr>
-        <p:spPr/>
+        <p:spPr>
+          <a:xfrm>
+            <a:off x="1447382" y="5469856"/>
+            <a:ext cx="5527351" cy="320123"/>
+          </a:xfrm>
+        </p:spPr>
         <p:txBody>
           <a:bodyPr/>
-          <a:lstStyle/>
+          <a:lstStyle>
+            <a:lvl1pPr algn="l">
+              <a:defRPr/>
+            </a:lvl1pPr>
+          </a:lstStyle>
           <a:p>
             <a:fld id="{9934508E-F4F0-45DC-A7F4-4636DDC6725B}" type="datetimeFigureOut">
               <a:rPr lang="id-ID" smtClean="0"/>
-              <a:t>26/06/2026</a:t>
+              <a:t>06/07/2026</a:t>
             </a:fld>
             <a:endParaRPr lang="id-ID"/>
           </a:p>
@@ -2694,13 +2851,7 @@
       </p:sp>
       <p:sp>
         <p:nvSpPr>
-          <p:cNvPr id="6" name="Footer Placeholder 5">
-            <a:extLst>
-              <a:ext uri="{FF2B5EF4-FFF2-40B4-BE49-F238E27FC236}">
-                <a16:creationId xmlns:a16="http://schemas.microsoft.com/office/drawing/2014/main" id="{EFDF9BFE-55E8-118A-46DF-186D5FFFB21F}"/>
-              </a:ext>
-            </a:extLst>
-          </p:cNvPr>
+          <p:cNvPr id="6" name="Footer Placeholder 5"/>
           <p:cNvSpPr>
             <a:spLocks noGrp="1"/>
           </p:cNvSpPr>
@@ -2708,7 +2859,12 @@
             <p:ph type="ftr" sz="quarter" idx="11"/>
           </p:nvPr>
         </p:nvSpPr>
-        <p:spPr/>
+        <p:spPr>
+          <a:xfrm>
+            <a:off x="1447382" y="318640"/>
+            <a:ext cx="5541004" cy="320931"/>
+          </a:xfrm>
+        </p:spPr>
         <p:txBody>
           <a:bodyPr/>
           <a:lstStyle/>
@@ -2719,13 +2875,7 @@
       </p:sp>
       <p:sp>
         <p:nvSpPr>
-          <p:cNvPr id="7" name="Slide Number Placeholder 6">
-            <a:extLst>
-              <a:ext uri="{FF2B5EF4-FFF2-40B4-BE49-F238E27FC236}">
-                <a16:creationId xmlns:a16="http://schemas.microsoft.com/office/drawing/2014/main" id="{B7B98123-AD0F-DCBF-7FE5-7A9802243BE3}"/>
-              </a:ext>
-            </a:extLst>
-          </p:cNvPr>
+          <p:cNvPr id="7" name="Slide Number Placeholder 6"/>
           <p:cNvSpPr>
             <a:spLocks noGrp="1"/>
           </p:cNvSpPr>
@@ -2746,10 +2896,41 @@
           </a:p>
         </p:txBody>
       </p:sp>
+      <p:cxnSp>
+        <p:nvCxnSpPr>
+          <p:cNvPr id="31" name="Straight Connector 30"/>
+          <p:cNvCxnSpPr/>
+          <p:nvPr/>
+        </p:nvCxnSpPr>
+        <p:spPr>
+          <a:xfrm>
+            <a:off x="1447382" y="3143605"/>
+            <a:ext cx="5527351" cy="0"/>
+          </a:xfrm>
+          <a:prstGeom prst="line">
+            <a:avLst/>
+          </a:prstGeom>
+          <a:ln w="31750"/>
+        </p:spPr>
+        <p:style>
+          <a:lnRef idx="3">
+            <a:schemeClr val="accent1"/>
+          </a:lnRef>
+          <a:fillRef idx="0">
+            <a:schemeClr val="accent1"/>
+          </a:fillRef>
+          <a:effectRef idx="2">
+            <a:schemeClr val="accent1"/>
+          </a:effectRef>
+          <a:fontRef idx="minor">
+            <a:schemeClr val="tx1"/>
+          </a:fontRef>
+        </p:style>
+      </p:cxnSp>
     </p:spTree>
     <p:extLst>
       <p:ext uri="{BB962C8B-B14F-4D97-AF65-F5344CB8AC3E}">
-        <p14:creationId xmlns:p14="http://schemas.microsoft.com/office/powerpoint/2010/main" val="879773849"/>
+        <p14:creationId xmlns:p14="http://schemas.microsoft.com/office/powerpoint/2010/main" val="2311179286"/>
       </p:ext>
     </p:extLst>
   </p:cSld>
@@ -2763,8 +2944,8 @@
 <p:sldMaster xmlns:a="http://schemas.openxmlformats.org/drawingml/2006/main" xmlns:r="http://schemas.openxmlformats.org/officeDocument/2006/relationships" xmlns:p="http://schemas.openxmlformats.org/presentationml/2006/main">
   <p:cSld>
     <p:bg>
-      <p:bgRef idx="1001">
-        <a:schemeClr val="bg1"/>
+      <p:bgRef idx="1003">
+        <a:schemeClr val="bg2"/>
       </p:bgRef>
     </p:bg>
     <p:spTree>
@@ -2783,68 +2964,134 @@
       </p:grpSpPr>
       <p:sp>
         <p:nvSpPr>
-          <p:cNvPr id="2" name="Title Placeholder 1">
-            <a:extLst>
-              <a:ext uri="{FF2B5EF4-FFF2-40B4-BE49-F238E27FC236}">
-                <a16:creationId xmlns:a16="http://schemas.microsoft.com/office/drawing/2014/main" id="{A894ACA1-BEED-2F96-3638-C59BD73BD4BB}"/>
-              </a:ext>
-            </a:extLst>
-          </p:cNvPr>
-          <p:cNvSpPr>
-            <a:spLocks noGrp="1"/>
-          </p:cNvSpPr>
-          <p:nvPr>
-            <p:ph type="title"/>
-          </p:nvPr>
-        </p:nvSpPr>
-        <p:spPr>
-          <a:xfrm>
-            <a:off x="838200" y="365125"/>
-            <a:ext cx="10515600" cy="1325563"/>
+          <p:cNvPr id="8" name="Rectangle 7"/>
+          <p:cNvSpPr/>
+          <p:nvPr/>
+        </p:nvSpPr>
+        <p:spPr>
+          <a:xfrm>
+            <a:off x="0" y="2019476"/>
+            <a:ext cx="12192000" cy="4105941"/>
           </a:xfrm>
           <a:prstGeom prst="rect">
             <a:avLst/>
           </a:prstGeom>
-        </p:spPr>
-        <p:txBody>
-          <a:bodyPr vert="horz" lIns="91440" tIns="45720" rIns="91440" bIns="45720" rtlCol="0" anchor="ctr">
-            <a:normAutofit/>
-          </a:bodyPr>
-          <a:lstStyle/>
-          <a:p>
-            <a:r>
-              <a:rPr lang="en-US"/>
-              <a:t>Click to edit Master title style</a:t>
-            </a:r>
-            <a:endParaRPr lang="id-ID"/>
-          </a:p>
-        </p:txBody>
-      </p:sp>
-      <p:sp>
-        <p:nvSpPr>
-          <p:cNvPr id="3" name="Text Placeholder 2">
+          <a:gradFill flip="none" rotWithShape="1">
+            <a:gsLst>
+              <a:gs pos="0">
+                <a:schemeClr val="bg2">
+                  <a:alpha val="0"/>
+                </a:schemeClr>
+              </a:gs>
+              <a:gs pos="100000">
+                <a:schemeClr val="bg2"/>
+              </a:gs>
+            </a:gsLst>
+            <a:lin ang="5400000" scaled="0"/>
+            <a:tileRect/>
+          </a:gradFill>
+          <a:ln>
+            <a:noFill/>
+          </a:ln>
+        </p:spPr>
+        <p:style>
+          <a:lnRef idx="2">
+            <a:schemeClr val="accent1">
+              <a:shade val="50000"/>
+            </a:schemeClr>
+          </a:lnRef>
+          <a:fillRef idx="1">
+            <a:schemeClr val="accent1"/>
+          </a:fillRef>
+          <a:effectRef idx="0">
+            <a:schemeClr val="accent1"/>
+          </a:effectRef>
+          <a:fontRef idx="minor">
+            <a:schemeClr val="lt1"/>
+          </a:fontRef>
+        </p:style>
+      </p:sp>
+      <p:pic>
+        <p:nvPicPr>
+          <p:cNvPr id="7" name="Picture 6"/>
+          <p:cNvPicPr>
+            <a:picLocks noChangeAspect="1"/>
+          </p:cNvPicPr>
+          <p:nvPr/>
+        </p:nvPicPr>
+        <p:blipFill rotWithShape="1">
+          <a:blip r:embed="rId13">
             <a:extLst>
-              <a:ext uri="{FF2B5EF4-FFF2-40B4-BE49-F238E27FC236}">
-                <a16:creationId xmlns:a16="http://schemas.microsoft.com/office/drawing/2014/main" id="{842A7C3C-B220-7BAA-E2DE-72986182C2F4}"/>
+              <a:ext uri="{28A0092B-C50C-407E-A947-70E740481C1C}">
+                <a14:useLocalDpi xmlns:a14="http://schemas.microsoft.com/office/drawing/2010/main" val="0"/>
               </a:ext>
             </a:extLst>
-          </p:cNvPr>
-          <p:cNvSpPr>
-            <a:spLocks noGrp="1"/>
-          </p:cNvSpPr>
-          <p:nvPr>
-            <p:ph type="body" idx="1"/>
-          </p:nvPr>
-        </p:nvSpPr>
-        <p:spPr>
-          <a:xfrm>
-            <a:off x="838200" y="1825625"/>
-            <a:ext cx="10515600" cy="4351338"/>
+          </a:blip>
+          <a:srcRect t="1538" b="-1538"/>
+          <a:stretch/>
+        </p:blipFill>
+        <p:spPr bwMode="black">
+          <a:xfrm>
+            <a:off x="0" y="6126480"/>
+            <a:ext cx="12192000" cy="742950"/>
           </a:xfrm>
           <a:prstGeom prst="rect">
             <a:avLst/>
           </a:prstGeom>
         </p:spPr>
+      </p:pic>
+      <p:sp>
+        <p:nvSpPr>
+          <p:cNvPr id="2" name="Title Placeholder 1"/>
+          <p:cNvSpPr>
+            <a:spLocks noGrp="1"/>
+          </p:cNvSpPr>
+          <p:nvPr>
+            <p:ph type="title"/>
+          </p:nvPr>
+        </p:nvSpPr>
+        <p:spPr>
+          <a:xfrm>
+            <a:off x="1451579" y="804519"/>
+            <a:ext cx="9603275" cy="1049235"/>
+          </a:xfrm>
+          <a:prstGeom prst="rect">
+            <a:avLst/>
+          </a:prstGeom>
+        </p:spPr>
+        <p:txBody>
+          <a:bodyPr vert="horz" lIns="91440" tIns="45720" rIns="91440" bIns="45720" rtlCol="0" anchor="t">
+            <a:normAutofit/>
+          </a:bodyPr>
+          <a:lstStyle/>
+          <a:p>
+            <a:r>
+              <a:rPr lang="en-US"/>
+              <a:t>Click to edit Master title style</a:t>
+            </a:r>
+            <a:endParaRPr lang="en-US" dirty="0"/>
+          </a:p>
+        </p:txBody>
+      </p:sp>
+      <p:sp>
+        <p:nvSpPr>
+          <p:cNvPr id="3" name="Text Placeholder 2"/>
+          <p:cNvSpPr>
+            <a:spLocks noGrp="1"/>
+          </p:cNvSpPr>
+          <p:nvPr>
+            <p:ph type="body" idx="1"/>
+          </p:nvPr>
+        </p:nvSpPr>
+        <p:spPr>
+          <a:xfrm>
+            <a:off x="1451579" y="2015732"/>
+            <a:ext cx="9603275" cy="3450613"/>
+          </a:xfrm>
+          <a:prstGeom prst="rect">
+            <a:avLst/>
+          </a:prstGeom>
+        </p:spPr>
         <p:txBody>
           <a:bodyPr vert="horz" lIns="91440" tIns="45720" rIns="91440" bIns="45720" rtlCol="0">
             <a:normAutofit/>
@@ -2884,19 +3131,13 @@
               <a:rPr lang="en-US"/>
               <a:t>Fifth level</a:t>
             </a:r>
-            <a:endParaRPr lang="id-ID"/>
-          </a:p>
-        </p:txBody>
-      </p:sp>
-      <p:sp>
-        <p:nvSpPr>
-          <p:cNvPr id="4" name="Date Placeholder 3">
-            <a:extLst>
-              <a:ext uri="{FF2B5EF4-FFF2-40B4-BE49-F238E27FC236}">
-                <a16:creationId xmlns:a16="http://schemas.microsoft.com/office/drawing/2014/main" id="{47FDED5F-C2F5-0E60-A48A-973EE88F3328}"/>
-              </a:ext>
-            </a:extLst>
-          </p:cNvPr>
+            <a:endParaRPr lang="en-US" dirty="0"/>
+          </a:p>
+        </p:txBody>
+      </p:sp>
+      <p:sp>
+        <p:nvSpPr>
+          <p:cNvPr id="4" name="Date Placeholder 3"/>
           <p:cNvSpPr>
             <a:spLocks noGrp="1"/>
           </p:cNvSpPr>
@@ -2906,8 +3147,8 @@
         </p:nvSpPr>
         <p:spPr>
           <a:xfrm>
-            <a:off x="838200" y="6356350"/>
-            <a:ext cx="2743200" cy="365125"/>
+            <a:off x="7554138" y="330370"/>
+            <a:ext cx="3500715" cy="309201"/>
           </a:xfrm>
           <a:prstGeom prst="rect">
             <a:avLst/>
@@ -2916,11 +3157,11 @@
         <p:txBody>
           <a:bodyPr vert="horz" lIns="91440" tIns="45720" rIns="91440" bIns="45720" rtlCol="0" anchor="ctr"/>
           <a:lstStyle>
-            <a:lvl1pPr algn="l">
-              <a:defRPr sz="1200">
+            <a:lvl1pPr algn="r">
+              <a:defRPr sz="1000">
                 <a:solidFill>
                   <a:schemeClr val="tx1">
-                    <a:tint val="82000"/>
+                    <a:tint val="75000"/>
                   </a:schemeClr>
                 </a:solidFill>
               </a:defRPr>
@@ -2929,7 +3170,7 @@
           <a:p>
             <a:fld id="{9934508E-F4F0-45DC-A7F4-4636DDC6725B}" type="datetimeFigureOut">
               <a:rPr lang="id-ID" smtClean="0"/>
-              <a:t>26/06/2026</a:t>
+              <a:t>06/07/2026</a:t>
             </a:fld>
             <a:endParaRPr lang="id-ID"/>
           </a:p>
@@ -2937,13 +3178,7 @@
       </p:sp>
       <p:sp>
         <p:nvSpPr>
-          <p:cNvPr id="5" name="Footer Placeholder 4">
-            <a:extLst>
-              <a:ext uri="{FF2B5EF4-FFF2-40B4-BE49-F238E27FC236}">
-                <a16:creationId xmlns:a16="http://schemas.microsoft.com/office/drawing/2014/main" id="{B83969CA-B958-8EB7-BAA6-FB05641F0EAF}"/>
-              </a:ext>
-            </a:extLst>
-          </p:cNvPr>
+          <p:cNvPr id="5" name="Footer Placeholder 4"/>
           <p:cNvSpPr>
             <a:spLocks noGrp="1"/>
           </p:cNvSpPr>
@@ -2953,8 +3188,8 @@
         </p:nvSpPr>
         <p:spPr>
           <a:xfrm>
-            <a:off x="4038600" y="6356350"/>
-            <a:ext cx="4114800" cy="365125"/>
+            <a:off x="1451579" y="329307"/>
+            <a:ext cx="5938836" cy="309201"/>
           </a:xfrm>
           <a:prstGeom prst="rect">
             <a:avLst/>
@@ -2963,11 +3198,11 @@
         <p:txBody>
           <a:bodyPr vert="horz" lIns="91440" tIns="45720" rIns="91440" bIns="45720" rtlCol="0" anchor="ctr"/>
           <a:lstStyle>
-            <a:lvl1pPr algn="ctr">
-              <a:defRPr sz="1200">
+            <a:lvl1pPr algn="l">
+              <a:defRPr sz="1000">
                 <a:solidFill>
                   <a:schemeClr val="tx1">
-                    <a:tint val="82000"/>
+                    <a:tint val="75000"/>
                   </a:schemeClr>
                 </a:solidFill>
               </a:defRPr>
@@ -2980,13 +3215,7 @@
       </p:sp>
       <p:sp>
         <p:nvSpPr>
-          <p:cNvPr id="6" name="Slide Number Placeholder 5">
-            <a:extLst>
-              <a:ext uri="{FF2B5EF4-FFF2-40B4-BE49-F238E27FC236}">
-                <a16:creationId xmlns:a16="http://schemas.microsoft.com/office/drawing/2014/main" id="{3CCD5597-5249-2019-F71F-AA62477A5476}"/>
-              </a:ext>
-            </a:extLst>
-          </p:cNvPr>
+          <p:cNvPr id="6" name="Slide Number Placeholder 5"/>
           <p:cNvSpPr>
             <a:spLocks noGrp="1"/>
           </p:cNvSpPr>
@@ -2996,22 +3225,20 @@
         </p:nvSpPr>
         <p:spPr>
           <a:xfrm>
-            <a:off x="8610600" y="6356350"/>
-            <a:ext cx="2743200" cy="365125"/>
+            <a:off x="480060" y="798973"/>
+            <a:ext cx="811019" cy="503578"/>
           </a:xfrm>
           <a:prstGeom prst="rect">
             <a:avLst/>
           </a:prstGeom>
         </p:spPr>
         <p:txBody>
-          <a:bodyPr vert="horz" lIns="91440" tIns="45720" rIns="91440" bIns="45720" rtlCol="0" anchor="ctr"/>
+          <a:bodyPr vert="horz" lIns="91440" tIns="45720" rIns="91440" bIns="45720" rtlCol="0" anchor="t"/>
           <a:lstStyle>
             <a:lvl1pPr algn="r">
-              <a:defRPr sz="1200">
+              <a:defRPr sz="2800">
                 <a:solidFill>
-                  <a:schemeClr val="tx1">
-                    <a:tint val="82000"/>
-                  </a:schemeClr>
+                  <a:schemeClr val="accent1"/>
                 </a:solidFill>
               </a:defRPr>
             </a:lvl1pPr>
@@ -3025,26 +3252,63 @@
           </a:p>
         </p:txBody>
       </p:sp>
+      <p:cxnSp>
+        <p:nvCxnSpPr>
+          <p:cNvPr id="10" name="Straight Connector 9"/>
+          <p:cNvCxnSpPr/>
+          <p:nvPr/>
+        </p:nvCxnSpPr>
+        <p:spPr>
+          <a:xfrm>
+            <a:off x="0" y="6128413"/>
+            <a:ext cx="12192000" cy="0"/>
+          </a:xfrm>
+          <a:prstGeom prst="line">
+            <a:avLst/>
+          </a:prstGeom>
+          <a:ln w="12700">
+            <a:solidFill>
+              <a:srgbClr val="000001">
+                <a:alpha val="20000"/>
+              </a:srgbClr>
+            </a:solidFill>
+          </a:ln>
+        </p:spPr>
+        <p:style>
+          <a:lnRef idx="1">
+            <a:schemeClr val="accent1"/>
+          </a:lnRef>
+          <a:fillRef idx="0">
+            <a:schemeClr val="accent1"/>
+          </a:fillRef>
+          <a:effectRef idx="0">
+            <a:schemeClr val="accent1"/>
+          </a:effectRef>
+          <a:fontRef idx="minor">
+            <a:schemeClr val="tx1"/>
+          </a:fontRef>
+        </p:style>
+      </p:cxnSp>
     </p:spTree>
     <p:extLst>
       <p:ext uri="{BB962C8B-B14F-4D97-AF65-F5344CB8AC3E}">
-        <p14:creationId xmlns:p14="http://schemas.microsoft.com/office/powerpoint/2010/main" val="4007563844"/>
+        <p14:creationId xmlns:p14="http://schemas.microsoft.com/office/powerpoint/2010/main" val="2522284502"/>
       </p:ext>
     </p:extLst>
   </p:cSld>
   <p:clrMap bg1="lt1" tx1="dk1" bg2="lt2" tx2="dk2" accent1="accent1" accent2="accent2" accent3="accent3" accent4="accent4" accent5="accent5" accent6="accent6" hlink="hlink" folHlink="folHlink"/>
   <p:sldLayoutIdLst>
-    <p:sldLayoutId id="2147483649" r:id="rId1"/>
-    <p:sldLayoutId id="2147483650" r:id="rId2"/>
-    <p:sldLayoutId id="2147483651" r:id="rId3"/>
-    <p:sldLayoutId id="2147483652" r:id="rId4"/>
-    <p:sldLayoutId id="2147483653" r:id="rId5"/>
-    <p:sldLayoutId id="2147483654" r:id="rId6"/>
-    <p:sldLayoutId id="2147483655" r:id="rId7"/>
-    <p:sldLayoutId id="2147483656" r:id="rId8"/>
-    <p:sldLayoutId id="2147483657" r:id="rId9"/>
-    <p:sldLayoutId id="2147483658" r:id="rId10"/>
-    <p:sldLayoutId id="2147483659" r:id="rId11"/>
+    <p:sldLayoutId id="2147483661" r:id="rId1"/>
+    <p:sldLayoutId id="2147483662" r:id="rId2"/>
+    <p:sldLayoutId id="2147483663" r:id="rId3"/>
+    <p:sldLayoutId id="2147483664" r:id="rId4"/>
+    <p:sldLayoutId id="2147483665" r:id="rId5"/>
+    <p:sldLayoutId id="2147483666" r:id="rId6"/>
+    <p:sldLayoutId id="2147483667" r:id="rId7"/>
+    <p:sldLayoutId id="2147483668" r:id="rId8"/>
+    <p:sldLayoutId id="2147483669" r:id="rId9"/>
+    <p:sldLayoutId id="2147483670" r:id="rId10"/>
+    <p:sldLayoutId id="2147483671" r:id="rId11"/>
   </p:sldLayoutIdLst>
   <p:txStyles>
     <p:titleStyle>
@@ -3056,10 +3320,11 @@
           <a:spcPct val="0"/>
         </a:spcBef>
         <a:buNone/>
-        <a:defRPr sz="4400" kern="1200">
+        <a:defRPr sz="3200" b="0" i="0" kern="1200" cap="all">
           <a:solidFill>
             <a:schemeClr val="tx1"/>
           </a:solidFill>
+          <a:effectLst/>
           <a:latin typeface="+mj-lt"/>
           <a:ea typeface="+mj-ea"/>
           <a:cs typeface="+mj-cs"/>
@@ -3069,17 +3334,22 @@
     <p:bodyStyle>
       <a:lvl1pPr marL="228600" indent="-228600" algn="l" defTabSz="914400" rtl="0" eaLnBrk="1" latinLnBrk="0" hangingPunct="1">
         <a:lnSpc>
-          <a:spcPct val="90000"/>
+          <a:spcPct val="120000"/>
         </a:lnSpc>
         <a:spcBef>
           <a:spcPts val="1000"/>
         </a:spcBef>
+        <a:buClr>
+          <a:schemeClr val="accent1"/>
+        </a:buClr>
+        <a:buSzPct val="100000"/>
         <a:buFont typeface="Arial" panose="020B0604020202020204" pitchFamily="34" charset="0"/>
         <a:buChar char="•"/>
-        <a:defRPr sz="2800" kern="1200">
+        <a:defRPr sz="2000" kern="1200">
           <a:solidFill>
             <a:schemeClr val="tx1"/>
           </a:solidFill>
+          <a:effectLst/>
           <a:latin typeface="+mn-lt"/>
           <a:ea typeface="+mn-ea"/>
           <a:cs typeface="+mn-cs"/>
@@ -3087,17 +3357,22 @@
       </a:lvl1pPr>
       <a:lvl2pPr marL="685800" indent="-228600" algn="l" defTabSz="914400" rtl="0" eaLnBrk="1" latinLnBrk="0" hangingPunct="1">
         <a:lnSpc>
-          <a:spcPct val="90000"/>
+          <a:spcPct val="120000"/>
         </a:lnSpc>
         <a:spcBef>
           <a:spcPts val="500"/>
         </a:spcBef>
+        <a:buClr>
+          <a:schemeClr val="accent1"/>
+        </a:buClr>
+        <a:buSzPct val="100000"/>
         <a:buFont typeface="Arial" panose="020B0604020202020204" pitchFamily="34" charset="0"/>
         <a:buChar char="•"/>
-        <a:defRPr sz="2400" kern="1200">
+        <a:defRPr sz="1800" kern="1200" cap="none" baseline="0">
           <a:solidFill>
             <a:schemeClr val="tx1"/>
           </a:solidFill>
+          <a:effectLst/>
           <a:latin typeface="+mn-lt"/>
           <a:ea typeface="+mn-ea"/>
           <a:cs typeface="+mn-cs"/>
@@ -3105,17 +3380,22 @@
       </a:lvl2pPr>
       <a:lvl3pPr marL="1143000" indent="-228600" algn="l" defTabSz="914400" rtl="0" eaLnBrk="1" latinLnBrk="0" hangingPunct="1">
         <a:lnSpc>
-          <a:spcPct val="90000"/>
+          <a:spcPct val="120000"/>
         </a:lnSpc>
         <a:spcBef>
           <a:spcPts val="500"/>
         </a:spcBef>
+        <a:buClr>
+          <a:schemeClr val="accent1"/>
+        </a:buClr>
+        <a:buSzPct val="100000"/>
         <a:buFont typeface="Arial" panose="020B0604020202020204" pitchFamily="34" charset="0"/>
         <a:buChar char="•"/>
-        <a:defRPr sz="2000" kern="1200">
+        <a:defRPr sz="1600" kern="1200">
           <a:solidFill>
             <a:schemeClr val="tx1"/>
           </a:solidFill>
+          <a:effectLst/>
           <a:latin typeface="+mn-lt"/>
           <a:ea typeface="+mn-ea"/>
           <a:cs typeface="+mn-cs"/>
@@ -3123,17 +3403,22 @@
       </a:lvl3pPr>
       <a:lvl4pPr marL="1600200" indent="-228600" algn="l" defTabSz="914400" rtl="0" eaLnBrk="1" latinLnBrk="0" hangingPunct="1">
         <a:lnSpc>
-          <a:spcPct val="90000"/>
+          <a:spcPct val="120000"/>
         </a:lnSpc>
         <a:spcBef>
           <a:spcPts val="500"/>
         </a:spcBef>
+        <a:buClr>
+          <a:schemeClr val="accent1"/>
+        </a:buClr>
+        <a:buSzPct val="100000"/>
         <a:buFont typeface="Arial" panose="020B0604020202020204" pitchFamily="34" charset="0"/>
         <a:buChar char="•"/>
-        <a:defRPr sz="1800" kern="1200">
+        <a:defRPr sz="1400" kern="1200" cap="none" baseline="0">
           <a:solidFill>
             <a:schemeClr val="tx1"/>
           </a:solidFill>
+          <a:effectLst/>
           <a:latin typeface="+mn-lt"/>
           <a:ea typeface="+mn-ea"/>
           <a:cs typeface="+mn-cs"/>
@@ -3141,17 +3426,22 @@
       </a:lvl4pPr>
       <a:lvl5pPr marL="2057400" indent="-228600" algn="l" defTabSz="914400" rtl="0" eaLnBrk="1" latinLnBrk="0" hangingPunct="1">
         <a:lnSpc>
-          <a:spcPct val="90000"/>
+          <a:spcPct val="120000"/>
         </a:lnSpc>
         <a:spcBef>
           <a:spcPts val="500"/>
         </a:spcBef>
+        <a:buClr>
+          <a:schemeClr val="accent1"/>
+        </a:buClr>
+        <a:buSzPct val="100000"/>
         <a:buFont typeface="Arial" panose="020B0604020202020204" pitchFamily="34" charset="0"/>
         <a:buChar char="•"/>
-        <a:defRPr sz="1800" kern="1200">
+        <a:defRPr sz="1200" kern="1200">
           <a:solidFill>
             <a:schemeClr val="tx1"/>
           </a:solidFill>
+          <a:effectLst/>
           <a:latin typeface="+mn-lt"/>
           <a:ea typeface="+mn-ea"/>
           <a:cs typeface="+mn-cs"/>
@@ -3159,17 +3449,22 @@
       </a:lvl5pPr>
       <a:lvl6pPr marL="2514600" indent="-228600" algn="l" defTabSz="914400" rtl="0" eaLnBrk="1" latinLnBrk="0" hangingPunct="1">
         <a:lnSpc>
-          <a:spcPct val="90000"/>
+          <a:spcPct val="120000"/>
         </a:lnSpc>
         <a:spcBef>
           <a:spcPts val="500"/>
         </a:spcBef>
+        <a:buClr>
+          <a:schemeClr val="accent1"/>
+        </a:buClr>
+        <a:buSzPct val="100000"/>
         <a:buFont typeface="Arial" panose="020B0604020202020204" pitchFamily="34" charset="0"/>
         <a:buChar char="•"/>
-        <a:defRPr sz="1800" kern="1200">
+        <a:defRPr sz="1200" kern="1200">
           <a:solidFill>
             <a:schemeClr val="tx1"/>
           </a:solidFill>
+          <a:effectLst/>
           <a:latin typeface="+mn-lt"/>
           <a:ea typeface="+mn-ea"/>
           <a:cs typeface="+mn-cs"/>
@@ -3177,17 +3472,22 @@
       </a:lvl6pPr>
       <a:lvl7pPr marL="2971800" indent="-228600" algn="l" defTabSz="914400" rtl="0" eaLnBrk="1" latinLnBrk="0" hangingPunct="1">
         <a:lnSpc>
-          <a:spcPct val="90000"/>
+          <a:spcPct val="120000"/>
         </a:lnSpc>
         <a:spcBef>
           <a:spcPts val="500"/>
         </a:spcBef>
+        <a:buClr>
+          <a:schemeClr val="accent1"/>
+        </a:buClr>
+        <a:buSzPct val="100000"/>
         <a:buFont typeface="Arial" panose="020B0604020202020204" pitchFamily="34" charset="0"/>
         <a:buChar char="•"/>
-        <a:defRPr sz="1800" kern="1200">
+        <a:defRPr sz="1200" kern="1200">
           <a:solidFill>
             <a:schemeClr val="tx1"/>
           </a:solidFill>
+          <a:effectLst/>
           <a:latin typeface="+mn-lt"/>
           <a:ea typeface="+mn-ea"/>
           <a:cs typeface="+mn-cs"/>
@@ -3195,17 +3495,22 @@
       </a:lvl7pPr>
       <a:lvl8pPr marL="3429000" indent="-228600" algn="l" defTabSz="914400" rtl="0" eaLnBrk="1" latinLnBrk="0" hangingPunct="1">
         <a:lnSpc>
-          <a:spcPct val="90000"/>
+          <a:spcPct val="120000"/>
         </a:lnSpc>
         <a:spcBef>
           <a:spcPts val="500"/>
         </a:spcBef>
+        <a:buClr>
+          <a:schemeClr val="accent1"/>
+        </a:buClr>
+        <a:buSzPct val="100000"/>
         <a:buFont typeface="Arial" panose="020B0604020202020204" pitchFamily="34" charset="0"/>
         <a:buChar char="•"/>
-        <a:defRPr sz="1800" kern="1200">
+        <a:defRPr sz="1200" kern="1200" baseline="0">
           <a:solidFill>
             <a:schemeClr val="tx1"/>
           </a:solidFill>
+          <a:effectLst/>
           <a:latin typeface="+mn-lt"/>
           <a:ea typeface="+mn-ea"/>
           <a:cs typeface="+mn-cs"/>
@@ -3213,17 +3518,22 @@
       </a:lvl8pPr>
       <a:lvl9pPr marL="3886200" indent="-228600" algn="l" defTabSz="914400" rtl="0" eaLnBrk="1" latinLnBrk="0" hangingPunct="1">
         <a:lnSpc>
-          <a:spcPct val="90000"/>
+          <a:spcPct val="120000"/>
         </a:lnSpc>
         <a:spcBef>
           <a:spcPts val="500"/>
         </a:spcBef>
+        <a:buClr>
+          <a:schemeClr val="accent1"/>
+        </a:buClr>
+        <a:buSzPct val="100000"/>
         <a:buFont typeface="Arial" panose="020B0604020202020204" pitchFamily="34" charset="0"/>
         <a:buChar char="•"/>
-        <a:defRPr sz="1800" kern="1200">
+        <a:defRPr sz="1200" kern="1200" baseline="0">
           <a:solidFill>
             <a:schemeClr val="tx1"/>
           </a:solidFill>
+          <a:effectLst/>
           <a:latin typeface="+mn-lt"/>
           <a:ea typeface="+mn-ea"/>
           <a:cs typeface="+mn-cs"/>
@@ -3232,7 +3542,7 @@
     </p:bodyStyle>
     <p:otherStyle>
       <a:defPPr>
-        <a:defRPr lang="id-ID"/>
+        <a:defRPr lang="en-US"/>
       </a:defPPr>
       <a:lvl1pPr marL="0" algn="l" defTabSz="914400" rtl="0" eaLnBrk="1" latinLnBrk="0" hangingPunct="1">
         <a:defRPr sz="1800" kern="1200">
@@ -3369,7 +3679,19 @@
           <a:p>
             <a:pPr algn="ctr"/>
             <a:r>
-              <a:rPr lang="id-ID" b="1" dirty="0"/>
+              <a:rPr lang="id-ID" b="1" cap="none" dirty="0">
+                <a:ln w="0"/>
+                <a:solidFill>
+                  <a:schemeClr val="accent1"/>
+                </a:solidFill>
+                <a:effectLst>
+                  <a:outerShdw blurRad="38100" dist="25400" dir="5400000" algn="ctr" rotWithShape="0">
+                    <a:srgbClr val="6E747A">
+                      <a:alpha val="43000"/>
+                    </a:srgbClr>
+                  </a:outerShdw>
+                </a:effectLst>
+              </a:rPr>
               <a:t>MENU PRESENTASI</a:t>
             </a:r>
           </a:p>
@@ -3389,8 +3711,8 @@
         </p:nvSpPr>
         <p:spPr>
           <a:xfrm>
-            <a:off x="2928775" y="2659559"/>
-            <a:ext cx="1573764" cy="769441"/>
+            <a:off x="1889074" y="3044279"/>
+            <a:ext cx="1914307" cy="769441"/>
           </a:xfrm>
           <a:prstGeom prst="rect">
             <a:avLst/>
@@ -3404,12 +3726,35 @@
           <a:lstStyle/>
           <a:p>
             <a:r>
-              <a:rPr lang="id-ID" sz="4400" b="1" dirty="0">
-                <a:hlinkClick r:id="rId2" action="ppaction://hlinksldjump"/>
+              <a:rPr lang="id-ID" sz="4400" b="1" spc="50" dirty="0">
+                <a:ln w="0"/>
+                <a:solidFill>
+                  <a:schemeClr val="bg2"/>
+                </a:solidFill>
+                <a:effectLst>
+                  <a:innerShdw blurRad="63500" dist="50800" dir="13500000">
+                    <a:srgbClr val="000000">
+                      <a:alpha val="50000"/>
+                    </a:srgbClr>
+                  </a:innerShdw>
+                </a:effectLst>
+                <a:hlinkClick r:id="rId3" action="ppaction://hlinksldjump"/>
               </a:rPr>
               <a:t>BAB 1</a:t>
             </a:r>
-            <a:endParaRPr lang="id-ID" sz="4400" b="1" dirty="0"/>
+            <a:endParaRPr lang="id-ID" sz="4400" b="1" spc="50" dirty="0">
+              <a:ln w="0"/>
+              <a:solidFill>
+                <a:schemeClr val="bg2"/>
+              </a:solidFill>
+              <a:effectLst>
+                <a:innerShdw blurRad="63500" dist="50800" dir="13500000">
+                  <a:srgbClr val="000000">
+                    <a:alpha val="50000"/>
+                  </a:srgbClr>
+                </a:innerShdw>
+              </a:effectLst>
+            </a:endParaRPr>
           </a:p>
         </p:txBody>
       </p:sp>
@@ -3427,8 +3772,8 @@
         </p:nvSpPr>
         <p:spPr>
           <a:xfrm>
-            <a:off x="5301103" y="2659559"/>
-            <a:ext cx="1589794" cy="769441"/>
+            <a:off x="5138846" y="3044279"/>
+            <a:ext cx="1914307" cy="769441"/>
           </a:xfrm>
           <a:prstGeom prst="rect">
             <a:avLst/>
@@ -3442,18 +3787,52 @@
           <a:lstStyle/>
           <a:p>
             <a:r>
-              <a:rPr lang="id-ID" sz="4400" b="1" dirty="0">
-                <a:hlinkClick r:id="rId3" action="ppaction://hlinksldjump"/>
+              <a:rPr lang="id-ID" sz="4400" b="1" spc="50" dirty="0">
+                <a:ln w="0"/>
+                <a:solidFill>
+                  <a:schemeClr val="bg2"/>
+                </a:solidFill>
+                <a:effectLst>
+                  <a:innerShdw blurRad="63500" dist="50800" dir="13500000">
+                    <a:srgbClr val="000000">
+                      <a:alpha val="50000"/>
+                    </a:srgbClr>
+                  </a:innerShdw>
+                </a:effectLst>
+                <a:hlinkClick r:id="rId4" action="ppaction://hlinksldjump"/>
               </a:rPr>
               <a:t>BAB </a:t>
             </a:r>
             <a:r>
-              <a:rPr lang="en-US" sz="4400" b="1" dirty="0">
-                <a:hlinkClick r:id="rId3" action="ppaction://hlinksldjump"/>
+              <a:rPr lang="en-US" sz="4400" b="1" spc="50" dirty="0">
+                <a:ln w="0"/>
+                <a:solidFill>
+                  <a:schemeClr val="bg2"/>
+                </a:solidFill>
+                <a:effectLst>
+                  <a:innerShdw blurRad="63500" dist="50800" dir="13500000">
+                    <a:srgbClr val="000000">
+                      <a:alpha val="50000"/>
+                    </a:srgbClr>
+                  </a:innerShdw>
+                </a:effectLst>
+                <a:hlinkClick r:id="rId4" action="ppaction://hlinksldjump"/>
               </a:rPr>
               <a:t>2</a:t>
             </a:r>
-            <a:endParaRPr lang="id-ID" sz="4400" b="1" dirty="0"/>
+            <a:endParaRPr lang="id-ID" sz="4400" b="1" spc="50" dirty="0">
+              <a:ln w="0"/>
+              <a:solidFill>
+                <a:schemeClr val="bg2"/>
+              </a:solidFill>
+              <a:effectLst>
+                <a:innerShdw blurRad="63500" dist="50800" dir="13500000">
+                  <a:srgbClr val="000000">
+                    <a:alpha val="50000"/>
+                  </a:srgbClr>
+                </a:innerShdw>
+              </a:effectLst>
+            </a:endParaRPr>
           </a:p>
         </p:txBody>
       </p:sp>
@@ -3471,8 +3850,8 @@
         </p:nvSpPr>
         <p:spPr>
           <a:xfrm>
-            <a:off x="7689461" y="2659559"/>
-            <a:ext cx="1589794" cy="769441"/>
+            <a:off x="8388619" y="3044279"/>
+            <a:ext cx="1914307" cy="769441"/>
           </a:xfrm>
           <a:prstGeom prst="rect">
             <a:avLst/>
@@ -3486,18 +3865,113 @@
           <a:lstStyle/>
           <a:p>
             <a:r>
-              <a:rPr lang="id-ID" sz="4400" b="1" dirty="0">
-                <a:hlinkClick r:id="rId4" action="ppaction://hlinksldjump"/>
+              <a:rPr lang="id-ID" sz="4400" b="1" spc="50" dirty="0">
+                <a:ln w="0"/>
+                <a:solidFill>
+                  <a:schemeClr val="bg2"/>
+                </a:solidFill>
+                <a:effectLst>
+                  <a:innerShdw blurRad="63500" dist="50800" dir="13500000">
+                    <a:srgbClr val="000000">
+                      <a:alpha val="50000"/>
+                    </a:srgbClr>
+                  </a:innerShdw>
+                </a:effectLst>
+                <a:hlinkClick r:id="rId5" action="ppaction://hlinksldjump"/>
               </a:rPr>
               <a:t>BAB </a:t>
             </a:r>
             <a:r>
-              <a:rPr lang="en-US" sz="4400" b="1" dirty="0">
-                <a:hlinkClick r:id="rId4" action="ppaction://hlinksldjump"/>
+              <a:rPr lang="en-US" sz="4400" b="1" spc="50" dirty="0">
+                <a:ln w="0"/>
+                <a:solidFill>
+                  <a:schemeClr val="bg2"/>
+                </a:solidFill>
+                <a:effectLst>
+                  <a:innerShdw blurRad="63500" dist="50800" dir="13500000">
+                    <a:srgbClr val="000000">
+                      <a:alpha val="50000"/>
+                    </a:srgbClr>
+                  </a:innerShdw>
+                </a:effectLst>
+                <a:hlinkClick r:id="rId5" action="ppaction://hlinksldjump"/>
               </a:rPr>
               <a:t>3</a:t>
             </a:r>
-            <a:endParaRPr lang="id-ID" sz="4400" b="1" dirty="0"/>
+            <a:endParaRPr lang="id-ID" sz="4400" b="1" spc="50" dirty="0">
+              <a:ln w="0"/>
+              <a:solidFill>
+                <a:schemeClr val="bg2"/>
+              </a:solidFill>
+              <a:effectLst>
+                <a:innerShdw blurRad="63500" dist="50800" dir="13500000">
+                  <a:srgbClr val="000000">
+                    <a:alpha val="50000"/>
+                  </a:srgbClr>
+                </a:innerShdw>
+              </a:effectLst>
+            </a:endParaRPr>
+          </a:p>
+        </p:txBody>
+      </p:sp>
+      <p:sp>
+        <p:nvSpPr>
+          <p:cNvPr id="2" name="TextBox 1">
+            <a:extLst>
+              <a:ext uri="{FF2B5EF4-FFF2-40B4-BE49-F238E27FC236}">
+                <a16:creationId xmlns:a16="http://schemas.microsoft.com/office/drawing/2014/main" id="{23178DF5-42F3-6975-EC48-C851EA0DB851}"/>
+              </a:ext>
+            </a:extLst>
+          </p:cNvPr>
+          <p:cNvSpPr txBox="1"/>
+          <p:nvPr/>
+        </p:nvSpPr>
+        <p:spPr>
+          <a:xfrm>
+            <a:off x="5138846" y="4619524"/>
+            <a:ext cx="2113079" cy="769441"/>
+          </a:xfrm>
+          <a:prstGeom prst="rect">
+            <a:avLst/>
+          </a:prstGeom>
+          <a:noFill/>
+        </p:spPr>
+        <p:txBody>
+          <a:bodyPr wrap="none" rtlCol="0">
+            <a:spAutoFit/>
+          </a:bodyPr>
+          <a:lstStyle/>
+          <a:p>
+            <a:r>
+              <a:rPr lang="en-US" sz="4400" b="1" spc="50" dirty="0">
+                <a:ln w="0"/>
+                <a:solidFill>
+                  <a:schemeClr val="bg2"/>
+                </a:solidFill>
+                <a:effectLst>
+                  <a:innerShdw blurRad="63500" dist="50800" dir="13500000">
+                    <a:srgbClr val="000000">
+                      <a:alpha val="50000"/>
+                    </a:srgbClr>
+                  </a:innerShdw>
+                </a:effectLst>
+                <a:hlinkClick r:id="rId6" action="ppaction://hlinksldjump"/>
+              </a:rPr>
+              <a:t>VIDEO</a:t>
+            </a:r>
+            <a:endParaRPr lang="id-ID" sz="4400" b="1" spc="50" dirty="0">
+              <a:ln w="0"/>
+              <a:solidFill>
+                <a:schemeClr val="bg2"/>
+              </a:solidFill>
+              <a:effectLst>
+                <a:innerShdw blurRad="63500" dist="50800" dir="13500000">
+                  <a:srgbClr val="000000">
+                    <a:alpha val="50000"/>
+                  </a:srgbClr>
+                </a:innerShdw>
+              </a:effectLst>
+            </a:endParaRPr>
           </a:p>
         </p:txBody>
       </p:sp>
@@ -3511,6 +3985,11 @@
   <p:clrMapOvr>
     <a:masterClrMapping/>
   </p:clrMapOvr>
+  <p:extLst>
+    <p:ext uri="{6950BFC3-D8DA-4A85-94F7-54DA5524770B}">
+      <p188:commentRel xmlns:p188="http://schemas.microsoft.com/office/powerpoint/2018/8/main" r:id="rId2"/>
+    </p:ext>
+  </p:extLst>
 </p:sld>
 </file>
 
@@ -3554,19 +4033,62 @@
           <a:p>
             <a:pPr algn="ctr"/>
             <a:r>
-              <a:rPr lang="id-ID" b="1" dirty="0"/>
-              <a:t>BAB 1 — PENDAHULUAN</a:t>
-            </a:r>
-          </a:p>
-        </p:txBody>
-      </p:sp>
-      <p:sp>
-        <p:nvSpPr>
-          <p:cNvPr id="4" name="Action Button: Go Home 3">
+              <a:rPr lang="id-ID" b="1" dirty="0">
+                <a:ln w="0"/>
+                <a:solidFill>
+                  <a:schemeClr val="accent1"/>
+                </a:solidFill>
+                <a:effectLst>
+                  <a:outerShdw blurRad="38100" dist="25400" dir="5400000" algn="ctr" rotWithShape="0">
+                    <a:srgbClr val="6E747A">
+                      <a:alpha val="43000"/>
+                    </a:srgbClr>
+                  </a:outerShdw>
+                </a:effectLst>
+              </a:rPr>
+              <a:t>BAB 1</a:t>
+            </a:r>
+            <a:br>
+              <a:rPr lang="en-US" b="1" dirty="0">
+                <a:ln w="0"/>
+                <a:solidFill>
+                  <a:schemeClr val="accent1"/>
+                </a:solidFill>
+                <a:effectLst>
+                  <a:outerShdw blurRad="38100" dist="25400" dir="5400000" algn="ctr" rotWithShape="0">
+                    <a:srgbClr val="6E747A">
+                      <a:alpha val="43000"/>
+                    </a:srgbClr>
+                  </a:outerShdw>
+                </a:effectLst>
+              </a:rPr>
+            </a:br>
+            <a:r>
+              <a:rPr lang="id-ID" b="1" dirty="0">
+                <a:ln w="0"/>
+                <a:solidFill>
+                  <a:schemeClr val="accent1"/>
+                </a:solidFill>
+                <a:effectLst>
+                  <a:outerShdw blurRad="38100" dist="25400" dir="5400000" algn="ctr" rotWithShape="0">
+                    <a:srgbClr val="6E747A">
+                      <a:alpha val="43000"/>
+                    </a:srgbClr>
+                  </a:outerShdw>
+                </a:effectLst>
+              </a:rPr>
+              <a:t>PENDAHULUAN</a:t>
+            </a:r>
+          </a:p>
+        </p:txBody>
+      </p:sp>
+      <p:sp>
+        <p:nvSpPr>
+          <p:cNvPr id="5" name="Action Button: Go Home 4">
             <a:hlinkClick r:id="rId2" action="ppaction://hlinksldjump" highlightClick="1"/>
             <a:extLst>
               <a:ext uri="{FF2B5EF4-FFF2-40B4-BE49-F238E27FC236}">
-                <a16:creationId xmlns:a16="http://schemas.microsoft.com/office/drawing/2014/main" id="{D50272B9-BD9F-B0CB-9066-37F2ECB2B269}"/>
+                <a16:creationId xmlns:a16="http://schemas.microsoft.com/office/drawing/2014/main" id="{D3DC79DE-9C63-E570-2CD0-50AC04C6B319}"/>
               </a:ext>
             </a:extLst>
           </p:cNvPr>
@@ -3575,13 +4097,22 @@
         </p:nvSpPr>
         <p:spPr>
           <a:xfrm>
-            <a:off x="10522857" y="5747657"/>
-            <a:ext cx="638629" cy="638629"/>
+            <a:off x="11527197" y="6215338"/>
+            <a:ext cx="540000" cy="540000"/>
           </a:xfrm>
           <a:prstGeom prst="actionButtonHome">
             <a:avLst/>
           </a:prstGeom>
-          <a:noFill/>
+          <a:solidFill>
+            <a:schemeClr val="bg1">
+              <a:alpha val="0"/>
+            </a:schemeClr>
+          </a:solidFill>
+          <a:ln>
+            <a:solidFill>
+              <a:schemeClr val="bg1"/>
+            </a:solidFill>
+          </a:ln>
         </p:spPr>
         <p:style>
           <a:lnRef idx="2">
@@ -3605,6 +4136,50 @@
           <a:p>
             <a:pPr algn="ctr"/>
             <a:endParaRPr lang="id-ID"/>
+          </a:p>
+        </p:txBody>
+      </p:sp>
+      <p:sp>
+        <p:nvSpPr>
+          <p:cNvPr id="6" name="TextBox 5">
+            <a:extLst>
+              <a:ext uri="{FF2B5EF4-FFF2-40B4-BE49-F238E27FC236}">
+                <a16:creationId xmlns:a16="http://schemas.microsoft.com/office/drawing/2014/main" id="{A726769E-34AE-2FEE-008A-F244E497CC28}"/>
+              </a:ext>
+            </a:extLst>
+          </p:cNvPr>
+          <p:cNvSpPr txBox="1"/>
+          <p:nvPr/>
+        </p:nvSpPr>
+        <p:spPr>
+          <a:xfrm>
+            <a:off x="1451579" y="2203554"/>
+            <a:ext cx="9603275" cy="2677656"/>
+          </a:xfrm>
+          <a:prstGeom prst="rect">
+            <a:avLst/>
+          </a:prstGeom>
+          <a:noFill/>
+        </p:spPr>
+        <p:txBody>
+          <a:bodyPr wrap="square" rtlCol="0">
+            <a:spAutoFit/>
+          </a:bodyPr>
+          <a:lstStyle/>
+          <a:p>
+            <a:r>
+              <a:rPr lang="id-ID" sz="1400" dirty="0"/>
+              <a:t>Lorem ipsum dolor sit amet, consectetur adipiscing elit. Quisque venenatis ante nibh, in hendrerit neque hendrerit nec. Vivamus mattis pellentesque lectus, vitae condimentum velit aliquam sit amet. Integer risus urna, feugiat a justo vitae, consequat suscipit dui. In ut ornare lectus. Proin vitae lacus pulvinar, fermentum nulla et, pulvinar erat. Donec rutrum tincidunt faucibus. Nam euismod ex eget sapien egestas, in auctor eros pretium. Fusce posuere ultrices lectus at venenatis. Etiam maximus vel velit et fringilla. Vestibulum interdum vulputate nibh, sit amet blandit justo fermentum venenatis. Maecenas mattis pulvinar diam, id imperdiet augue sagittis nec. Suspendisse vitae facilisis nulla. Nam rutrum nisi dolor, a porta sapien porttitor a. Orci varius natoque penatibus et magnis dis parturient montes, nascetur ridiculus mus. Cras sit amet libero porta, ultrices felis vel, dictum leo.</a:t>
+            </a:r>
+          </a:p>
+          <a:p>
+            <a:endParaRPr lang="id-ID" sz="1400" dirty="0"/>
+          </a:p>
+          <a:p>
+            <a:r>
+              <a:rPr lang="id-ID" sz="1400" dirty="0"/>
+              <a:t>Nunc id urna pulvinar, venenatis lorem eu, malesuada nunc. Donec id eros eget augue vulputate pharetra eget non nisi. Praesent vitae hendrerit libero, sed elementum risus. Nam in tellus accumsan augue condimentum lobortis. Sed quis est maximus, tincidunt erat et, posuere neque. In congue, elit eu facilisis porttitor, elit odio dapibus tortor, sollicitudin laoreet lorem libero tincidunt ipsum. Duis eleifend ante eget velit vestibulum malesuada.</a:t>
+            </a:r>
           </a:p>
         </p:txBody>
       </p:sp>
@@ -3661,19 +4236,62 @@
           <a:p>
             <a:pPr algn="ctr"/>
             <a:r>
-              <a:rPr lang="id-ID" b="1" dirty="0"/>
-              <a:t>BAB 2 — MATERI</a:t>
-            </a:r>
-          </a:p>
-        </p:txBody>
-      </p:sp>
-      <p:sp>
-        <p:nvSpPr>
-          <p:cNvPr id="4" name="Action Button: Go Home 3">
+              <a:rPr lang="id-ID" b="1" dirty="0">
+                <a:ln w="0"/>
+                <a:solidFill>
+                  <a:schemeClr val="accent1"/>
+                </a:solidFill>
+                <a:effectLst>
+                  <a:outerShdw blurRad="38100" dist="25400" dir="5400000" algn="ctr" rotWithShape="0">
+                    <a:srgbClr val="6E747A">
+                      <a:alpha val="43000"/>
+                    </a:srgbClr>
+                  </a:outerShdw>
+                </a:effectLst>
+              </a:rPr>
+              <a:t>BAB 2</a:t>
+            </a:r>
+            <a:br>
+              <a:rPr lang="en-US" b="1" dirty="0">
+                <a:ln w="0"/>
+                <a:solidFill>
+                  <a:schemeClr val="accent1"/>
+                </a:solidFill>
+                <a:effectLst>
+                  <a:outerShdw blurRad="38100" dist="25400" dir="5400000" algn="ctr" rotWithShape="0">
+                    <a:srgbClr val="6E747A">
+                      <a:alpha val="43000"/>
+                    </a:srgbClr>
+                  </a:outerShdw>
+                </a:effectLst>
+              </a:rPr>
+            </a:br>
+            <a:r>
+              <a:rPr lang="id-ID" b="1" dirty="0">
+                <a:ln w="0"/>
+                <a:solidFill>
+                  <a:schemeClr val="accent1"/>
+                </a:solidFill>
+                <a:effectLst>
+                  <a:outerShdw blurRad="38100" dist="25400" dir="5400000" algn="ctr" rotWithShape="0">
+                    <a:srgbClr val="6E747A">
+                      <a:alpha val="43000"/>
+                    </a:srgbClr>
+                  </a:outerShdw>
+                </a:effectLst>
+              </a:rPr>
+              <a:t>MATERI</a:t>
+            </a:r>
+          </a:p>
+        </p:txBody>
+      </p:sp>
+      <p:sp>
+        <p:nvSpPr>
+          <p:cNvPr id="7" name="Action Button: Go Home 6">
             <a:hlinkClick r:id="rId2" action="ppaction://hlinksldjump" highlightClick="1"/>
             <a:extLst>
               <a:ext uri="{FF2B5EF4-FFF2-40B4-BE49-F238E27FC236}">
-                <a16:creationId xmlns:a16="http://schemas.microsoft.com/office/drawing/2014/main" id="{11C99A9B-01E3-C451-0FCA-2CE3FB7ACEA3}"/>
+                <a16:creationId xmlns:a16="http://schemas.microsoft.com/office/drawing/2014/main" id="{415312D9-3213-8489-8004-73F5FDFA8994}"/>
               </a:ext>
             </a:extLst>
           </p:cNvPr>
@@ -3682,13 +4300,22 @@
         </p:nvSpPr>
         <p:spPr>
           <a:xfrm>
-            <a:off x="10522857" y="5747657"/>
-            <a:ext cx="638629" cy="638629"/>
+            <a:off x="11527197" y="6215338"/>
+            <a:ext cx="540000" cy="540000"/>
           </a:xfrm>
           <a:prstGeom prst="actionButtonHome">
             <a:avLst/>
           </a:prstGeom>
-          <a:noFill/>
+          <a:solidFill>
+            <a:schemeClr val="bg1">
+              <a:alpha val="0"/>
+            </a:schemeClr>
+          </a:solidFill>
+          <a:ln>
+            <a:solidFill>
+              <a:schemeClr val="bg1"/>
+            </a:solidFill>
+          </a:ln>
         </p:spPr>
         <p:style>
           <a:lnRef idx="2">
@@ -3712,6 +4339,50 @@
           <a:p>
             <a:pPr algn="ctr"/>
             <a:endParaRPr lang="id-ID"/>
+          </a:p>
+        </p:txBody>
+      </p:sp>
+      <p:sp>
+        <p:nvSpPr>
+          <p:cNvPr id="9" name="TextBox 8">
+            <a:extLst>
+              <a:ext uri="{FF2B5EF4-FFF2-40B4-BE49-F238E27FC236}">
+                <a16:creationId xmlns:a16="http://schemas.microsoft.com/office/drawing/2014/main" id="{DB9B9BAB-D4E0-0551-989E-0DFF8CAECD99}"/>
+              </a:ext>
+            </a:extLst>
+          </p:cNvPr>
+          <p:cNvSpPr txBox="1"/>
+          <p:nvPr/>
+        </p:nvSpPr>
+        <p:spPr>
+          <a:xfrm>
+            <a:off x="1451579" y="2203554"/>
+            <a:ext cx="9603275" cy="2677656"/>
+          </a:xfrm>
+          <a:prstGeom prst="rect">
+            <a:avLst/>
+          </a:prstGeom>
+          <a:noFill/>
+        </p:spPr>
+        <p:txBody>
+          <a:bodyPr wrap="square" rtlCol="0">
+            <a:spAutoFit/>
+          </a:bodyPr>
+          <a:lstStyle/>
+          <a:p>
+            <a:r>
+              <a:rPr lang="id-ID" sz="1400" dirty="0"/>
+              <a:t>Lorem ipsum dolor sit amet, consectetur adipiscing elit. Quisque venenatis ante nibh, in hendrerit neque hendrerit nec. Vivamus mattis pellentesque lectus, vitae condimentum velit aliquam sit amet. Integer risus urna, feugiat a justo vitae, consequat suscipit dui. In ut ornare lectus. Proin vitae lacus pulvinar, fermentum nulla et, pulvinar erat. Donec rutrum tincidunt faucibus. Nam euismod ex eget sapien egestas, in auctor eros pretium. Fusce posuere ultrices lectus at venenatis. Etiam maximus vel velit et fringilla. Vestibulum interdum vulputate nibh, sit amet blandit justo fermentum venenatis. Maecenas mattis pulvinar diam, id imperdiet augue sagittis nec. Suspendisse vitae facilisis nulla. Nam rutrum nisi dolor, a porta sapien porttitor a. Orci varius natoque penatibus et magnis dis parturient montes, nascetur ridiculus mus. Cras sit amet libero porta, ultrices felis vel, dictum leo.</a:t>
+            </a:r>
+          </a:p>
+          <a:p>
+            <a:endParaRPr lang="id-ID" sz="1400" dirty="0"/>
+          </a:p>
+          <a:p>
+            <a:r>
+              <a:rPr lang="id-ID" sz="1400" dirty="0"/>
+              <a:t>Nunc id urna pulvinar, venenatis lorem eu, malesuada nunc. Donec id eros eget augue vulputate pharetra eget non nisi. Praesent vitae hendrerit libero, sed elementum risus. Nam in tellus accumsan augue condimentum lobortis. Sed quis est maximus, tincidunt erat et, posuere neque. In congue, elit eu facilisis porttitor, elit odio dapibus tortor, sollicitudin laoreet lorem libero tincidunt ipsum. Duis eleifend ante eget velit vestibulum malesuada.</a:t>
+            </a:r>
           </a:p>
         </p:txBody>
       </p:sp>
@@ -3768,19 +4439,62 @@
           <a:p>
             <a:pPr algn="ctr"/>
             <a:r>
-              <a:rPr lang="id-ID" b="1" dirty="0"/>
-              <a:t>BAB 3 — KESIMPULAN</a:t>
-            </a:r>
-          </a:p>
-        </p:txBody>
-      </p:sp>
-      <p:sp>
-        <p:nvSpPr>
-          <p:cNvPr id="4" name="Action Button: Go Home 3">
+              <a:rPr lang="id-ID" b="1" dirty="0">
+                <a:ln w="0"/>
+                <a:solidFill>
+                  <a:schemeClr val="accent1"/>
+                </a:solidFill>
+                <a:effectLst>
+                  <a:outerShdw blurRad="38100" dist="25400" dir="5400000" algn="ctr" rotWithShape="0">
+                    <a:srgbClr val="6E747A">
+                      <a:alpha val="43000"/>
+                    </a:srgbClr>
+                  </a:outerShdw>
+                </a:effectLst>
+              </a:rPr>
+              <a:t>BAB 3</a:t>
+            </a:r>
+            <a:br>
+              <a:rPr lang="en-US" b="1" dirty="0">
+                <a:ln w="0"/>
+                <a:solidFill>
+                  <a:schemeClr val="accent1"/>
+                </a:solidFill>
+                <a:effectLst>
+                  <a:outerShdw blurRad="38100" dist="25400" dir="5400000" algn="ctr" rotWithShape="0">
+                    <a:srgbClr val="6E747A">
+                      <a:alpha val="43000"/>
+                    </a:srgbClr>
+                  </a:outerShdw>
+                </a:effectLst>
+              </a:rPr>
+            </a:br>
+            <a:r>
+              <a:rPr lang="id-ID" b="1" dirty="0">
+                <a:ln w="0"/>
+                <a:solidFill>
+                  <a:schemeClr val="accent1"/>
+                </a:solidFill>
+                <a:effectLst>
+                  <a:outerShdw blurRad="38100" dist="25400" dir="5400000" algn="ctr" rotWithShape="0">
+                    <a:srgbClr val="6E747A">
+                      <a:alpha val="43000"/>
+                    </a:srgbClr>
+                  </a:outerShdw>
+                </a:effectLst>
+              </a:rPr>
+              <a:t>KESIMPULAN</a:t>
+            </a:r>
+          </a:p>
+        </p:txBody>
+      </p:sp>
+      <p:sp>
+        <p:nvSpPr>
+          <p:cNvPr id="7" name="Action Button: Go Home 6">
             <a:hlinkClick r:id="rId2" action="ppaction://hlinksldjump" highlightClick="1"/>
             <a:extLst>
               <a:ext uri="{FF2B5EF4-FFF2-40B4-BE49-F238E27FC236}">
-                <a16:creationId xmlns:a16="http://schemas.microsoft.com/office/drawing/2014/main" id="{08E2AF37-1398-E787-EFA6-B062EF6A0F37}"/>
+                <a16:creationId xmlns:a16="http://schemas.microsoft.com/office/drawing/2014/main" id="{3BFFB4FA-7F36-01A5-BC89-3A8B471E12A3}"/>
               </a:ext>
             </a:extLst>
           </p:cNvPr>
@@ -3789,13 +4503,22 @@
         </p:nvSpPr>
         <p:spPr>
           <a:xfrm>
-            <a:off x="10522857" y="5747657"/>
-            <a:ext cx="638629" cy="638629"/>
+            <a:off x="11527197" y="6215338"/>
+            <a:ext cx="540000" cy="540000"/>
           </a:xfrm>
           <a:prstGeom prst="actionButtonHome">
             <a:avLst/>
           </a:prstGeom>
-          <a:noFill/>
+          <a:solidFill>
+            <a:schemeClr val="bg1">
+              <a:alpha val="0"/>
+            </a:schemeClr>
+          </a:solidFill>
+          <a:ln>
+            <a:solidFill>
+              <a:schemeClr val="bg1"/>
+            </a:solidFill>
+          </a:ln>
         </p:spPr>
         <p:style>
           <a:lnRef idx="2">
@@ -3819,6 +4542,50 @@
           <a:p>
             <a:pPr algn="ctr"/>
             <a:endParaRPr lang="id-ID"/>
+          </a:p>
+        </p:txBody>
+      </p:sp>
+      <p:sp>
+        <p:nvSpPr>
+          <p:cNvPr id="9" name="TextBox 8">
+            <a:extLst>
+              <a:ext uri="{FF2B5EF4-FFF2-40B4-BE49-F238E27FC236}">
+                <a16:creationId xmlns:a16="http://schemas.microsoft.com/office/drawing/2014/main" id="{EDD36F41-1F6A-9D2E-D46E-F58908B5BF79}"/>
+              </a:ext>
+            </a:extLst>
+          </p:cNvPr>
+          <p:cNvSpPr txBox="1"/>
+          <p:nvPr/>
+        </p:nvSpPr>
+        <p:spPr>
+          <a:xfrm>
+            <a:off x="1451579" y="2203554"/>
+            <a:ext cx="9603275" cy="2677656"/>
+          </a:xfrm>
+          <a:prstGeom prst="rect">
+            <a:avLst/>
+          </a:prstGeom>
+          <a:noFill/>
+        </p:spPr>
+        <p:txBody>
+          <a:bodyPr wrap="square" rtlCol="0">
+            <a:spAutoFit/>
+          </a:bodyPr>
+          <a:lstStyle/>
+          <a:p>
+            <a:r>
+              <a:rPr lang="id-ID" sz="1400" dirty="0"/>
+              <a:t>Lorem ipsum dolor sit amet, consectetur adipiscing elit. Quisque venenatis ante nibh, in hendrerit neque hendrerit nec. Vivamus mattis pellentesque lectus, vitae condimentum velit aliquam sit amet. Integer risus urna, feugiat a justo vitae, consequat suscipit dui. In ut ornare lectus. Proin vitae lacus pulvinar, fermentum nulla et, pulvinar erat. Donec rutrum tincidunt faucibus. Nam euismod ex eget sapien egestas, in auctor eros pretium. Fusce posuere ultrices lectus at venenatis. Etiam maximus vel velit et fringilla. Vestibulum interdum vulputate nibh, sit amet blandit justo fermentum venenatis. Maecenas mattis pulvinar diam, id imperdiet augue sagittis nec. Suspendisse vitae facilisis nulla. Nam rutrum nisi dolor, a porta sapien porttitor a. Orci varius natoque penatibus et magnis dis parturient montes, nascetur ridiculus mus. Cras sit amet libero porta, ultrices felis vel, dictum leo.</a:t>
+            </a:r>
+          </a:p>
+          <a:p>
+            <a:endParaRPr lang="id-ID" sz="1400" dirty="0"/>
+          </a:p>
+          <a:p>
+            <a:r>
+              <a:rPr lang="id-ID" sz="1400" dirty="0"/>
+              <a:t>Nunc id urna pulvinar, venenatis lorem eu, malesuada nunc. Donec id eros eget augue vulputate pharetra eget non nisi. Praesent vitae hendrerit libero, sed elementum risus. Nam in tellus accumsan augue condimentum lobortis. Sed quis est maximus, tincidunt erat et, posuere neque. In congue, elit eu facilisis porttitor, elit odio dapibus tortor, sollicitudin laoreet lorem libero tincidunt ipsum. Duis eleifend ante eget velit vestibulum malesuada.</a:t>
+            </a:r>
           </a:p>
         </p:txBody>
       </p:sp>
@@ -3875,19 +4642,64 @@
           <a:p>
             <a:pPr algn="ctr"/>
             <a:r>
-              <a:rPr lang="id-ID" b="1" dirty="0"/>
+              <a:rPr lang="id-ID" b="1" dirty="0">
+                <a:ln w="0"/>
+                <a:solidFill>
+                  <a:schemeClr val="accent1"/>
+                </a:solidFill>
+                <a:effectLst>
+                  <a:outerShdw blurRad="38100" dist="25400" dir="5400000" algn="ctr" rotWithShape="0">
+                    <a:srgbClr val="6E747A">
+                      <a:alpha val="43000"/>
+                    </a:srgbClr>
+                  </a:outerShdw>
+                </a:effectLst>
+              </a:rPr>
               <a:t>VIDEO</a:t>
             </a:r>
           </a:p>
         </p:txBody>
       </p:sp>
-      <p:sp>
-        <p:nvSpPr>
-          <p:cNvPr id="4" name="Action Button: Go Home 3">
-            <a:hlinkClick r:id="rId3" action="ppaction://hlinksldjump" highlightClick="1"/>
+      <p:pic>
+        <p:nvPicPr>
+          <p:cNvPr id="5" name="Online Media 4" title="Kecelakaan pada Lap Pemanasan MotoGP Le Mans, Prancis 2019">
+            <a:hlinkClick r:id="" action="ppaction://media"/>
             <a:extLst>
               <a:ext uri="{FF2B5EF4-FFF2-40B4-BE49-F238E27FC236}">
-                <a16:creationId xmlns:a16="http://schemas.microsoft.com/office/drawing/2014/main" id="{A2095C44-F918-2854-1CF3-C4EBE72557A5}"/>
+                <a16:creationId xmlns:a16="http://schemas.microsoft.com/office/drawing/2014/main" id="{2B795F7F-B7F9-312D-124A-C45CD9254956}"/>
+              </a:ext>
+            </a:extLst>
+          </p:cNvPr>
+          <p:cNvPicPr>
+            <a:picLocks noRot="1" noChangeAspect="1"/>
+          </p:cNvPicPr>
+          <p:nvPr>
+            <a:videoFile r:link="rId1"/>
+          </p:nvPr>
+        </p:nvPicPr>
+        <p:blipFill>
+          <a:blip r:embed="rId3"/>
+          <a:stretch>
+            <a:fillRect/>
+          </a:stretch>
+        </p:blipFill>
+        <p:spPr>
+          <a:xfrm>
+            <a:off x="1451579" y="2020472"/>
+            <a:ext cx="9603275" cy="3911600"/>
+          </a:xfrm>
+          <a:prstGeom prst="rect">
+            <a:avLst/>
+          </a:prstGeom>
+        </p:spPr>
+      </p:pic>
+      <p:sp>
+        <p:nvSpPr>
+          <p:cNvPr id="6" name="Action Button: Go Home 5">
+            <a:hlinkClick r:id="rId4" action="ppaction://hlinksldjump" highlightClick="1"/>
+            <a:extLst>
+              <a:ext uri="{FF2B5EF4-FFF2-40B4-BE49-F238E27FC236}">
+                <a16:creationId xmlns:a16="http://schemas.microsoft.com/office/drawing/2014/main" id="{551C8003-175D-142D-00D8-0BE6338166D7}"/>
               </a:ext>
             </a:extLst>
           </p:cNvPr>
@@ -3896,13 +4708,22 @@
         </p:nvSpPr>
         <p:spPr>
           <a:xfrm>
-            <a:off x="10522857" y="5747657"/>
-            <a:ext cx="638629" cy="638629"/>
+            <a:off x="11527197" y="6215338"/>
+            <a:ext cx="540000" cy="540000"/>
           </a:xfrm>
           <a:prstGeom prst="actionButtonHome">
             <a:avLst/>
           </a:prstGeom>
-          <a:noFill/>
+          <a:solidFill>
+            <a:schemeClr val="bg1">
+              <a:alpha val="0"/>
+            </a:schemeClr>
+          </a:solidFill>
+          <a:ln>
+            <a:solidFill>
+              <a:schemeClr val="bg1"/>
+            </a:solidFill>
+          </a:ln>
         </p:spPr>
         <p:style>
           <a:lnRef idx="2">
@@ -3929,39 +4750,6 @@
           </a:p>
         </p:txBody>
       </p:sp>
-      <p:pic>
-        <p:nvPicPr>
-          <p:cNvPr id="5" name="Online Media 4" title="Kecelakaan pada Lap Pemanasan MotoGP Le Mans, Prancis 2019">
-            <a:hlinkClick r:id="" action="ppaction://media"/>
-            <a:extLst>
-              <a:ext uri="{FF2B5EF4-FFF2-40B4-BE49-F238E27FC236}">
-                <a16:creationId xmlns:a16="http://schemas.microsoft.com/office/drawing/2014/main" id="{2B795F7F-B7F9-312D-124A-C45CD9254956}"/>
-              </a:ext>
-            </a:extLst>
-          </p:cNvPr>
-          <p:cNvPicPr>
-            <a:picLocks noRot="1" noChangeAspect="1"/>
-          </p:cNvPicPr>
-          <p:nvPr>
-            <a:videoFile r:link="rId1"/>
-          </p:nvPr>
-        </p:nvPicPr>
-        <p:blipFill>
-          <a:blip r:embed="rId4"/>
-          <a:stretch>
-            <a:fillRect/>
-          </a:stretch>
-        </p:blipFill>
-        <p:spPr>
-          <a:xfrm>
-            <a:off x="2634415" y="1473200"/>
-            <a:ext cx="6923170" cy="3911600"/>
-          </a:xfrm>
-          <a:prstGeom prst="rect">
-            <a:avLst/>
-          </a:prstGeom>
-        </p:spPr>
-      </p:pic>
     </p:spTree>
     <p:extLst>
       <p:ext uri="{BB962C8B-B14F-4D97-AF65-F5344CB8AC3E}">
@@ -4114,9 +4902,9 @@
 </file>
 
 <file path=ppt/theme/theme1.xml><?xml version="1.0" encoding="utf-8"?>
-<a:theme xmlns:a="http://schemas.openxmlformats.org/drawingml/2006/main" name="Office Theme">
+<a:theme xmlns:a="http://schemas.openxmlformats.org/drawingml/2006/main" name="Gallery">
   <a:themeElements>
-    <a:clrScheme name="Office">
+    <a:clrScheme name="Gallery">
       <a:dk1>
         <a:sysClr val="windowText" lastClr="000000"/>
       </a:dk1>
@@ -4124,39 +4912,39 @@
         <a:sysClr val="window" lastClr="FFFFFF"/>
       </a:lt1>
       <a:dk2>
-        <a:srgbClr val="0E2841"/>
+        <a:srgbClr val="454545"/>
       </a:dk2>
       <a:lt2>
-        <a:srgbClr val="E8E8E8"/>
+        <a:srgbClr val="DFDBD5"/>
       </a:lt2>
       <a:accent1>
-        <a:srgbClr val="156082"/>
+        <a:srgbClr val="B71E42"/>
       </a:accent1>
       <a:accent2>
-        <a:srgbClr val="E97132"/>
+        <a:srgbClr val="DE478E"/>
       </a:accent2>
       <a:accent3>
-        <a:srgbClr val="196B24"/>
+        <a:srgbClr val="BC72F0"/>
       </a:accent3>
       <a:accent4>
-        <a:srgbClr val="0F9ED5"/>
+        <a:srgbClr val="795FAF"/>
       </a:accent4>
       <a:accent5>
-        <a:srgbClr val="A02B93"/>
+        <a:srgbClr val="586EA6"/>
       </a:accent5>
       <a:accent6>
-        <a:srgbClr val="4EA72E"/>
+        <a:srgbClr val="6892A0"/>
       </a:accent6>
       <a:hlink>
-        <a:srgbClr val="467886"/>
+        <a:srgbClr val="FA2B5C"/>
       </a:hlink>
       <a:folHlink>
-        <a:srgbClr val="96607D"/>
+        <a:srgbClr val="BC658E"/>
       </a:folHlink>
     </a:clrScheme>
-    <a:fontScheme name="Office">
+    <a:fontScheme name="Gallery">
       <a:majorFont>
-        <a:latin typeface="Aptos Display" panose="02110004020202020204"/>
+        <a:latin typeface="Gill Sans MT" panose="020B0502020104020203"/>
         <a:ea typeface=""/>
         <a:cs typeface=""/>
         <a:font script="Jpan" typeface="游ゴシック Light"/>
@@ -4189,26 +4977,9 @@
         <a:font script="Viet" typeface="Times New Roman"/>
         <a:font script="Uigh" typeface="Microsoft Uighur"/>
         <a:font script="Geor" typeface="Sylfaen"/>
-        <a:font script="Armn" typeface="Arial"/>
-        <a:font script="Bugi" typeface="Leelawadee UI"/>
-        <a:font script="Bopo" typeface="Microsoft JhengHei"/>
-        <a:font script="Java" typeface="Javanese Text"/>
-        <a:font script="Lisu" typeface="Segoe UI"/>
-        <a:font script="Mymr" typeface="Myanmar Text"/>
-        <a:font script="Nkoo" typeface="Ebrima"/>
-        <a:font script="Olck" typeface="Nirmala UI"/>
-        <a:font script="Osma" typeface="Ebrima"/>
-        <a:font script="Phag" typeface="Phagspa"/>
-        <a:font script="Syrn" typeface="Estrangelo Edessa"/>
-        <a:font script="Syrj" typeface="Estrangelo Edessa"/>
-        <a:font script="Syre" typeface="Estrangelo Edessa"/>
-        <a:font script="Sora" typeface="Nirmala UI"/>
-        <a:font script="Tale" typeface="Microsoft Tai Le"/>
-        <a:font script="Talu" typeface="Microsoft New Tai Lue"/>
-        <a:font script="Tfng" typeface="Ebrima"/>
       </a:majorFont>
       <a:minorFont>
-        <a:latin typeface="Aptos" panose="02110004020202020204"/>
+        <a:latin typeface="Gill Sans MT" panose="020B0502020104020203"/>
         <a:ea typeface=""/>
         <a:cs typeface=""/>
         <a:font script="Jpan" typeface="游ゴシック"/>
@@ -4241,26 +5012,9 @@
         <a:font script="Viet" typeface="Arial"/>
         <a:font script="Uigh" typeface="Microsoft Uighur"/>
         <a:font script="Geor" typeface="Sylfaen"/>
-        <a:font script="Armn" typeface="Arial"/>
-        <a:font script="Bugi" typeface="Leelawadee UI"/>
-        <a:font script="Bopo" typeface="Microsoft JhengHei"/>
-        <a:font script="Java" typeface="Javanese Text"/>
-        <a:font script="Lisu" typeface="Segoe UI"/>
-        <a:font script="Mymr" typeface="Myanmar Text"/>
-        <a:font script="Nkoo" typeface="Ebrima"/>
-        <a:font script="Olck" typeface="Nirmala UI"/>
-        <a:font script="Osma" typeface="Ebrima"/>
-        <a:font script="Phag" typeface="Phagspa"/>
-        <a:font script="Syrn" typeface="Estrangelo Edessa"/>
-        <a:font script="Syrj" typeface="Estrangelo Edessa"/>
-        <a:font script="Syre" typeface="Estrangelo Edessa"/>
-        <a:font script="Sora" typeface="Nirmala UI"/>
-        <a:font script="Tale" typeface="Microsoft Tai Le"/>
-        <a:font script="Talu" typeface="Microsoft New Tai Lue"/>
-        <a:font script="Tfng" typeface="Ebrima"/>
       </a:minorFont>
     </a:fontScheme>
-    <a:fmtScheme name="Office">
+    <a:fmtScheme name="Gallery">
       <a:fillStyleLst>
         <a:solidFill>
           <a:schemeClr val="phClr"/>
@@ -4269,23 +5023,18 @@
           <a:gsLst>
             <a:gs pos="0">
               <a:schemeClr val="phClr">
+                <a:tint val="54000"/>
+                <a:alpha val="100000"/>
+                <a:satMod val="105000"/>
                 <a:lumMod val="110000"/>
-                <a:satMod val="105000"/>
-                <a:tint val="67000"/>
-              </a:schemeClr>
-            </a:gs>
-            <a:gs pos="50000">
-              <a:schemeClr val="phClr">
-                <a:lumMod val="105000"/>
-                <a:satMod val="103000"/>
-                <a:tint val="73000"/>
               </a:schemeClr>
             </a:gs>
             <a:gs pos="100000">
               <a:schemeClr val="phClr">
-                <a:lumMod val="105000"/>
+                <a:tint val="78000"/>
+                <a:alpha val="92000"/>
                 <a:satMod val="109000"/>
-                <a:tint val="81000"/>
+                <a:lumMod val="100000"/>
               </a:schemeClr>
             </a:gs>
           </a:gsLst>
@@ -4295,23 +5044,23 @@
           <a:gsLst>
             <a:gs pos="0">
               <a:schemeClr val="phClr">
-                <a:satMod val="103000"/>
-                <a:lumMod val="102000"/>
-                <a:tint val="94000"/>
+                <a:tint val="98000"/>
+                <a:satMod val="110000"/>
+                <a:lumMod val="104000"/>
               </a:schemeClr>
             </a:gs>
-            <a:gs pos="50000">
+            <a:gs pos="69000">
               <a:schemeClr val="phClr">
-                <a:satMod val="110000"/>
-                <a:lumMod val="100000"/>
-                <a:shade val="100000"/>
+                <a:shade val="88000"/>
+                <a:satMod val="130000"/>
+                <a:lumMod val="92000"/>
               </a:schemeClr>
             </a:gs>
             <a:gs pos="100000">
               <a:schemeClr val="phClr">
-                <a:lumMod val="99000"/>
-                <a:satMod val="120000"/>
                 <a:shade val="78000"/>
+                <a:satMod val="130000"/>
+                <a:lumMod val="92000"/>
               </a:schemeClr>
             </a:gs>
           </a:gsLst>
@@ -4319,26 +5068,23 @@
         </a:gradFill>
       </a:fillStyleLst>
       <a:lnStyleLst>
-        <a:ln w="12700" cap="flat" cmpd="sng" algn="ctr">
+        <a:ln w="9525" cap="flat" cmpd="sng" algn="ctr">
           <a:solidFill>
             <a:schemeClr val="phClr"/>
           </a:solidFill>
           <a:prstDash val="solid"/>
-          <a:miter lim="800000"/>
         </a:ln>
-        <a:ln w="19050" cap="flat" cmpd="sng" algn="ctr">
+        <a:ln w="15875" cap="flat" cmpd="sng" algn="ctr">
           <a:solidFill>
             <a:schemeClr val="phClr"/>
           </a:solidFill>
           <a:prstDash val="solid"/>
-          <a:miter lim="800000"/>
         </a:ln>
-        <a:ln w="25400" cap="flat" cmpd="sng" algn="ctr">
+        <a:ln w="22225" cap="flat" cmpd="sng" algn="ctr">
           <a:solidFill>
             <a:schemeClr val="phClr"/>
           </a:solidFill>
           <a:prstDash val="solid"/>
-          <a:miter lim="800000"/>
         </a:ln>
       </a:lnStyleLst>
       <a:effectStyleLst>
@@ -4350,12 +5096,23 @@
         </a:effectStyle>
         <a:effectStyle>
           <a:effectLst>
-            <a:outerShdw blurRad="57150" dist="19050" dir="5400000" algn="ctr" rotWithShape="0">
+            <a:outerShdw blurRad="50800" dist="50800" dir="5400000" sx="96000" sy="96000" rotWithShape="0">
               <a:srgbClr val="000000">
-                <a:alpha val="63000"/>
+                <a:alpha val="48000"/>
               </a:srgbClr>
             </a:outerShdw>
           </a:effectLst>
+          <a:scene3d>
+            <a:camera prst="orthographicFront">
+              <a:rot lat="0" lon="0" rev="0"/>
+            </a:camera>
+            <a:lightRig rig="balanced" dir="t">
+              <a:rot lat="0" lon="0" rev="1080000"/>
+            </a:lightRig>
+          </a:scene3d>
+          <a:sp3d>
+            <a:bevelT w="38100" h="12700" prst="softRound"/>
+          </a:sp3d>
         </a:effectStyle>
       </a:effectStyleLst>
       <a:bgFillStyleLst>
@@ -4363,66 +5120,35 @@
           <a:schemeClr val="phClr"/>
         </a:solidFill>
         <a:solidFill>
-          <a:schemeClr val="phClr">
-            <a:tint val="95000"/>
-            <a:satMod val="170000"/>
-          </a:schemeClr>
+          <a:schemeClr val="phClr"/>
         </a:solidFill>
         <a:gradFill rotWithShape="1">
           <a:gsLst>
             <a:gs pos="0">
               <a:schemeClr val="phClr">
-                <a:tint val="93000"/>
-                <a:satMod val="150000"/>
-                <a:shade val="98000"/>
-                <a:lumMod val="102000"/>
-              </a:schemeClr>
-            </a:gs>
-            <a:gs pos="50000">
-              <a:schemeClr val="phClr">
-                <a:tint val="98000"/>
-                <a:satMod val="130000"/>
-                <a:shade val="90000"/>
-                <a:lumMod val="103000"/>
+                <a:tint val="94000"/>
+                <a:satMod val="80000"/>
+                <a:lumMod val="106000"/>
               </a:schemeClr>
             </a:gs>
             <a:gs pos="100000">
               <a:schemeClr val="phClr">
-                <a:shade val="63000"/>
-                <a:satMod val="120000"/>
+                <a:shade val="80000"/>
               </a:schemeClr>
             </a:gs>
           </a:gsLst>
-          <a:lin ang="5400000" scaled="0"/>
+          <a:path path="circle">
+            <a:fillToRect l="50000" t="50000" r="50000" b="50000"/>
+          </a:path>
         </a:gradFill>
       </a:bgFillStyleLst>
     </a:fmtScheme>
   </a:themeElements>
-  <a:objectDefaults>
-    <a:lnDef>
-      <a:spPr/>
-      <a:bodyPr/>
-      <a:lstStyle/>
-      <a:style>
-        <a:lnRef idx="2">
-          <a:schemeClr val="accent1"/>
-        </a:lnRef>
-        <a:fillRef idx="0">
-          <a:schemeClr val="accent1"/>
-        </a:fillRef>
-        <a:effectRef idx="1">
-          <a:schemeClr val="accent1"/>
-        </a:effectRef>
-        <a:fontRef idx="minor">
-          <a:schemeClr val="tx1"/>
-        </a:fontRef>
-      </a:style>
-    </a:lnDef>
-  </a:objectDefaults>
+  <a:objectDefaults/>
   <a:extraClrSchemeLst/>
   <a:extLst>
     <a:ext uri="{05A4C25C-085E-4340-85A3-A5531E510DB2}">
-      <thm15:themeFamily xmlns:thm15="http://schemas.microsoft.com/office/thememl/2012/main" name="Office Theme" id="{2E142A2C-CD16-42D6-873A-C26D2A0506FA}" vid="{1BDDFF52-6CD6-40A5-AB3C-68EB2F1E4D0A}"/>
+      <thm15:themeFamily xmlns:thm15="http://schemas.microsoft.com/office/thememl/2012/main" name="Gallery" id="{BBFCD31E-59A1-489D-B089-A3EAD7CAE12E}" vid="{F5E91637-A7B6-4E27-B710-77DA7014EE1E}"/>
     </a:ext>
   </a:extLst>
 </a:theme>

--- a/assets/files/presentasi-interaktif.pptx
+++ b/assets/files/presentasi-interaktif.pptx
@@ -2,7 +2,7 @@
 <file path=ppt/presentation.xml><?xml version="1.0" encoding="utf-8"?>
 <p:presentation xmlns:a="http://schemas.openxmlformats.org/drawingml/2006/main" xmlns:r="http://schemas.openxmlformats.org/officeDocument/2006/relationships" xmlns:p="http://schemas.openxmlformats.org/presentationml/2006/main" saveSubsetFonts="1">
   <p:sldMasterIdLst>
-    <p:sldMasterId id="2147483660" r:id="rId1"/>
+    <p:sldMasterId id="2147483684" r:id="rId1"/>
   </p:sldMasterIdLst>
   <p:sldIdLst>
     <p:sldId id="256" r:id="rId2"/>
@@ -122,29 +122,8 @@
 </p188:authorLst>
 </file>
 
-<file path=ppt/comments/modernComment_100_DCC6C6BE.xml><?xml version="1.0" encoding="utf-8"?>
-<p188:cmLst xmlns:a="http://schemas.openxmlformats.org/drawingml/2006/main" xmlns:r="http://schemas.openxmlformats.org/officeDocument/2006/relationships" xmlns:p188="http://schemas.microsoft.com/office/powerpoint/2018/8/main">
-  <p188:cm id="{F6A6D91F-A11C-4687-9D87-74A696D2750E}" authorId="{9F700349-370D-CFA4-24E5-77F4F624ABBF}" created="2026-07-06T15:20:07.942">
-    <pc:sldMkLst xmlns:pc="http://schemas.microsoft.com/office/powerpoint/2013/main/command">
-      <pc:docMk/>
-      <pc:sldMk cId="3704014526" sldId="256"/>
-    </pc:sldMkLst>
-    <p188:txBody>
-      <a:bodyPr/>
-      <a:lstStyle/>
-      <a:p>
-        <a:r>
-          <a:rPr lang="id-ID"/>
-          <a:t>Menu Utama</a:t>
-        </a:r>
-      </a:p>
-    </p188:txBody>
-  </p188:cm>
-</p188:cmLst>
-</file>
-
 <file path=ppt/slideLayouts/slideLayout1.xml><?xml version="1.0" encoding="utf-8"?>
-<p:sldLayout xmlns:a="http://schemas.openxmlformats.org/drawingml/2006/main" xmlns:r="http://schemas.openxmlformats.org/officeDocument/2006/relationships" xmlns:p="http://schemas.openxmlformats.org/presentationml/2006/main" type="title" preserve="1">
+<p:sldLayout xmlns:a="http://schemas.openxmlformats.org/drawingml/2006/main" xmlns:r="http://schemas.openxmlformats.org/officeDocument/2006/relationships" xmlns:p="http://schemas.openxmlformats.org/presentationml/2006/main" showMasterSp="0" type="title" preserve="1">
   <p:cSld name="Title Slide">
     <p:spTree>
       <p:nvGrpSpPr>
@@ -162,6 +141,82 @@
       </p:grpSpPr>
       <p:sp>
         <p:nvSpPr>
+          <p:cNvPr id="7" name="Rectangle 6"/>
+          <p:cNvSpPr/>
+          <p:nvPr/>
+        </p:nvSpPr>
+        <p:spPr>
+          <a:xfrm>
+            <a:off x="3175" y="6400800"/>
+            <a:ext cx="12188825" cy="457200"/>
+          </a:xfrm>
+          <a:prstGeom prst="rect">
+            <a:avLst/>
+          </a:prstGeom>
+          <a:solidFill>
+            <a:schemeClr val="accent2"/>
+          </a:solidFill>
+          <a:ln>
+            <a:noFill/>
+          </a:ln>
+        </p:spPr>
+        <p:style>
+          <a:lnRef idx="2">
+            <a:schemeClr val="accent1">
+              <a:shade val="50000"/>
+            </a:schemeClr>
+          </a:lnRef>
+          <a:fillRef idx="1">
+            <a:schemeClr val="accent1"/>
+          </a:fillRef>
+          <a:effectRef idx="0">
+            <a:schemeClr val="accent1"/>
+          </a:effectRef>
+          <a:fontRef idx="minor">
+            <a:schemeClr val="lt1"/>
+          </a:fontRef>
+        </p:style>
+      </p:sp>
+      <p:sp>
+        <p:nvSpPr>
+          <p:cNvPr id="8" name="Rectangle 7"/>
+          <p:cNvSpPr/>
+          <p:nvPr/>
+        </p:nvSpPr>
+        <p:spPr>
+          <a:xfrm>
+            <a:off x="15" y="6334316"/>
+            <a:ext cx="12188825" cy="64008"/>
+          </a:xfrm>
+          <a:prstGeom prst="rect">
+            <a:avLst/>
+          </a:prstGeom>
+          <a:solidFill>
+            <a:schemeClr val="accent1"/>
+          </a:solidFill>
+          <a:ln>
+            <a:noFill/>
+          </a:ln>
+        </p:spPr>
+        <p:style>
+          <a:lnRef idx="2">
+            <a:schemeClr val="accent1">
+              <a:shade val="50000"/>
+            </a:schemeClr>
+          </a:lnRef>
+          <a:fillRef idx="1">
+            <a:schemeClr val="accent1"/>
+          </a:fillRef>
+          <a:effectRef idx="0">
+            <a:schemeClr val="accent1"/>
+          </a:effectRef>
+          <a:fontRef idx="minor">
+            <a:schemeClr val="lt1"/>
+          </a:fontRef>
+        </p:style>
+      </p:sp>
+      <p:sp>
+        <p:nvSpPr>
           <p:cNvPr id="2" name="Title 1"/>
           <p:cNvSpPr>
             <a:spLocks noGrp="1"/>
@@ -172,17 +227,27 @@
         </p:nvSpPr>
         <p:spPr>
           <a:xfrm>
-            <a:off x="2417779" y="802298"/>
-            <a:ext cx="8637073" cy="2541431"/>
-          </a:xfrm>
-        </p:spPr>
-        <p:txBody>
-          <a:bodyPr bIns="0" anchor="b">
+            <a:off x="1097280" y="758952"/>
+            <a:ext cx="10058400" cy="3566160"/>
+          </a:xfrm>
+        </p:spPr>
+        <p:txBody>
+          <a:bodyPr anchor="b">
             <a:normAutofit/>
           </a:bodyPr>
           <a:lstStyle>
             <a:lvl1pPr algn="l">
-              <a:defRPr sz="6600"/>
+              <a:lnSpc>
+                <a:spcPct val="85000"/>
+              </a:lnSpc>
+              <a:defRPr sz="8000" spc="-50" baseline="0">
+                <a:solidFill>
+                  <a:schemeClr val="tx1">
+                    <a:lumMod val="85000"/>
+                    <a:lumOff val="15000"/>
+                  </a:schemeClr>
+                </a:solidFill>
+              </a:defRPr>
             </a:lvl1pPr>
           </a:lstStyle>
           <a:p>
@@ -206,54 +271,55 @@
         </p:nvSpPr>
         <p:spPr>
           <a:xfrm>
-            <a:off x="2417780" y="3531204"/>
-            <a:ext cx="8637072" cy="977621"/>
-          </a:xfrm>
-        </p:spPr>
-        <p:txBody>
-          <a:bodyPr tIns="91440" bIns="91440">
+            <a:off x="1100051" y="4455620"/>
+            <a:ext cx="10058400" cy="1143000"/>
+          </a:xfrm>
+        </p:spPr>
+        <p:txBody>
+          <a:bodyPr lIns="91440" rIns="91440">
             <a:normAutofit/>
           </a:bodyPr>
           <a:lstStyle>
             <a:lvl1pPr marL="0" indent="0" algn="l">
               <a:buNone/>
-              <a:defRPr sz="1800" b="0" cap="all" baseline="0">
+              <a:defRPr sz="2400" cap="all" spc="200" baseline="0">
                 <a:solidFill>
-                  <a:schemeClr val="tx1"/>
+                  <a:schemeClr val="tx2"/>
                 </a:solidFill>
+                <a:latin typeface="+mj-lt"/>
               </a:defRPr>
             </a:lvl1pPr>
             <a:lvl2pPr marL="457200" indent="0" algn="ctr">
               <a:buNone/>
-              <a:defRPr sz="1800"/>
+              <a:defRPr sz="2400"/>
             </a:lvl2pPr>
             <a:lvl3pPr marL="914400" indent="0" algn="ctr">
               <a:buNone/>
-              <a:defRPr sz="1800"/>
+              <a:defRPr sz="2400"/>
             </a:lvl3pPr>
             <a:lvl4pPr marL="1371600" indent="0" algn="ctr">
               <a:buNone/>
-              <a:defRPr sz="1600"/>
+              <a:defRPr sz="2000"/>
             </a:lvl4pPr>
             <a:lvl5pPr marL="1828800" indent="0" algn="ctr">
               <a:buNone/>
-              <a:defRPr sz="1600"/>
+              <a:defRPr sz="2000"/>
             </a:lvl5pPr>
             <a:lvl6pPr marL="2286000" indent="0" algn="ctr">
               <a:buNone/>
-              <a:defRPr sz="1600"/>
+              <a:defRPr sz="2000"/>
             </a:lvl6pPr>
             <a:lvl7pPr marL="2743200" indent="0" algn="ctr">
               <a:buNone/>
-              <a:defRPr sz="1600"/>
+              <a:defRPr sz="2000"/>
             </a:lvl7pPr>
             <a:lvl8pPr marL="3200400" indent="0" algn="ctr">
               <a:buNone/>
-              <a:defRPr sz="1600"/>
+              <a:defRPr sz="2000"/>
             </a:lvl8pPr>
             <a:lvl9pPr marL="3657600" indent="0" algn="ctr">
               <a:buNone/>
-              <a:defRPr sz="1600"/>
+              <a:defRPr sz="2000"/>
             </a:lvl9pPr>
           </a:lstStyle>
           <a:p>
@@ -282,7 +348,7 @@
           <a:p>
             <a:fld id="{9934508E-F4F0-45DC-A7F4-4636DDC6725B}" type="datetimeFigureOut">
               <a:rPr lang="id-ID" smtClean="0"/>
-              <a:t>06/07/2026</a:t>
+              <a:t>14/07/2026</a:t>
             </a:fld>
             <a:endParaRPr lang="id-ID"/>
           </a:p>
@@ -298,12 +364,7 @@
             <p:ph type="ftr" sz="quarter" idx="11"/>
           </p:nvPr>
         </p:nvSpPr>
-        <p:spPr>
-          <a:xfrm>
-            <a:off x="2416500" y="329307"/>
-            <a:ext cx="4973915" cy="309201"/>
-          </a:xfrm>
-        </p:spPr>
+        <p:spPr/>
         <p:txBody>
           <a:bodyPr/>
           <a:lstStyle/>
@@ -322,12 +383,7 @@
             <p:ph type="sldNum" sz="quarter" idx="12"/>
           </p:nvPr>
         </p:nvSpPr>
-        <p:spPr>
-          <a:xfrm>
-            <a:off x="1437664" y="798973"/>
-            <a:ext cx="811019" cy="503578"/>
-          </a:xfrm>
-        </p:spPr>
+        <p:spPr/>
         <p:txBody>
           <a:bodyPr/>
           <a:lstStyle/>
@@ -342,28 +398,35 @@
       </p:sp>
       <p:cxnSp>
         <p:nvCxnSpPr>
-          <p:cNvPr id="15" name="Straight Connector 14"/>
+          <p:cNvPr id="9" name="Straight Connector 8"/>
           <p:cNvCxnSpPr/>
           <p:nvPr/>
         </p:nvCxnSpPr>
         <p:spPr>
           <a:xfrm>
-            <a:off x="2417780" y="3528542"/>
-            <a:ext cx="8637072" cy="0"/>
+            <a:off x="1207658" y="4343400"/>
+            <a:ext cx="9875520" cy="0"/>
           </a:xfrm>
           <a:prstGeom prst="line">
             <a:avLst/>
           </a:prstGeom>
-          <a:ln w="31750"/>
+          <a:ln w="6350">
+            <a:solidFill>
+              <a:schemeClr val="tx1">
+                <a:lumMod val="50000"/>
+                <a:lumOff val="50000"/>
+              </a:schemeClr>
+            </a:solidFill>
+          </a:ln>
         </p:spPr>
         <p:style>
-          <a:lnRef idx="3">
+          <a:lnRef idx="1">
             <a:schemeClr val="accent1"/>
           </a:lnRef>
           <a:fillRef idx="0">
             <a:schemeClr val="accent1"/>
           </a:fillRef>
-          <a:effectRef idx="2">
+          <a:effectRef idx="0">
             <a:schemeClr val="accent1"/>
           </a:effectRef>
           <a:fontRef idx="minor">
@@ -374,7 +437,7 @@
     </p:spTree>
     <p:extLst>
       <p:ext uri="{BB962C8B-B14F-4D97-AF65-F5344CB8AC3E}">
-        <p14:creationId xmlns:p14="http://schemas.microsoft.com/office/powerpoint/2010/main" val="472806725"/>
+        <p14:creationId xmlns:p14="http://schemas.microsoft.com/office/powerpoint/2010/main" val="2164131115"/>
       </p:ext>
     </p:extLst>
   </p:cSld>
@@ -436,7 +499,7 @@
         </p:nvSpPr>
         <p:spPr/>
         <p:txBody>
-          <a:bodyPr vert="eaVert"/>
+          <a:bodyPr vert="eaVert" lIns="45720" tIns="0" rIns="45720" bIns="0"/>
           <a:lstStyle/>
           <a:p>
             <a:pPr lvl="0"/>
@@ -493,7 +556,7 @@
           <a:p>
             <a:fld id="{9934508E-F4F0-45DC-A7F4-4636DDC6725B}" type="datetimeFigureOut">
               <a:rPr lang="id-ID" smtClean="0"/>
-              <a:t>06/07/2026</a:t>
+              <a:t>14/07/2026</a:t>
             </a:fld>
             <a:endParaRPr lang="id-ID"/>
           </a:p>
@@ -541,41 +604,10 @@
           </a:p>
         </p:txBody>
       </p:sp>
-      <p:cxnSp>
-        <p:nvCxnSpPr>
-          <p:cNvPr id="26" name="Straight Connector 25"/>
-          <p:cNvCxnSpPr/>
-          <p:nvPr/>
-        </p:nvCxnSpPr>
-        <p:spPr>
-          <a:xfrm>
-            <a:off x="1453896" y="1847088"/>
-            <a:ext cx="9607522" cy="0"/>
-          </a:xfrm>
-          <a:prstGeom prst="line">
-            <a:avLst/>
-          </a:prstGeom>
-          <a:ln w="31750"/>
-        </p:spPr>
-        <p:style>
-          <a:lnRef idx="3">
-            <a:schemeClr val="accent1"/>
-          </a:lnRef>
-          <a:fillRef idx="0">
-            <a:schemeClr val="accent1"/>
-          </a:fillRef>
-          <a:effectRef idx="2">
-            <a:schemeClr val="accent1"/>
-          </a:effectRef>
-          <a:fontRef idx="minor">
-            <a:schemeClr val="tx1"/>
-          </a:fontRef>
-        </p:style>
-      </p:cxnSp>
     </p:spTree>
     <p:extLst>
       <p:ext uri="{BB962C8B-B14F-4D97-AF65-F5344CB8AC3E}">
-        <p14:creationId xmlns:p14="http://schemas.microsoft.com/office/powerpoint/2010/main" val="106523727"/>
+        <p14:creationId xmlns:p14="http://schemas.microsoft.com/office/powerpoint/2010/main" val="1195861300"/>
       </p:ext>
     </p:extLst>
   </p:cSld>
@@ -586,7 +618,7 @@
 </file>
 
 <file path=ppt/slideLayouts/slideLayout11.xml><?xml version="1.0" encoding="utf-8"?>
-<p:sldLayout xmlns:a="http://schemas.openxmlformats.org/drawingml/2006/main" xmlns:r="http://schemas.openxmlformats.org/officeDocument/2006/relationships" xmlns:p="http://schemas.openxmlformats.org/presentationml/2006/main" type="vertTitleAndTx" preserve="1">
+<p:sldLayout xmlns:a="http://schemas.openxmlformats.org/drawingml/2006/main" xmlns:r="http://schemas.openxmlformats.org/officeDocument/2006/relationships" xmlns:p="http://schemas.openxmlformats.org/presentationml/2006/main" showMasterSp="0" type="vertTitleAndTx" preserve="1">
   <p:cSld name="Vertical Title and Text">
     <p:spTree>
       <p:nvGrpSpPr>
@@ -604,6 +636,82 @@
       </p:grpSpPr>
       <p:sp>
         <p:nvSpPr>
+          <p:cNvPr id="7" name="Rectangle 6"/>
+          <p:cNvSpPr/>
+          <p:nvPr/>
+        </p:nvSpPr>
+        <p:spPr>
+          <a:xfrm>
+            <a:off x="3175" y="6400800"/>
+            <a:ext cx="12188825" cy="457200"/>
+          </a:xfrm>
+          <a:prstGeom prst="rect">
+            <a:avLst/>
+          </a:prstGeom>
+          <a:solidFill>
+            <a:schemeClr val="accent2"/>
+          </a:solidFill>
+          <a:ln>
+            <a:noFill/>
+          </a:ln>
+        </p:spPr>
+        <p:style>
+          <a:lnRef idx="2">
+            <a:schemeClr val="accent1">
+              <a:shade val="50000"/>
+            </a:schemeClr>
+          </a:lnRef>
+          <a:fillRef idx="1">
+            <a:schemeClr val="accent1"/>
+          </a:fillRef>
+          <a:effectRef idx="0">
+            <a:schemeClr val="accent1"/>
+          </a:effectRef>
+          <a:fontRef idx="minor">
+            <a:schemeClr val="lt1"/>
+          </a:fontRef>
+        </p:style>
+      </p:sp>
+      <p:sp>
+        <p:nvSpPr>
+          <p:cNvPr id="8" name="Rectangle 7"/>
+          <p:cNvSpPr/>
+          <p:nvPr/>
+        </p:nvSpPr>
+        <p:spPr>
+          <a:xfrm>
+            <a:off x="15" y="6334316"/>
+            <a:ext cx="12188825" cy="64008"/>
+          </a:xfrm>
+          <a:prstGeom prst="rect">
+            <a:avLst/>
+          </a:prstGeom>
+          <a:solidFill>
+            <a:schemeClr val="accent1"/>
+          </a:solidFill>
+          <a:ln>
+            <a:noFill/>
+          </a:ln>
+        </p:spPr>
+        <p:style>
+          <a:lnRef idx="2">
+            <a:schemeClr val="accent1">
+              <a:shade val="50000"/>
+            </a:schemeClr>
+          </a:lnRef>
+          <a:fillRef idx="1">
+            <a:schemeClr val="accent1"/>
+          </a:fillRef>
+          <a:effectRef idx="0">
+            <a:schemeClr val="accent1"/>
+          </a:effectRef>
+          <a:fontRef idx="minor">
+            <a:schemeClr val="lt1"/>
+          </a:fontRef>
+        </p:style>
+      </p:sp>
+      <p:sp>
+        <p:nvSpPr>
           <p:cNvPr id="2" name="Vertical Title 1"/>
           <p:cNvSpPr>
             <a:spLocks noGrp="1"/>
@@ -614,17 +722,13 @@
         </p:nvSpPr>
         <p:spPr>
           <a:xfrm>
-            <a:off x="9439111" y="798973"/>
-            <a:ext cx="1615742" cy="4659889"/>
+            <a:off x="8724900" y="414778"/>
+            <a:ext cx="2628900" cy="5757421"/>
           </a:xfrm>
         </p:spPr>
         <p:txBody>
           <a:bodyPr vert="eaVert"/>
-          <a:lstStyle>
-            <a:lvl1pPr algn="l">
-              <a:defRPr/>
-            </a:lvl1pPr>
-          </a:lstStyle>
+          <a:lstStyle/>
           <a:p>
             <a:r>
               <a:rPr lang="en-US"/>
@@ -646,12 +750,12 @@
         </p:nvSpPr>
         <p:spPr>
           <a:xfrm>
-            <a:off x="1444672" y="798973"/>
-            <a:ext cx="7828830" cy="4659889"/>
-          </a:xfrm>
-        </p:spPr>
-        <p:txBody>
-          <a:bodyPr vert="eaVert"/>
+            <a:off x="838200" y="414778"/>
+            <a:ext cx="7734300" cy="5757422"/>
+          </a:xfrm>
+        </p:spPr>
+        <p:txBody>
+          <a:bodyPr vert="eaVert" lIns="45720" tIns="0" rIns="45720" bIns="0"/>
           <a:lstStyle/>
           <a:p>
             <a:pPr lvl="0"/>
@@ -708,7 +812,7 @@
           <a:p>
             <a:fld id="{9934508E-F4F0-45DC-A7F4-4636DDC6725B}" type="datetimeFigureOut">
               <a:rPr lang="id-ID" smtClean="0"/>
-              <a:t>06/07/2026</a:t>
+              <a:t>14/07/2026</a:t>
             </a:fld>
             <a:endParaRPr lang="id-ID"/>
           </a:p>
@@ -756,41 +860,10 @@
           </a:p>
         </p:txBody>
       </p:sp>
-      <p:cxnSp>
-        <p:nvCxnSpPr>
-          <p:cNvPr id="15" name="Straight Connector 14"/>
-          <p:cNvCxnSpPr/>
-          <p:nvPr/>
-        </p:nvCxnSpPr>
-        <p:spPr>
-          <a:xfrm>
-            <a:off x="9439111" y="798973"/>
-            <a:ext cx="0" cy="4659889"/>
-          </a:xfrm>
-          <a:prstGeom prst="line">
-            <a:avLst/>
-          </a:prstGeom>
-          <a:ln w="31750"/>
-        </p:spPr>
-        <p:style>
-          <a:lnRef idx="3">
-            <a:schemeClr val="accent1"/>
-          </a:lnRef>
-          <a:fillRef idx="0">
-            <a:schemeClr val="accent1"/>
-          </a:fillRef>
-          <a:effectRef idx="2">
-            <a:schemeClr val="accent1"/>
-          </a:effectRef>
-          <a:fontRef idx="minor">
-            <a:schemeClr val="tx1"/>
-          </a:fontRef>
-        </p:style>
-      </p:cxnSp>
     </p:spTree>
     <p:extLst>
       <p:ext uri="{BB962C8B-B14F-4D97-AF65-F5344CB8AC3E}">
-        <p14:creationId xmlns:p14="http://schemas.microsoft.com/office/powerpoint/2010/main" val="2931574717"/>
+        <p14:creationId xmlns:p14="http://schemas.microsoft.com/office/powerpoint/2010/main" val="3266316286"/>
       </p:ext>
     </p:extLst>
   </p:cSld>
@@ -830,7 +903,11 @@
         <p:spPr/>
         <p:txBody>
           <a:bodyPr/>
-          <a:lstStyle/>
+          <a:lstStyle>
+            <a:lvl1pPr marL="0">
+              <a:defRPr/>
+            </a:lvl1pPr>
+          </a:lstStyle>
           <a:p>
             <a:r>
               <a:rPr lang="en-US"/>
@@ -852,7 +929,7 @@
         </p:nvSpPr>
         <p:spPr/>
         <p:txBody>
-          <a:bodyPr anchor="t"/>
+          <a:bodyPr/>
           <a:lstStyle/>
           <a:p>
             <a:pPr lvl="0"/>
@@ -909,7 +986,7 @@
           <a:p>
             <a:fld id="{9934508E-F4F0-45DC-A7F4-4636DDC6725B}" type="datetimeFigureOut">
               <a:rPr lang="id-ID" smtClean="0"/>
-              <a:t>06/07/2026</a:t>
+              <a:t>14/07/2026</a:t>
             </a:fld>
             <a:endParaRPr lang="id-ID"/>
           </a:p>
@@ -957,41 +1034,10 @@
           </a:p>
         </p:txBody>
       </p:sp>
-      <p:cxnSp>
-        <p:nvCxnSpPr>
-          <p:cNvPr id="33" name="Straight Connector 32"/>
-          <p:cNvCxnSpPr/>
-          <p:nvPr/>
-        </p:nvCxnSpPr>
-        <p:spPr>
-          <a:xfrm>
-            <a:off x="1453896" y="1847088"/>
-            <a:ext cx="9607522" cy="0"/>
-          </a:xfrm>
-          <a:prstGeom prst="line">
-            <a:avLst/>
-          </a:prstGeom>
-          <a:ln w="31750"/>
-        </p:spPr>
-        <p:style>
-          <a:lnRef idx="3">
-            <a:schemeClr val="accent1"/>
-          </a:lnRef>
-          <a:fillRef idx="0">
-            <a:schemeClr val="accent1"/>
-          </a:fillRef>
-          <a:effectRef idx="2">
-            <a:schemeClr val="accent1"/>
-          </a:effectRef>
-          <a:fontRef idx="minor">
-            <a:schemeClr val="tx1"/>
-          </a:fontRef>
-        </p:style>
-      </p:cxnSp>
     </p:spTree>
     <p:extLst>
       <p:ext uri="{BB962C8B-B14F-4D97-AF65-F5344CB8AC3E}">
-        <p14:creationId xmlns:p14="http://schemas.microsoft.com/office/powerpoint/2010/main" val="3796788499"/>
+        <p14:creationId xmlns:p14="http://schemas.microsoft.com/office/powerpoint/2010/main" val="632775753"/>
       </p:ext>
     </p:extLst>
   </p:cSld>
@@ -1002,8 +1048,16 @@
 </file>
 
 <file path=ppt/slideLayouts/slideLayout3.xml><?xml version="1.0" encoding="utf-8"?>
-<p:sldLayout xmlns:a="http://schemas.openxmlformats.org/drawingml/2006/main" xmlns:r="http://schemas.openxmlformats.org/officeDocument/2006/relationships" xmlns:p="http://schemas.openxmlformats.org/presentationml/2006/main" type="secHead" preserve="1">
+<p:sldLayout xmlns:a="http://schemas.openxmlformats.org/drawingml/2006/main" xmlns:r="http://schemas.openxmlformats.org/officeDocument/2006/relationships" xmlns:p="http://schemas.openxmlformats.org/presentationml/2006/main" showMasterSp="0" type="secHead" preserve="1">
   <p:cSld name="Section Header">
+    <p:bg>
+      <p:bgPr>
+        <a:solidFill>
+          <a:schemeClr val="bg1"/>
+        </a:solidFill>
+        <a:effectLst/>
+      </p:bgPr>
+    </p:bg>
     <p:spTree>
       <p:nvGrpSpPr>
         <p:cNvPr id="1" name=""/>
@@ -1020,6 +1074,82 @@
       </p:grpSpPr>
       <p:sp>
         <p:nvSpPr>
+          <p:cNvPr id="7" name="Rectangle 6"/>
+          <p:cNvSpPr/>
+          <p:nvPr/>
+        </p:nvSpPr>
+        <p:spPr>
+          <a:xfrm>
+            <a:off x="3175" y="6400800"/>
+            <a:ext cx="12188825" cy="457200"/>
+          </a:xfrm>
+          <a:prstGeom prst="rect">
+            <a:avLst/>
+          </a:prstGeom>
+          <a:solidFill>
+            <a:schemeClr val="accent2"/>
+          </a:solidFill>
+          <a:ln>
+            <a:noFill/>
+          </a:ln>
+        </p:spPr>
+        <p:style>
+          <a:lnRef idx="2">
+            <a:schemeClr val="accent1">
+              <a:shade val="50000"/>
+            </a:schemeClr>
+          </a:lnRef>
+          <a:fillRef idx="1">
+            <a:schemeClr val="accent1"/>
+          </a:fillRef>
+          <a:effectRef idx="0">
+            <a:schemeClr val="accent1"/>
+          </a:effectRef>
+          <a:fontRef idx="minor">
+            <a:schemeClr val="lt1"/>
+          </a:fontRef>
+        </p:style>
+      </p:sp>
+      <p:sp>
+        <p:nvSpPr>
+          <p:cNvPr id="8" name="Rectangle 7"/>
+          <p:cNvSpPr/>
+          <p:nvPr/>
+        </p:nvSpPr>
+        <p:spPr>
+          <a:xfrm>
+            <a:off x="15" y="6334316"/>
+            <a:ext cx="12188825" cy="64008"/>
+          </a:xfrm>
+          <a:prstGeom prst="rect">
+            <a:avLst/>
+          </a:prstGeom>
+          <a:solidFill>
+            <a:schemeClr val="accent1"/>
+          </a:solidFill>
+          <a:ln>
+            <a:noFill/>
+          </a:ln>
+        </p:spPr>
+        <p:style>
+          <a:lnRef idx="2">
+            <a:schemeClr val="accent1">
+              <a:shade val="50000"/>
+            </a:schemeClr>
+          </a:lnRef>
+          <a:fillRef idx="1">
+            <a:schemeClr val="accent1"/>
+          </a:fillRef>
+          <a:effectRef idx="0">
+            <a:schemeClr val="accent1"/>
+          </a:effectRef>
+          <a:fontRef idx="minor">
+            <a:schemeClr val="lt1"/>
+          </a:fontRef>
+        </p:style>
+      </p:sp>
+      <p:sp>
+        <p:nvSpPr>
           <p:cNvPr id="2" name="Title 1"/>
           <p:cNvSpPr>
             <a:spLocks noGrp="1"/>
@@ -1030,17 +1160,27 @@
         </p:nvSpPr>
         <p:spPr>
           <a:xfrm>
-            <a:off x="1454239" y="1756130"/>
-            <a:ext cx="8643154" cy="1887950"/>
-          </a:xfrm>
-        </p:spPr>
-        <p:txBody>
-          <a:bodyPr anchor="b">
+            <a:off x="1097280" y="758952"/>
+            <a:ext cx="10058400" cy="3566160"/>
+          </a:xfrm>
+        </p:spPr>
+        <p:txBody>
+          <a:bodyPr anchor="b" anchorCtr="0">
             <a:normAutofit/>
           </a:bodyPr>
           <a:lstStyle>
-            <a:lvl1pPr algn="l">
-              <a:defRPr sz="3600"/>
+            <a:lvl1pPr>
+              <a:lnSpc>
+                <a:spcPct val="85000"/>
+              </a:lnSpc>
+              <a:defRPr sz="8000" b="0">
+                <a:solidFill>
+                  <a:schemeClr val="tx1">
+                    <a:lumMod val="85000"/>
+                    <a:lumOff val="15000"/>
+                  </a:schemeClr>
+                </a:solidFill>
+              </a:defRPr>
             </a:lvl1pPr>
           </a:lstStyle>
           <a:p>
@@ -1064,21 +1204,22 @@
         </p:nvSpPr>
         <p:spPr>
           <a:xfrm>
-            <a:off x="1454239" y="3806195"/>
-            <a:ext cx="8630446" cy="1012929"/>
-          </a:xfrm>
-        </p:spPr>
-        <p:txBody>
-          <a:bodyPr tIns="91440">
+            <a:off x="1097280" y="4453128"/>
+            <a:ext cx="10058400" cy="1143000"/>
+          </a:xfrm>
+        </p:spPr>
+        <p:txBody>
+          <a:bodyPr lIns="91440" rIns="91440" anchor="t" anchorCtr="0">
             <a:normAutofit/>
           </a:bodyPr>
           <a:lstStyle>
-            <a:lvl1pPr marL="0" indent="0" algn="l">
-              <a:buNone/>
-              <a:defRPr sz="1800">
+            <a:lvl1pPr marL="0" indent="0">
+              <a:buNone/>
+              <a:defRPr sz="2400" cap="all" spc="200" baseline="0">
                 <a:solidFill>
-                  <a:schemeClr val="tx1"/>
+                  <a:schemeClr val="tx2"/>
                 </a:solidFill>
+                <a:latin typeface="+mj-lt"/>
               </a:defRPr>
             </a:lvl1pPr>
             <a:lvl2pPr marL="457200" indent="0">
@@ -1093,7 +1234,7 @@
             </a:lvl2pPr>
             <a:lvl3pPr marL="914400" indent="0">
               <a:buNone/>
-              <a:defRPr sz="1800">
+              <a:defRPr sz="1600">
                 <a:solidFill>
                   <a:schemeClr val="tx1">
                     <a:tint val="75000"/>
@@ -1103,7 +1244,7 @@
             </a:lvl3pPr>
             <a:lvl4pPr marL="1371600" indent="0">
               <a:buNone/>
-              <a:defRPr sz="1600">
+              <a:defRPr sz="1400">
                 <a:solidFill>
                   <a:schemeClr val="tx1">
                     <a:tint val="75000"/>
@@ -1113,7 +1254,7 @@
             </a:lvl4pPr>
             <a:lvl5pPr marL="1828800" indent="0">
               <a:buNone/>
-              <a:defRPr sz="1600">
+              <a:defRPr sz="1400">
                 <a:solidFill>
                   <a:schemeClr val="tx1">
                     <a:tint val="75000"/>
@@ -1123,7 +1264,7 @@
             </a:lvl5pPr>
             <a:lvl6pPr marL="2286000" indent="0">
               <a:buNone/>
-              <a:defRPr sz="1600">
+              <a:defRPr sz="1400">
                 <a:solidFill>
                   <a:schemeClr val="tx1">
                     <a:tint val="75000"/>
@@ -1133,7 +1274,7 @@
             </a:lvl6pPr>
             <a:lvl7pPr marL="2743200" indent="0">
               <a:buNone/>
-              <a:defRPr sz="1600">
+              <a:defRPr sz="1400">
                 <a:solidFill>
                   <a:schemeClr val="tx1">
                     <a:tint val="75000"/>
@@ -1143,7 +1284,7 @@
             </a:lvl7pPr>
             <a:lvl8pPr marL="3200400" indent="0">
               <a:buNone/>
-              <a:defRPr sz="1600">
+              <a:defRPr sz="1400">
                 <a:solidFill>
                   <a:schemeClr val="tx1">
                     <a:tint val="75000"/>
@@ -1153,7 +1294,7 @@
             </a:lvl8pPr>
             <a:lvl9pPr marL="3657600" indent="0">
               <a:buNone/>
-              <a:defRPr sz="1600">
+              <a:defRPr sz="1400">
                 <a:solidFill>
                   <a:schemeClr val="tx1">
                     <a:tint val="75000"/>
@@ -1188,7 +1329,7 @@
           <a:p>
             <a:fld id="{9934508E-F4F0-45DC-A7F4-4636DDC6725B}" type="datetimeFigureOut">
               <a:rPr lang="id-ID" smtClean="0"/>
-              <a:t>06/07/2026</a:t>
+              <a:t>14/07/2026</a:t>
             </a:fld>
             <a:endParaRPr lang="id-ID"/>
           </a:p>
@@ -1238,28 +1379,35 @@
       </p:sp>
       <p:cxnSp>
         <p:nvCxnSpPr>
-          <p:cNvPr id="15" name="Straight Connector 14"/>
+          <p:cNvPr id="9" name="Straight Connector 8"/>
           <p:cNvCxnSpPr/>
           <p:nvPr/>
         </p:nvCxnSpPr>
         <p:spPr>
           <a:xfrm>
-            <a:off x="1454239" y="3804985"/>
-            <a:ext cx="8630446" cy="0"/>
+            <a:off x="1207658" y="4343400"/>
+            <a:ext cx="9875520" cy="0"/>
           </a:xfrm>
           <a:prstGeom prst="line">
             <a:avLst/>
           </a:prstGeom>
-          <a:ln w="31750"/>
+          <a:ln w="6350">
+            <a:solidFill>
+              <a:schemeClr val="tx1">
+                <a:lumMod val="50000"/>
+                <a:lumOff val="50000"/>
+              </a:schemeClr>
+            </a:solidFill>
+          </a:ln>
         </p:spPr>
         <p:style>
-          <a:lnRef idx="3">
+          <a:lnRef idx="1">
             <a:schemeClr val="accent1"/>
           </a:lnRef>
           <a:fillRef idx="0">
             <a:schemeClr val="accent1"/>
           </a:fillRef>
-          <a:effectRef idx="2">
+          <a:effectRef idx="0">
             <a:schemeClr val="accent1"/>
           </a:effectRef>
           <a:fontRef idx="minor">
@@ -1270,7 +1418,7 @@
     </p:spTree>
     <p:extLst>
       <p:ext uri="{BB962C8B-B14F-4D97-AF65-F5344CB8AC3E}">
-        <p14:creationId xmlns:p14="http://schemas.microsoft.com/office/powerpoint/2010/main" val="2804697418"/>
+        <p14:creationId xmlns:p14="http://schemas.microsoft.com/office/powerpoint/2010/main" val="2526482797"/>
       </p:ext>
     </p:extLst>
   </p:cSld>
@@ -1299,7 +1447,7 @@
       </p:grpSpPr>
       <p:sp>
         <p:nvSpPr>
-          <p:cNvPr id="2" name="Title 1"/>
+          <p:cNvPr id="8" name="Title 7"/>
           <p:cNvSpPr>
             <a:spLocks noGrp="1"/>
           </p:cNvSpPr>
@@ -1309,8 +1457,8 @@
         </p:nvSpPr>
         <p:spPr>
           <a:xfrm>
-            <a:off x="1449217" y="804889"/>
-            <a:ext cx="9605635" cy="1059305"/>
+            <a:off x="1097280" y="286603"/>
+            <a:ext cx="10058400" cy="1450757"/>
           </a:xfrm>
         </p:spPr>
         <p:txBody>
@@ -1337,8 +1485,8 @@
         </p:nvSpPr>
         <p:spPr>
           <a:xfrm>
-            <a:off x="1447331" y="2010878"/>
-            <a:ext cx="4645152" cy="3448595"/>
+            <a:off x="1097279" y="1845734"/>
+            <a:ext cx="4937760" cy="4023360"/>
           </a:xfrm>
         </p:spPr>
         <p:txBody>
@@ -1394,8 +1542,8 @@
         </p:nvSpPr>
         <p:spPr>
           <a:xfrm>
-            <a:off x="6413771" y="2017343"/>
-            <a:ext cx="4645152" cy="3441520"/>
+            <a:off x="6217920" y="1845735"/>
+            <a:ext cx="4937760" cy="4023360"/>
           </a:xfrm>
         </p:spPr>
         <p:txBody>
@@ -1456,7 +1604,7 @@
           <a:p>
             <a:fld id="{9934508E-F4F0-45DC-A7F4-4636DDC6725B}" type="datetimeFigureOut">
               <a:rPr lang="id-ID" smtClean="0"/>
-              <a:t>06/07/2026</a:t>
+              <a:t>14/07/2026</a:t>
             </a:fld>
             <a:endParaRPr lang="id-ID"/>
           </a:p>
@@ -1504,41 +1652,10 @@
           </a:p>
         </p:txBody>
       </p:sp>
-      <p:cxnSp>
-        <p:nvCxnSpPr>
-          <p:cNvPr id="35" name="Straight Connector 34"/>
-          <p:cNvCxnSpPr/>
-          <p:nvPr/>
-        </p:nvCxnSpPr>
-        <p:spPr>
-          <a:xfrm>
-            <a:off x="1453896" y="1847088"/>
-            <a:ext cx="9607522" cy="0"/>
-          </a:xfrm>
-          <a:prstGeom prst="line">
-            <a:avLst/>
-          </a:prstGeom>
-          <a:ln w="31750"/>
-        </p:spPr>
-        <p:style>
-          <a:lnRef idx="3">
-            <a:schemeClr val="accent1"/>
-          </a:lnRef>
-          <a:fillRef idx="0">
-            <a:schemeClr val="accent1"/>
-          </a:fillRef>
-          <a:effectRef idx="2">
-            <a:schemeClr val="accent1"/>
-          </a:effectRef>
-          <a:fontRef idx="minor">
-            <a:schemeClr val="tx1"/>
-          </a:fontRef>
-        </p:style>
-      </p:cxnSp>
     </p:spTree>
     <p:extLst>
       <p:ext uri="{BB962C8B-B14F-4D97-AF65-F5344CB8AC3E}">
-        <p14:creationId xmlns:p14="http://schemas.microsoft.com/office/powerpoint/2010/main" val="919394746"/>
+        <p14:creationId xmlns:p14="http://schemas.microsoft.com/office/powerpoint/2010/main" val="100493923"/>
       </p:ext>
     </p:extLst>
   </p:cSld>
@@ -1567,7 +1684,7 @@
       </p:grpSpPr>
       <p:sp>
         <p:nvSpPr>
-          <p:cNvPr id="2" name="Title 1"/>
+          <p:cNvPr id="10" name="Title 9"/>
           <p:cNvSpPr>
             <a:spLocks noGrp="1"/>
           </p:cNvSpPr>
@@ -1577,8 +1694,8 @@
         </p:nvSpPr>
         <p:spPr>
           <a:xfrm>
-            <a:off x="1447191" y="804163"/>
-            <a:ext cx="9607661" cy="1056319"/>
+            <a:off x="1097280" y="286603"/>
+            <a:ext cx="10058400" cy="1450757"/>
           </a:xfrm>
         </p:spPr>
         <p:txBody>
@@ -1605,23 +1722,20 @@
         </p:nvSpPr>
         <p:spPr>
           <a:xfrm>
-            <a:off x="1447191" y="2019549"/>
-            <a:ext cx="4645152" cy="801943"/>
-          </a:xfrm>
-        </p:spPr>
-        <p:txBody>
-          <a:bodyPr anchor="b">
+            <a:off x="1097280" y="1846052"/>
+            <a:ext cx="4937760" cy="736282"/>
+          </a:xfrm>
+        </p:spPr>
+        <p:txBody>
+          <a:bodyPr lIns="91440" rIns="91440" anchor="ctr">
             <a:normAutofit/>
           </a:bodyPr>
           <a:lstStyle>
             <a:lvl1pPr marL="0" indent="0">
-              <a:lnSpc>
-                <a:spcPct val="100000"/>
-              </a:lnSpc>
-              <a:buNone/>
-              <a:defRPr sz="2200" b="0" cap="all" baseline="0">
+              <a:buNone/>
+              <a:defRPr sz="2000" b="0" cap="all" baseline="0">
                 <a:solidFill>
-                  <a:schemeClr val="accent1"/>
+                  <a:schemeClr val="tx2"/>
                 </a:solidFill>
               </a:defRPr>
             </a:lvl1pPr>
@@ -1679,8 +1793,8 @@
         </p:nvSpPr>
         <p:spPr>
           <a:xfrm>
-            <a:off x="1447191" y="2824269"/>
-            <a:ext cx="4645152" cy="2644457"/>
+            <a:off x="1097280" y="2582334"/>
+            <a:ext cx="4937760" cy="3378200"/>
           </a:xfrm>
         </p:spPr>
         <p:txBody>
@@ -1736,23 +1850,20 @@
         </p:nvSpPr>
         <p:spPr>
           <a:xfrm>
-            <a:off x="6412362" y="2023003"/>
-            <a:ext cx="4645152" cy="802237"/>
-          </a:xfrm>
-        </p:spPr>
-        <p:txBody>
-          <a:bodyPr anchor="b">
+            <a:off x="6217920" y="1846052"/>
+            <a:ext cx="4937760" cy="736282"/>
+          </a:xfrm>
+        </p:spPr>
+        <p:txBody>
+          <a:bodyPr lIns="91440" rIns="91440" anchor="ctr">
             <a:normAutofit/>
           </a:bodyPr>
           <a:lstStyle>
             <a:lvl1pPr marL="0" indent="0">
-              <a:lnSpc>
-                <a:spcPct val="100000"/>
-              </a:lnSpc>
-              <a:buNone/>
-              <a:defRPr sz="2200" b="0" cap="all" baseline="0">
+              <a:buNone/>
+              <a:defRPr sz="2000" b="0" cap="all" baseline="0">
                 <a:solidFill>
-                  <a:schemeClr val="accent1"/>
+                  <a:schemeClr val="tx2"/>
                 </a:solidFill>
               </a:defRPr>
             </a:lvl1pPr>
@@ -1810,8 +1921,8 @@
         </p:nvSpPr>
         <p:spPr>
           <a:xfrm>
-            <a:off x="6412362" y="2821491"/>
-            <a:ext cx="4645152" cy="2637371"/>
+            <a:off x="6217920" y="2582334"/>
+            <a:ext cx="4937760" cy="3378200"/>
           </a:xfrm>
         </p:spPr>
         <p:txBody>
@@ -1872,7 +1983,7 @@
           <a:p>
             <a:fld id="{9934508E-F4F0-45DC-A7F4-4636DDC6725B}" type="datetimeFigureOut">
               <a:rPr lang="id-ID" smtClean="0"/>
-              <a:t>06/07/2026</a:t>
+              <a:t>14/07/2026</a:t>
             </a:fld>
             <a:endParaRPr lang="id-ID"/>
           </a:p>
@@ -1920,41 +2031,10 @@
           </a:p>
         </p:txBody>
       </p:sp>
-      <p:cxnSp>
-        <p:nvCxnSpPr>
-          <p:cNvPr id="29" name="Straight Connector 28"/>
-          <p:cNvCxnSpPr/>
-          <p:nvPr/>
-        </p:nvCxnSpPr>
-        <p:spPr>
-          <a:xfrm>
-            <a:off x="1453896" y="1847088"/>
-            <a:ext cx="9607522" cy="0"/>
-          </a:xfrm>
-          <a:prstGeom prst="line">
-            <a:avLst/>
-          </a:prstGeom>
-          <a:ln w="31750"/>
-        </p:spPr>
-        <p:style>
-          <a:lnRef idx="3">
-            <a:schemeClr val="accent1"/>
-          </a:lnRef>
-          <a:fillRef idx="0">
-            <a:schemeClr val="accent1"/>
-          </a:fillRef>
-          <a:effectRef idx="2">
-            <a:schemeClr val="accent1"/>
-          </a:effectRef>
-          <a:fontRef idx="minor">
-            <a:schemeClr val="tx1"/>
-          </a:fontRef>
-        </p:style>
-      </p:cxnSp>
     </p:spTree>
     <p:extLst>
       <p:ext uri="{BB962C8B-B14F-4D97-AF65-F5344CB8AC3E}">
-        <p14:creationId xmlns:p14="http://schemas.microsoft.com/office/powerpoint/2010/main" val="2890434433"/>
+        <p14:creationId xmlns:p14="http://schemas.microsoft.com/office/powerpoint/2010/main" val="382104533"/>
       </p:ext>
     </p:extLst>
   </p:cSld>
@@ -2021,7 +2101,7 @@
           <a:p>
             <a:fld id="{9934508E-F4F0-45DC-A7F4-4636DDC6725B}" type="datetimeFigureOut">
               <a:rPr lang="id-ID" smtClean="0"/>
-              <a:t>06/07/2026</a:t>
+              <a:t>14/07/2026</a:t>
             </a:fld>
             <a:endParaRPr lang="id-ID"/>
           </a:p>
@@ -2069,41 +2149,10 @@
           </a:p>
         </p:txBody>
       </p:sp>
-      <p:cxnSp>
-        <p:nvCxnSpPr>
-          <p:cNvPr id="25" name="Straight Connector 24"/>
-          <p:cNvCxnSpPr/>
-          <p:nvPr/>
-        </p:nvCxnSpPr>
-        <p:spPr>
-          <a:xfrm>
-            <a:off x="1453896" y="1847088"/>
-            <a:ext cx="9607522" cy="0"/>
-          </a:xfrm>
-          <a:prstGeom prst="line">
-            <a:avLst/>
-          </a:prstGeom>
-          <a:ln w="31750"/>
-        </p:spPr>
-        <p:style>
-          <a:lnRef idx="3">
-            <a:schemeClr val="accent1"/>
-          </a:lnRef>
-          <a:fillRef idx="0">
-            <a:schemeClr val="accent1"/>
-          </a:fillRef>
-          <a:effectRef idx="2">
-            <a:schemeClr val="accent1"/>
-          </a:effectRef>
-          <a:fontRef idx="minor">
-            <a:schemeClr val="tx1"/>
-          </a:fontRef>
-        </p:style>
-      </p:cxnSp>
     </p:spTree>
     <p:extLst>
       <p:ext uri="{BB962C8B-B14F-4D97-AF65-F5344CB8AC3E}">
-        <p14:creationId xmlns:p14="http://schemas.microsoft.com/office/powerpoint/2010/main" val="72736417"/>
+        <p14:creationId xmlns:p14="http://schemas.microsoft.com/office/powerpoint/2010/main" val="636443141"/>
       </p:ext>
     </p:extLst>
   </p:cSld>
@@ -2114,7 +2163,7 @@
 </file>
 
 <file path=ppt/slideLayouts/slideLayout7.xml><?xml version="1.0" encoding="utf-8"?>
-<p:sldLayout xmlns:a="http://schemas.openxmlformats.org/drawingml/2006/main" xmlns:r="http://schemas.openxmlformats.org/officeDocument/2006/relationships" xmlns:p="http://schemas.openxmlformats.org/presentationml/2006/main" type="blank" preserve="1">
+<p:sldLayout xmlns:a="http://schemas.openxmlformats.org/drawingml/2006/main" xmlns:r="http://schemas.openxmlformats.org/officeDocument/2006/relationships" xmlns:p="http://schemas.openxmlformats.org/presentationml/2006/main" showMasterSp="0" type="blank" preserve="1">
   <p:cSld name="Blank">
     <p:spTree>
       <p:nvGrpSpPr>
@@ -2132,7 +2181,83 @@
       </p:grpSpPr>
       <p:sp>
         <p:nvSpPr>
-          <p:cNvPr id="2" name="Date Placeholder 1"/>
+          <p:cNvPr id="5" name="Rectangle 4"/>
+          <p:cNvSpPr/>
+          <p:nvPr/>
+        </p:nvSpPr>
+        <p:spPr>
+          <a:xfrm>
+            <a:off x="3175" y="6400800"/>
+            <a:ext cx="12188825" cy="457200"/>
+          </a:xfrm>
+          <a:prstGeom prst="rect">
+            <a:avLst/>
+          </a:prstGeom>
+          <a:solidFill>
+            <a:schemeClr val="accent2"/>
+          </a:solidFill>
+          <a:ln>
+            <a:noFill/>
+          </a:ln>
+        </p:spPr>
+        <p:style>
+          <a:lnRef idx="2">
+            <a:schemeClr val="accent1">
+              <a:shade val="50000"/>
+            </a:schemeClr>
+          </a:lnRef>
+          <a:fillRef idx="1">
+            <a:schemeClr val="accent1"/>
+          </a:fillRef>
+          <a:effectRef idx="0">
+            <a:schemeClr val="accent1"/>
+          </a:effectRef>
+          <a:fontRef idx="minor">
+            <a:schemeClr val="lt1"/>
+          </a:fontRef>
+        </p:style>
+      </p:sp>
+      <p:sp>
+        <p:nvSpPr>
+          <p:cNvPr id="6" name="Rectangle 5"/>
+          <p:cNvSpPr/>
+          <p:nvPr/>
+        </p:nvSpPr>
+        <p:spPr>
+          <a:xfrm>
+            <a:off x="15" y="6334316"/>
+            <a:ext cx="12188825" cy="64008"/>
+          </a:xfrm>
+          <a:prstGeom prst="rect">
+            <a:avLst/>
+          </a:prstGeom>
+          <a:solidFill>
+            <a:schemeClr val="accent1"/>
+          </a:solidFill>
+          <a:ln>
+            <a:noFill/>
+          </a:ln>
+        </p:spPr>
+        <p:style>
+          <a:lnRef idx="2">
+            <a:schemeClr val="accent1">
+              <a:shade val="50000"/>
+            </a:schemeClr>
+          </a:lnRef>
+          <a:fillRef idx="1">
+            <a:schemeClr val="accent1"/>
+          </a:fillRef>
+          <a:effectRef idx="0">
+            <a:schemeClr val="accent1"/>
+          </a:effectRef>
+          <a:fontRef idx="minor">
+            <a:schemeClr val="lt1"/>
+          </a:fontRef>
+        </p:style>
+      </p:sp>
+      <p:sp>
+        <p:nvSpPr>
+          <p:cNvPr id="7" name="Date Placeholder 6"/>
           <p:cNvSpPr>
             <a:spLocks noGrp="1"/>
           </p:cNvSpPr>
@@ -2147,7 +2272,7 @@
           <a:p>
             <a:fld id="{9934508E-F4F0-45DC-A7F4-4636DDC6725B}" type="datetimeFigureOut">
               <a:rPr lang="id-ID" smtClean="0"/>
-              <a:t>06/07/2026</a:t>
+              <a:t>14/07/2026</a:t>
             </a:fld>
             <a:endParaRPr lang="id-ID"/>
           </a:p>
@@ -2155,7 +2280,7 @@
       </p:sp>
       <p:sp>
         <p:nvSpPr>
-          <p:cNvPr id="3" name="Footer Placeholder 2"/>
+          <p:cNvPr id="8" name="Footer Placeholder 7"/>
           <p:cNvSpPr>
             <a:spLocks noGrp="1"/>
           </p:cNvSpPr>
@@ -2166,7 +2291,15 @@
         <p:spPr/>
         <p:txBody>
           <a:bodyPr/>
-          <a:lstStyle/>
+          <a:lstStyle>
+            <a:lvl1pPr>
+              <a:defRPr>
+                <a:solidFill>
+                  <a:srgbClr val="FFFFFF"/>
+                </a:solidFill>
+              </a:defRPr>
+            </a:lvl1pPr>
+          </a:lstStyle>
           <a:p>
             <a:endParaRPr lang="id-ID"/>
           </a:p>
@@ -2174,7 +2307,7 @@
       </p:sp>
       <p:sp>
         <p:nvSpPr>
-          <p:cNvPr id="4" name="Slide Number Placeholder 3"/>
+          <p:cNvPr id="9" name="Slide Number Placeholder 8"/>
           <p:cNvSpPr>
             <a:spLocks noGrp="1"/>
           </p:cNvSpPr>
@@ -2198,7 +2331,7 @@
     </p:spTree>
     <p:extLst>
       <p:ext uri="{BB962C8B-B14F-4D97-AF65-F5344CB8AC3E}">
-        <p14:creationId xmlns:p14="http://schemas.microsoft.com/office/powerpoint/2010/main" val="246532448"/>
+        <p14:creationId xmlns:p14="http://schemas.microsoft.com/office/powerpoint/2010/main" val="2844643226"/>
       </p:ext>
     </p:extLst>
   </p:cSld>
@@ -2209,7 +2342,7 @@
 </file>
 
 <file path=ppt/slideLayouts/slideLayout8.xml><?xml version="1.0" encoding="utf-8"?>
-<p:sldLayout xmlns:a="http://schemas.openxmlformats.org/drawingml/2006/main" xmlns:r="http://schemas.openxmlformats.org/officeDocument/2006/relationships" xmlns:p="http://schemas.openxmlformats.org/presentationml/2006/main" type="objTx" preserve="1">
+<p:sldLayout xmlns:a="http://schemas.openxmlformats.org/drawingml/2006/main" xmlns:r="http://schemas.openxmlformats.org/officeDocument/2006/relationships" xmlns:p="http://schemas.openxmlformats.org/presentationml/2006/main" showMasterSp="0" type="objTx" preserve="1">
   <p:cSld name="Content with Caption">
     <p:spTree>
       <p:nvGrpSpPr>
@@ -2227,6 +2360,82 @@
       </p:grpSpPr>
       <p:sp>
         <p:nvSpPr>
+          <p:cNvPr id="8" name="Rectangle 7"/>
+          <p:cNvSpPr/>
+          <p:nvPr/>
+        </p:nvSpPr>
+        <p:spPr>
+          <a:xfrm>
+            <a:off x="16" y="0"/>
+            <a:ext cx="4050791" cy="6858000"/>
+          </a:xfrm>
+          <a:prstGeom prst="rect">
+            <a:avLst/>
+          </a:prstGeom>
+          <a:solidFill>
+            <a:schemeClr val="accent2"/>
+          </a:solidFill>
+          <a:ln>
+            <a:noFill/>
+          </a:ln>
+        </p:spPr>
+        <p:style>
+          <a:lnRef idx="2">
+            <a:schemeClr val="accent1">
+              <a:shade val="50000"/>
+            </a:schemeClr>
+          </a:lnRef>
+          <a:fillRef idx="1">
+            <a:schemeClr val="accent1"/>
+          </a:fillRef>
+          <a:effectRef idx="0">
+            <a:schemeClr val="accent1"/>
+          </a:effectRef>
+          <a:fontRef idx="minor">
+            <a:schemeClr val="lt1"/>
+          </a:fontRef>
+        </p:style>
+      </p:sp>
+      <p:sp>
+        <p:nvSpPr>
+          <p:cNvPr id="9" name="Rectangle 8"/>
+          <p:cNvSpPr/>
+          <p:nvPr/>
+        </p:nvSpPr>
+        <p:spPr>
+          <a:xfrm>
+            <a:off x="4040071" y="0"/>
+            <a:ext cx="64008" cy="6858000"/>
+          </a:xfrm>
+          <a:prstGeom prst="rect">
+            <a:avLst/>
+          </a:prstGeom>
+          <a:solidFill>
+            <a:schemeClr val="accent1"/>
+          </a:solidFill>
+          <a:ln>
+            <a:noFill/>
+          </a:ln>
+        </p:spPr>
+        <p:style>
+          <a:lnRef idx="2">
+            <a:schemeClr val="accent1">
+              <a:shade val="50000"/>
+            </a:schemeClr>
+          </a:lnRef>
+          <a:fillRef idx="1">
+            <a:schemeClr val="accent1"/>
+          </a:fillRef>
+          <a:effectRef idx="0">
+            <a:schemeClr val="accent1"/>
+          </a:effectRef>
+          <a:fontRef idx="minor">
+            <a:schemeClr val="lt1"/>
+          </a:fontRef>
+        </p:style>
+      </p:sp>
+      <p:sp>
+        <p:nvSpPr>
           <p:cNvPr id="2" name="Title 1"/>
           <p:cNvSpPr>
             <a:spLocks noGrp="1"/>
@@ -2237,8 +2446,8 @@
         </p:nvSpPr>
         <p:spPr>
           <a:xfrm>
-            <a:off x="1444671" y="798973"/>
-            <a:ext cx="3273099" cy="2247117"/>
+            <a:off x="457200" y="594359"/>
+            <a:ext cx="3200400" cy="2286000"/>
           </a:xfrm>
         </p:spPr>
         <p:txBody>
@@ -2246,8 +2455,12 @@
             <a:normAutofit/>
           </a:bodyPr>
           <a:lstStyle>
-            <a:lvl1pPr algn="l">
-              <a:defRPr sz="2400"/>
+            <a:lvl1pPr>
+              <a:defRPr sz="3600" b="0">
+                <a:solidFill>
+                  <a:srgbClr val="FFFFFF"/>
+                </a:solidFill>
+              </a:defRPr>
             </a:lvl1pPr>
           </a:lstStyle>
           <a:p>
@@ -2271,12 +2484,12 @@
         </p:nvSpPr>
         <p:spPr>
           <a:xfrm>
-            <a:off x="5043714" y="798974"/>
-            <a:ext cx="6012470" cy="4658826"/>
-          </a:xfrm>
-        </p:spPr>
-        <p:txBody>
-          <a:bodyPr anchor="ctr"/>
+            <a:off x="4800600" y="731520"/>
+            <a:ext cx="6492240" cy="5257800"/>
+          </a:xfrm>
+        </p:spPr>
+        <p:txBody>
+          <a:bodyPr/>
           <a:lstStyle/>
           <a:p>
             <a:pPr lvl="0"/>
@@ -2328,77 +2541,92 @@
         </p:nvSpPr>
         <p:spPr>
           <a:xfrm>
-            <a:off x="1444671" y="3205491"/>
-            <a:ext cx="3275013" cy="2248181"/>
+            <a:off x="457200" y="2926080"/>
+            <a:ext cx="3200400" cy="3379124"/>
+          </a:xfrm>
+        </p:spPr>
+        <p:txBody>
+          <a:bodyPr lIns="91440" rIns="91440">
+            <a:normAutofit/>
+          </a:bodyPr>
+          <a:lstStyle>
+            <a:lvl1pPr marL="0" indent="0">
+              <a:buNone/>
+              <a:defRPr sz="1500">
+                <a:solidFill>
+                  <a:srgbClr val="FFFFFF"/>
+                </a:solidFill>
+              </a:defRPr>
+            </a:lvl1pPr>
+            <a:lvl2pPr marL="457200" indent="0">
+              <a:buNone/>
+              <a:defRPr sz="1200"/>
+            </a:lvl2pPr>
+            <a:lvl3pPr marL="914400" indent="0">
+              <a:buNone/>
+              <a:defRPr sz="1000"/>
+            </a:lvl3pPr>
+            <a:lvl4pPr marL="1371600" indent="0">
+              <a:buNone/>
+              <a:defRPr sz="900"/>
+            </a:lvl4pPr>
+            <a:lvl5pPr marL="1828800" indent="0">
+              <a:buNone/>
+              <a:defRPr sz="900"/>
+            </a:lvl5pPr>
+            <a:lvl6pPr marL="2286000" indent="0">
+              <a:buNone/>
+              <a:defRPr sz="900"/>
+            </a:lvl6pPr>
+            <a:lvl7pPr marL="2743200" indent="0">
+              <a:buNone/>
+              <a:defRPr sz="900"/>
+            </a:lvl7pPr>
+            <a:lvl8pPr marL="3200400" indent="0">
+              <a:buNone/>
+              <a:defRPr sz="900"/>
+            </a:lvl8pPr>
+            <a:lvl9pPr marL="3657600" indent="0">
+              <a:buNone/>
+              <a:defRPr sz="900"/>
+            </a:lvl9pPr>
+          </a:lstStyle>
+          <a:p>
+            <a:pPr lvl="0"/>
+            <a:r>
+              <a:rPr lang="en-US"/>
+              <a:t>Click to edit Master text styles</a:t>
+            </a:r>
+          </a:p>
+        </p:txBody>
+      </p:sp>
+      <p:sp>
+        <p:nvSpPr>
+          <p:cNvPr id="5" name="Date Placeholder 4"/>
+          <p:cNvSpPr>
+            <a:spLocks noGrp="1"/>
+          </p:cNvSpPr>
+          <p:nvPr>
+            <p:ph type="dt" sz="half" idx="10"/>
+          </p:nvPr>
+        </p:nvSpPr>
+        <p:spPr>
+          <a:xfrm>
+            <a:off x="465512" y="6459785"/>
+            <a:ext cx="2618510" cy="365125"/>
           </a:xfrm>
         </p:spPr>
         <p:txBody>
           <a:bodyPr/>
           <a:lstStyle>
-            <a:lvl1pPr marL="0" indent="0" algn="l">
-              <a:buNone/>
-              <a:defRPr sz="1600"/>
+            <a:lvl1pPr algn="l">
+              <a:defRPr/>
             </a:lvl1pPr>
-            <a:lvl2pPr marL="457200" indent="0">
-              <a:buNone/>
-              <a:defRPr sz="1400"/>
-            </a:lvl2pPr>
-            <a:lvl3pPr marL="914400" indent="0">
-              <a:buNone/>
-              <a:defRPr sz="1200"/>
-            </a:lvl3pPr>
-            <a:lvl4pPr marL="1371600" indent="0">
-              <a:buNone/>
-              <a:defRPr sz="1000"/>
-            </a:lvl4pPr>
-            <a:lvl5pPr marL="1828800" indent="0">
-              <a:buNone/>
-              <a:defRPr sz="1000"/>
-            </a:lvl5pPr>
-            <a:lvl6pPr marL="2286000" indent="0">
-              <a:buNone/>
-              <a:defRPr sz="1000"/>
-            </a:lvl6pPr>
-            <a:lvl7pPr marL="2743200" indent="0">
-              <a:buNone/>
-              <a:defRPr sz="1000"/>
-            </a:lvl7pPr>
-            <a:lvl8pPr marL="3200400" indent="0">
-              <a:buNone/>
-              <a:defRPr sz="1000"/>
-            </a:lvl8pPr>
-            <a:lvl9pPr marL="3657600" indent="0">
-              <a:buNone/>
-              <a:defRPr sz="1000"/>
-            </a:lvl9pPr>
           </a:lstStyle>
-          <a:p>
-            <a:pPr lvl="0"/>
-            <a:r>
-              <a:rPr lang="en-US"/>
-              <a:t>Click to edit Master text styles</a:t>
-            </a:r>
-          </a:p>
-        </p:txBody>
-      </p:sp>
-      <p:sp>
-        <p:nvSpPr>
-          <p:cNvPr id="5" name="Date Placeholder 4"/>
-          <p:cNvSpPr>
-            <a:spLocks noGrp="1"/>
-          </p:cNvSpPr>
-          <p:nvPr>
-            <p:ph type="dt" sz="half" idx="10"/>
-          </p:nvPr>
-        </p:nvSpPr>
-        <p:spPr/>
-        <p:txBody>
-          <a:bodyPr/>
-          <a:lstStyle/>
           <a:p>
             <a:fld id="{9934508E-F4F0-45DC-A7F4-4636DDC6725B}" type="datetimeFigureOut">
               <a:rPr lang="id-ID" smtClean="0"/>
-              <a:t>06/07/2026</a:t>
+              <a:t>14/07/2026</a:t>
             </a:fld>
             <a:endParaRPr lang="id-ID"/>
           </a:p>
@@ -2414,29 +2642,50 @@
             <p:ph type="ftr" sz="quarter" idx="11"/>
           </p:nvPr>
         </p:nvSpPr>
+        <p:spPr>
+          <a:xfrm>
+            <a:off x="4800600" y="6459785"/>
+            <a:ext cx="4648200" cy="365125"/>
+          </a:xfrm>
+        </p:spPr>
+        <p:txBody>
+          <a:bodyPr/>
+          <a:lstStyle>
+            <a:lvl1pPr algn="l">
+              <a:defRPr>
+                <a:solidFill>
+                  <a:schemeClr val="tx2"/>
+                </a:solidFill>
+              </a:defRPr>
+            </a:lvl1pPr>
+          </a:lstStyle>
+          <a:p>
+            <a:endParaRPr lang="id-ID"/>
+          </a:p>
+        </p:txBody>
+      </p:sp>
+      <p:sp>
+        <p:nvSpPr>
+          <p:cNvPr id="7" name="Slide Number Placeholder 6"/>
+          <p:cNvSpPr>
+            <a:spLocks noGrp="1"/>
+          </p:cNvSpPr>
+          <p:nvPr>
+            <p:ph type="sldNum" sz="quarter" idx="12"/>
+          </p:nvPr>
+        </p:nvSpPr>
         <p:spPr/>
         <p:txBody>
           <a:bodyPr/>
-          <a:lstStyle/>
-          <a:p>
-            <a:endParaRPr lang="id-ID"/>
-          </a:p>
-        </p:txBody>
-      </p:sp>
-      <p:sp>
-        <p:nvSpPr>
-          <p:cNvPr id="7" name="Slide Number Placeholder 6"/>
-          <p:cNvSpPr>
-            <a:spLocks noGrp="1"/>
-          </p:cNvSpPr>
-          <p:nvPr>
-            <p:ph type="sldNum" sz="quarter" idx="12"/>
-          </p:nvPr>
-        </p:nvSpPr>
-        <p:spPr/>
-        <p:txBody>
-          <a:bodyPr/>
-          <a:lstStyle/>
+          <a:lstStyle>
+            <a:lvl1pPr>
+              <a:defRPr>
+                <a:solidFill>
+                  <a:schemeClr val="tx2"/>
+                </a:solidFill>
+              </a:defRPr>
+            </a:lvl1pPr>
+          </a:lstStyle>
           <a:p>
             <a:fld id="{D841BA9F-D2C0-4D2D-9EE5-53682635F28C}" type="slidenum">
               <a:rPr lang="id-ID" smtClean="0"/>
@@ -2446,41 +2695,10 @@
           </a:p>
         </p:txBody>
       </p:sp>
-      <p:cxnSp>
-        <p:nvCxnSpPr>
-          <p:cNvPr id="17" name="Straight Connector 16"/>
-          <p:cNvCxnSpPr/>
-          <p:nvPr/>
-        </p:nvCxnSpPr>
-        <p:spPr>
-          <a:xfrm>
-            <a:off x="1448280" y="3205491"/>
-            <a:ext cx="3269490" cy="0"/>
-          </a:xfrm>
-          <a:prstGeom prst="line">
-            <a:avLst/>
-          </a:prstGeom>
-          <a:ln w="31750"/>
-        </p:spPr>
-        <p:style>
-          <a:lnRef idx="3">
-            <a:schemeClr val="accent1"/>
-          </a:lnRef>
-          <a:fillRef idx="0">
-            <a:schemeClr val="accent1"/>
-          </a:fillRef>
-          <a:effectRef idx="2">
-            <a:schemeClr val="accent1"/>
-          </a:effectRef>
-          <a:fontRef idx="minor">
-            <a:schemeClr val="tx1"/>
-          </a:fontRef>
-        </p:style>
-      </p:cxnSp>
     </p:spTree>
     <p:extLst>
       <p:ext uri="{BB962C8B-B14F-4D97-AF65-F5344CB8AC3E}">
-        <p14:creationId xmlns:p14="http://schemas.microsoft.com/office/powerpoint/2010/main" val="612304294"/>
+        <p14:creationId xmlns:p14="http://schemas.microsoft.com/office/powerpoint/2010/main" val="3454391295"/>
       </p:ext>
     </p:extLst>
   </p:cSld>
@@ -2491,7 +2709,7 @@
 </file>
 
 <file path=ppt/slideLayouts/slideLayout9.xml><?xml version="1.0" encoding="utf-8"?>
-<p:sldLayout xmlns:a="http://schemas.openxmlformats.org/drawingml/2006/main" xmlns:r="http://schemas.openxmlformats.org/officeDocument/2006/relationships" xmlns:p="http://schemas.openxmlformats.org/presentationml/2006/main" type="picTx" preserve="1">
+<p:sldLayout xmlns:a="http://schemas.openxmlformats.org/drawingml/2006/main" xmlns:r="http://schemas.openxmlformats.org/officeDocument/2006/relationships" xmlns:p="http://schemas.openxmlformats.org/presentationml/2006/main" showMasterSp="0" type="picTx" preserve="1">
   <p:cSld name="Picture with Caption">
     <p:spTree>
       <p:nvGrpSpPr>
@@ -2507,140 +2725,82 @@
           <a:chExt cx="0" cy="0"/>
         </a:xfrm>
       </p:grpSpPr>
-      <p:grpSp>
-        <p:nvGrpSpPr>
-          <p:cNvPr id="8" name="Group 7"/>
-          <p:cNvGrpSpPr/>
+      <p:sp>
+        <p:nvSpPr>
+          <p:cNvPr id="8" name="Rectangle 7"/>
+          <p:cNvSpPr/>
           <p:nvPr/>
-        </p:nvGrpSpPr>
-        <p:grpSpPr>
-          <a:xfrm>
-            <a:off x="7477387" y="482170"/>
-            <a:ext cx="4074533" cy="5149101"/>
-            <a:chOff x="7477387" y="482170"/>
-            <a:chExt cx="4074533" cy="5149101"/>
-          </a:xfrm>
-        </p:grpSpPr>
-        <p:sp>
-          <p:nvSpPr>
-            <p:cNvPr id="18" name="Rectangle 17"/>
-            <p:cNvSpPr/>
-            <p:nvPr/>
-          </p:nvSpPr>
-          <p:spPr bwMode="black">
-            <a:xfrm>
-              <a:off x="7477387" y="482170"/>
-              <a:ext cx="4074533" cy="5149101"/>
-            </a:xfrm>
-            <a:prstGeom prst="rect">
-              <a:avLst/>
-            </a:prstGeom>
-            <a:gradFill>
-              <a:gsLst>
-                <a:gs pos="0">
-                  <a:srgbClr val="000001"/>
-                </a:gs>
-                <a:gs pos="100000">
-                  <a:srgbClr val="191919"/>
-                </a:gs>
-              </a:gsLst>
-            </a:gradFill>
-            <a:ln w="76200" cmpd="sng">
-              <a:noFill/>
-              <a:miter lim="800000"/>
-            </a:ln>
-            <a:effectLst>
-              <a:outerShdw blurRad="127000" dist="228600" dir="4740000" sx="98000" sy="98000" algn="tl" rotWithShape="0">
-                <a:srgbClr val="000000">
-                  <a:alpha val="34000"/>
-                </a:srgbClr>
-              </a:outerShdw>
-            </a:effectLst>
-            <a:scene3d>
-              <a:camera prst="orthographicFront"/>
-              <a:lightRig rig="threePt" dir="t"/>
-            </a:scene3d>
-            <a:sp3d>
-              <a:bevelT w="152400" h="50800" prst="softRound"/>
-            </a:sp3d>
-          </p:spPr>
-          <p:style>
-            <a:lnRef idx="1">
-              <a:schemeClr val="accent1"/>
-            </a:lnRef>
-            <a:fillRef idx="3">
-              <a:schemeClr val="accent1"/>
-            </a:fillRef>
-            <a:effectRef idx="2">
-              <a:schemeClr val="accent1"/>
-            </a:effectRef>
-            <a:fontRef idx="minor">
-              <a:schemeClr val="lt1"/>
-            </a:fontRef>
-          </p:style>
-        </p:sp>
-        <p:sp>
-          <p:nvSpPr>
-            <p:cNvPr id="19" name="Rectangle 18"/>
-            <p:cNvSpPr/>
-            <p:nvPr/>
-          </p:nvSpPr>
-          <p:spPr bwMode="blackWhite">
-            <a:xfrm>
-              <a:off x="7790446" y="812506"/>
-              <a:ext cx="3450289" cy="4466452"/>
-            </a:xfrm>
-            <a:prstGeom prst="rect">
-              <a:avLst/>
-            </a:prstGeom>
-            <a:gradFill>
-              <a:gsLst>
-                <a:gs pos="0">
-                  <a:srgbClr val="DADADA"/>
-                </a:gs>
-                <a:gs pos="100000">
-                  <a:srgbClr val="FFFFFE"/>
-                </a:gs>
-              </a:gsLst>
-              <a:lin ang="16200000" scaled="0"/>
-            </a:gradFill>
-            <a:ln w="50800" cmpd="sng">
-              <a:solidFill>
-                <a:srgbClr val="191919"/>
-              </a:solidFill>
-              <a:miter lim="800000"/>
-            </a:ln>
-            <a:effectLst>
-              <a:innerShdw blurRad="63500" dist="88900" dir="14100000">
-                <a:srgbClr val="000000">
-                  <a:alpha val="30000"/>
-                </a:srgbClr>
-              </a:innerShdw>
-            </a:effectLst>
-            <a:scene3d>
-              <a:camera prst="orthographicFront"/>
-              <a:lightRig rig="threePt" dir="t"/>
-            </a:scene3d>
-            <a:sp3d>
-              <a:bevelT prst="relaxedInset"/>
-            </a:sp3d>
-          </p:spPr>
-          <p:style>
-            <a:lnRef idx="1">
-              <a:schemeClr val="accent1"/>
-            </a:lnRef>
-            <a:fillRef idx="3">
-              <a:schemeClr val="accent1"/>
-            </a:fillRef>
-            <a:effectRef idx="2">
-              <a:schemeClr val="accent1"/>
-            </a:effectRef>
-            <a:fontRef idx="minor">
-              <a:schemeClr val="lt1"/>
-            </a:fontRef>
-          </p:style>
-        </p:sp>
-      </p:grpSp>
+        </p:nvSpPr>
+        <p:spPr>
+          <a:xfrm>
+            <a:off x="0" y="4953000"/>
+            <a:ext cx="12188825" cy="1905000"/>
+          </a:xfrm>
+          <a:prstGeom prst="rect">
+            <a:avLst/>
+          </a:prstGeom>
+          <a:solidFill>
+            <a:schemeClr val="accent2"/>
+          </a:solidFill>
+          <a:ln>
+            <a:noFill/>
+          </a:ln>
+        </p:spPr>
+        <p:style>
+          <a:lnRef idx="2">
+            <a:schemeClr val="accent1">
+              <a:shade val="50000"/>
+            </a:schemeClr>
+          </a:lnRef>
+          <a:fillRef idx="1">
+            <a:schemeClr val="accent1"/>
+          </a:fillRef>
+          <a:effectRef idx="0">
+            <a:schemeClr val="accent1"/>
+          </a:effectRef>
+          <a:fontRef idx="minor">
+            <a:schemeClr val="lt1"/>
+          </a:fontRef>
+        </p:style>
+      </p:sp>
+      <p:sp>
+        <p:nvSpPr>
+          <p:cNvPr id="9" name="Rectangle 8"/>
+          <p:cNvSpPr/>
+          <p:nvPr/>
+        </p:nvSpPr>
+        <p:spPr>
+          <a:xfrm>
+            <a:off x="15" y="4915076"/>
+            <a:ext cx="12188825" cy="64008"/>
+          </a:xfrm>
+          <a:prstGeom prst="rect">
+            <a:avLst/>
+          </a:prstGeom>
+          <a:solidFill>
+            <a:schemeClr val="accent1"/>
+          </a:solidFill>
+          <a:ln>
+            <a:noFill/>
+          </a:ln>
+        </p:spPr>
+        <p:style>
+          <a:lnRef idx="2">
+            <a:schemeClr val="accent1">
+              <a:shade val="50000"/>
+            </a:schemeClr>
+          </a:lnRef>
+          <a:fillRef idx="1">
+            <a:schemeClr val="accent1"/>
+          </a:fillRef>
+          <a:effectRef idx="0">
+            <a:schemeClr val="accent1"/>
+          </a:effectRef>
+          <a:fontRef idx="minor">
+            <a:schemeClr val="lt1"/>
+          </a:fontRef>
+        </p:style>
+      </p:sp>
       <p:sp>
         <p:nvSpPr>
           <p:cNvPr id="2" name="Title 1"/>
@@ -2653,162 +2813,176 @@
         </p:nvSpPr>
         <p:spPr>
           <a:xfrm>
-            <a:off x="1451206" y="1129513"/>
-            <a:ext cx="5532328" cy="1830584"/>
-          </a:xfrm>
-        </p:spPr>
-        <p:txBody>
-          <a:bodyPr anchor="b">
+            <a:off x="1097280" y="5074920"/>
+            <a:ext cx="10113264" cy="822960"/>
+          </a:xfrm>
+        </p:spPr>
+        <p:txBody>
+          <a:bodyPr lIns="91440" tIns="0" rIns="91440" bIns="0" anchor="b">
+            <a:noAutofit/>
+          </a:bodyPr>
+          <a:lstStyle>
+            <a:lvl1pPr>
+              <a:defRPr sz="3600" b="0">
+                <a:solidFill>
+                  <a:srgbClr val="FFFFFF"/>
+                </a:solidFill>
+              </a:defRPr>
+            </a:lvl1pPr>
+          </a:lstStyle>
+          <a:p>
+            <a:r>
+              <a:rPr lang="en-US"/>
+              <a:t>Click to edit Master title style</a:t>
+            </a:r>
+            <a:endParaRPr lang="en-US" dirty="0"/>
+          </a:p>
+        </p:txBody>
+      </p:sp>
+      <p:sp>
+        <p:nvSpPr>
+          <p:cNvPr id="3" name="Picture Placeholder 2"/>
+          <p:cNvSpPr>
+            <a:spLocks noGrp="1" noChangeAspect="1"/>
+          </p:cNvSpPr>
+          <p:nvPr>
+            <p:ph type="pic" idx="1"/>
+          </p:nvPr>
+        </p:nvSpPr>
+        <p:spPr>
+          <a:xfrm>
+            <a:off x="15" y="0"/>
+            <a:ext cx="12191985" cy="4915076"/>
+          </a:xfrm>
+          <a:blipFill>
+            <a:blip r:embed="rId2"/>
+            <a:stretch>
+              <a:fillRect/>
+            </a:stretch>
+          </a:blipFill>
+        </p:spPr>
+        <p:txBody>
+          <a:bodyPr lIns="457200" tIns="457200" anchor="t"/>
+          <a:lstStyle>
+            <a:lvl1pPr marL="0" indent="0">
+              <a:buNone/>
+              <a:defRPr sz="3200">
+                <a:solidFill>
+                  <a:schemeClr val="bg1"/>
+                </a:solidFill>
+              </a:defRPr>
+            </a:lvl1pPr>
+            <a:lvl2pPr marL="457200" indent="0">
+              <a:buNone/>
+              <a:defRPr sz="2800"/>
+            </a:lvl2pPr>
+            <a:lvl3pPr marL="914400" indent="0">
+              <a:buNone/>
+              <a:defRPr sz="2400"/>
+            </a:lvl3pPr>
+            <a:lvl4pPr marL="1371600" indent="0">
+              <a:buNone/>
+              <a:defRPr sz="2000"/>
+            </a:lvl4pPr>
+            <a:lvl5pPr marL="1828800" indent="0">
+              <a:buNone/>
+              <a:defRPr sz="2000"/>
+            </a:lvl5pPr>
+            <a:lvl6pPr marL="2286000" indent="0">
+              <a:buNone/>
+              <a:defRPr sz="2000"/>
+            </a:lvl6pPr>
+            <a:lvl7pPr marL="2743200" indent="0">
+              <a:buNone/>
+              <a:defRPr sz="2000"/>
+            </a:lvl7pPr>
+            <a:lvl8pPr marL="3200400" indent="0">
+              <a:buNone/>
+              <a:defRPr sz="2000"/>
+            </a:lvl8pPr>
+            <a:lvl9pPr marL="3657600" indent="0">
+              <a:buNone/>
+              <a:defRPr sz="2000"/>
+            </a:lvl9pPr>
+          </a:lstStyle>
+          <a:p>
+            <a:r>
+              <a:rPr lang="en-US"/>
+              <a:t>Click icon to add picture</a:t>
+            </a:r>
+            <a:endParaRPr lang="en-US" dirty="0"/>
+          </a:p>
+        </p:txBody>
+      </p:sp>
+      <p:sp>
+        <p:nvSpPr>
+          <p:cNvPr id="4" name="Text Placeholder 3"/>
+          <p:cNvSpPr>
+            <a:spLocks noGrp="1"/>
+          </p:cNvSpPr>
+          <p:nvPr>
+            <p:ph type="body" sz="half" idx="2"/>
+          </p:nvPr>
+        </p:nvSpPr>
+        <p:spPr>
+          <a:xfrm>
+            <a:off x="1097280" y="5907023"/>
+            <a:ext cx="10113264" cy="594360"/>
+          </a:xfrm>
+        </p:spPr>
+        <p:txBody>
+          <a:bodyPr lIns="91440" tIns="0" rIns="91440" bIns="0">
             <a:normAutofit/>
           </a:bodyPr>
           <a:lstStyle>
-            <a:lvl1pPr>
-              <a:defRPr sz="3200"/>
-            </a:lvl1pPr>
-          </a:lstStyle>
-          <a:p>
-            <a:r>
-              <a:rPr lang="en-US"/>
-              <a:t>Click to edit Master title style</a:t>
-            </a:r>
-            <a:endParaRPr lang="en-US" dirty="0"/>
-          </a:p>
-        </p:txBody>
-      </p:sp>
-      <p:sp>
-        <p:nvSpPr>
-          <p:cNvPr id="3" name="Picture Placeholder 2"/>
-          <p:cNvSpPr>
-            <a:spLocks noGrp="1" noChangeAspect="1"/>
-          </p:cNvSpPr>
-          <p:nvPr>
-            <p:ph type="pic" idx="1"/>
-          </p:nvPr>
-        </p:nvSpPr>
-        <p:spPr>
-          <a:xfrm>
-            <a:off x="8124389" y="1122542"/>
-            <a:ext cx="2791171" cy="3866327"/>
-          </a:xfrm>
-          <a:solidFill>
-            <a:schemeClr val="bg1">
-              <a:lumMod val="85000"/>
-            </a:schemeClr>
-          </a:solidFill>
-          <a:ln w="9525" cap="sq">
-            <a:noFill/>
-            <a:miter lim="800000"/>
-          </a:ln>
-          <a:effectLst/>
-        </p:spPr>
-        <p:txBody>
-          <a:bodyPr anchor="t"/>
-          <a:lstStyle>
-            <a:lvl1pPr marL="0" indent="0" algn="ctr">
-              <a:buNone/>
-              <a:defRPr sz="3200"/>
+            <a:lvl1pPr marL="0" indent="0">
+              <a:spcBef>
+                <a:spcPts val="0"/>
+              </a:spcBef>
+              <a:spcAft>
+                <a:spcPts val="600"/>
+              </a:spcAft>
+              <a:buNone/>
+              <a:defRPr sz="1500">
+                <a:solidFill>
+                  <a:srgbClr val="FFFFFF"/>
+                </a:solidFill>
+              </a:defRPr>
             </a:lvl1pPr>
             <a:lvl2pPr marL="457200" indent="0">
               <a:buNone/>
-              <a:defRPr sz="2800"/>
+              <a:defRPr sz="1200"/>
             </a:lvl2pPr>
             <a:lvl3pPr marL="914400" indent="0">
               <a:buNone/>
-              <a:defRPr sz="2400"/>
+              <a:defRPr sz="1000"/>
             </a:lvl3pPr>
             <a:lvl4pPr marL="1371600" indent="0">
               <a:buNone/>
-              <a:defRPr sz="2000"/>
+              <a:defRPr sz="900"/>
             </a:lvl4pPr>
             <a:lvl5pPr marL="1828800" indent="0">
               <a:buNone/>
-              <a:defRPr sz="2000"/>
+              <a:defRPr sz="900"/>
             </a:lvl5pPr>
             <a:lvl6pPr marL="2286000" indent="0">
               <a:buNone/>
-              <a:defRPr sz="2000"/>
+              <a:defRPr sz="900"/>
             </a:lvl6pPr>
             <a:lvl7pPr marL="2743200" indent="0">
               <a:buNone/>
-              <a:defRPr sz="2000"/>
+              <a:defRPr sz="900"/>
             </a:lvl7pPr>
             <a:lvl8pPr marL="3200400" indent="0">
               <a:buNone/>
-              <a:defRPr sz="2000"/>
+              <a:defRPr sz="900"/>
             </a:lvl8pPr>
             <a:lvl9pPr marL="3657600" indent="0">
               <a:buNone/>
-              <a:defRPr sz="2000"/>
+              <a:defRPr sz="900"/>
             </a:lvl9pPr>
           </a:lstStyle>
           <a:p>
-            <a:r>
-              <a:rPr lang="en-US"/>
-              <a:t>Click icon to add picture</a:t>
-            </a:r>
-            <a:endParaRPr lang="en-US" dirty="0"/>
-          </a:p>
-        </p:txBody>
-      </p:sp>
-      <p:sp>
-        <p:nvSpPr>
-          <p:cNvPr id="4" name="Text Placeholder 3"/>
-          <p:cNvSpPr>
-            <a:spLocks noGrp="1"/>
-          </p:cNvSpPr>
-          <p:nvPr>
-            <p:ph type="body" sz="half" idx="2"/>
-          </p:nvPr>
-        </p:nvSpPr>
-        <p:spPr>
-          <a:xfrm>
-            <a:off x="1450329" y="3145992"/>
-            <a:ext cx="5524404" cy="2003742"/>
-          </a:xfrm>
-        </p:spPr>
-        <p:txBody>
-          <a:bodyPr>
-            <a:normAutofit/>
-          </a:bodyPr>
-          <a:lstStyle>
-            <a:lvl1pPr marL="0" indent="0" algn="l">
-              <a:buNone/>
-              <a:defRPr sz="1800"/>
-            </a:lvl1pPr>
-            <a:lvl2pPr marL="457200" indent="0">
-              <a:buNone/>
-              <a:defRPr sz="1400"/>
-            </a:lvl2pPr>
-            <a:lvl3pPr marL="914400" indent="0">
-              <a:buNone/>
-              <a:defRPr sz="1200"/>
-            </a:lvl3pPr>
-            <a:lvl4pPr marL="1371600" indent="0">
-              <a:buNone/>
-              <a:defRPr sz="1000"/>
-            </a:lvl4pPr>
-            <a:lvl5pPr marL="1828800" indent="0">
-              <a:buNone/>
-              <a:defRPr sz="1000"/>
-            </a:lvl5pPr>
-            <a:lvl6pPr marL="2286000" indent="0">
-              <a:buNone/>
-              <a:defRPr sz="1000"/>
-            </a:lvl6pPr>
-            <a:lvl7pPr marL="2743200" indent="0">
-              <a:buNone/>
-              <a:defRPr sz="1000"/>
-            </a:lvl7pPr>
-            <a:lvl8pPr marL="3200400" indent="0">
-              <a:buNone/>
-              <a:defRPr sz="1000"/>
-            </a:lvl8pPr>
-            <a:lvl9pPr marL="3657600" indent="0">
-              <a:buNone/>
-              <a:defRPr sz="1000"/>
-            </a:lvl9pPr>
-          </a:lstStyle>
-          <a:p>
             <a:pPr lvl="0"/>
             <a:r>
               <a:rPr lang="en-US"/>
@@ -2827,23 +3001,14 @@
             <p:ph type="dt" sz="half" idx="10"/>
           </p:nvPr>
         </p:nvSpPr>
-        <p:spPr>
-          <a:xfrm>
-            <a:off x="1447382" y="5469856"/>
-            <a:ext cx="5527351" cy="320123"/>
-          </a:xfrm>
-        </p:spPr>
+        <p:spPr/>
         <p:txBody>
           <a:bodyPr/>
-          <a:lstStyle>
-            <a:lvl1pPr algn="l">
-              <a:defRPr/>
-            </a:lvl1pPr>
-          </a:lstStyle>
+          <a:lstStyle/>
           <a:p>
             <a:fld id="{9934508E-F4F0-45DC-A7F4-4636DDC6725B}" type="datetimeFigureOut">
               <a:rPr lang="id-ID" smtClean="0"/>
-              <a:t>06/07/2026</a:t>
+              <a:t>14/07/2026</a:t>
             </a:fld>
             <a:endParaRPr lang="id-ID"/>
           </a:p>
@@ -2859,12 +3024,7 @@
             <p:ph type="ftr" sz="quarter" idx="11"/>
           </p:nvPr>
         </p:nvSpPr>
-        <p:spPr>
-          <a:xfrm>
-            <a:off x="1447382" y="318640"/>
-            <a:ext cx="5541004" cy="320931"/>
-          </a:xfrm>
-        </p:spPr>
+        <p:spPr/>
         <p:txBody>
           <a:bodyPr/>
           <a:lstStyle/>
@@ -2896,41 +3056,10 @@
           </a:p>
         </p:txBody>
       </p:sp>
-      <p:cxnSp>
-        <p:nvCxnSpPr>
-          <p:cNvPr id="31" name="Straight Connector 30"/>
-          <p:cNvCxnSpPr/>
-          <p:nvPr/>
-        </p:nvCxnSpPr>
-        <p:spPr>
-          <a:xfrm>
-            <a:off x="1447382" y="3143605"/>
-            <a:ext cx="5527351" cy="0"/>
-          </a:xfrm>
-          <a:prstGeom prst="line">
-            <a:avLst/>
-          </a:prstGeom>
-          <a:ln w="31750"/>
-        </p:spPr>
-        <p:style>
-          <a:lnRef idx="3">
-            <a:schemeClr val="accent1"/>
-          </a:lnRef>
-          <a:fillRef idx="0">
-            <a:schemeClr val="accent1"/>
-          </a:fillRef>
-          <a:effectRef idx="2">
-            <a:schemeClr val="accent1"/>
-          </a:effectRef>
-          <a:fontRef idx="minor">
-            <a:schemeClr val="tx1"/>
-          </a:fontRef>
-        </p:style>
-      </p:cxnSp>
     </p:spTree>
     <p:extLst>
       <p:ext uri="{BB962C8B-B14F-4D97-AF65-F5344CB8AC3E}">
-        <p14:creationId xmlns:p14="http://schemas.microsoft.com/office/powerpoint/2010/main" val="2311179286"/>
+        <p14:creationId xmlns:p14="http://schemas.microsoft.com/office/powerpoint/2010/main" val="3007091916"/>
       </p:ext>
     </p:extLst>
   </p:cSld>
@@ -2944,8 +3073,8 @@
 <p:sldMaster xmlns:a="http://schemas.openxmlformats.org/drawingml/2006/main" xmlns:r="http://schemas.openxmlformats.org/officeDocument/2006/relationships" xmlns:p="http://schemas.openxmlformats.org/presentationml/2006/main">
   <p:cSld>
     <p:bg>
-      <p:bgRef idx="1003">
-        <a:schemeClr val="bg2"/>
+      <p:bgRef idx="1001">
+        <a:schemeClr val="bg1"/>
       </p:bgRef>
     </p:bg>
     <p:spTree>
@@ -2964,32 +3093,21 @@
       </p:grpSpPr>
       <p:sp>
         <p:nvSpPr>
-          <p:cNvPr id="8" name="Rectangle 7"/>
+          <p:cNvPr id="7" name="Rectangle 6"/>
           <p:cNvSpPr/>
           <p:nvPr/>
         </p:nvSpPr>
         <p:spPr>
           <a:xfrm>
-            <a:off x="0" y="2019476"/>
-            <a:ext cx="12192000" cy="4105941"/>
+            <a:off x="1" y="6400800"/>
+            <a:ext cx="12192000" cy="457200"/>
           </a:xfrm>
           <a:prstGeom prst="rect">
             <a:avLst/>
           </a:prstGeom>
-          <a:gradFill flip="none" rotWithShape="1">
-            <a:gsLst>
-              <a:gs pos="0">
-                <a:schemeClr val="bg2">
-                  <a:alpha val="0"/>
-                </a:schemeClr>
-              </a:gs>
-              <a:gs pos="100000">
-                <a:schemeClr val="bg2"/>
-              </a:gs>
-            </a:gsLst>
-            <a:lin ang="5400000" scaled="0"/>
-            <a:tileRect/>
-          </a:gradFill>
+          <a:solidFill>
+            <a:schemeClr val="accent2"/>
+          </a:solidFill>
           <a:ln>
             <a:noFill/>
           </a:ln>
@@ -3011,35 +3129,44 @@
           </a:fontRef>
         </p:style>
       </p:sp>
-      <p:pic>
-        <p:nvPicPr>
-          <p:cNvPr id="7" name="Picture 6"/>
-          <p:cNvPicPr>
-            <a:picLocks noChangeAspect="1"/>
-          </p:cNvPicPr>
+      <p:sp>
+        <p:nvSpPr>
+          <p:cNvPr id="9" name="Rectangle 8"/>
+          <p:cNvSpPr/>
           <p:nvPr/>
-        </p:nvPicPr>
-        <p:blipFill rotWithShape="1">
-          <a:blip r:embed="rId13">
-            <a:extLst>
-              <a:ext uri="{28A0092B-C50C-407E-A947-70E740481C1C}">
-                <a14:useLocalDpi xmlns:a14="http://schemas.microsoft.com/office/drawing/2010/main" val="0"/>
-              </a:ext>
-            </a:extLst>
-          </a:blip>
-          <a:srcRect t="1538" b="-1538"/>
-          <a:stretch/>
-        </p:blipFill>
-        <p:spPr bwMode="black">
-          <a:xfrm>
-            <a:off x="0" y="6126480"/>
-            <a:ext cx="12192000" cy="742950"/>
+        </p:nvSpPr>
+        <p:spPr>
+          <a:xfrm>
+            <a:off x="0" y="6334316"/>
+            <a:ext cx="12192001" cy="65998"/>
           </a:xfrm>
           <a:prstGeom prst="rect">
             <a:avLst/>
           </a:prstGeom>
-        </p:spPr>
-      </p:pic>
+          <a:solidFill>
+            <a:schemeClr val="accent1"/>
+          </a:solidFill>
+          <a:ln>
+            <a:noFill/>
+          </a:ln>
+        </p:spPr>
+        <p:style>
+          <a:lnRef idx="2">
+            <a:schemeClr val="accent1">
+              <a:shade val="50000"/>
+            </a:schemeClr>
+          </a:lnRef>
+          <a:fillRef idx="1">
+            <a:schemeClr val="accent1"/>
+          </a:fillRef>
+          <a:effectRef idx="0">
+            <a:schemeClr val="accent1"/>
+          </a:effectRef>
+          <a:fontRef idx="minor">
+            <a:schemeClr val="lt1"/>
+          </a:fontRef>
+        </p:style>
+      </p:sp>
       <p:sp>
         <p:nvSpPr>
           <p:cNvPr id="2" name="Title Placeholder 1"/>
@@ -3052,15 +3179,15 @@
         </p:nvSpPr>
         <p:spPr>
           <a:xfrm>
-            <a:off x="1451579" y="804519"/>
-            <a:ext cx="9603275" cy="1049235"/>
+            <a:off x="1097280" y="286603"/>
+            <a:ext cx="10058400" cy="1450757"/>
           </a:xfrm>
           <a:prstGeom prst="rect">
             <a:avLst/>
           </a:prstGeom>
         </p:spPr>
         <p:txBody>
-          <a:bodyPr vert="horz" lIns="91440" tIns="45720" rIns="91440" bIns="45720" rtlCol="0" anchor="t">
+          <a:bodyPr vert="horz" lIns="91440" tIns="45720" rIns="91440" bIns="45720" rtlCol="0" anchor="b">
             <a:normAutofit/>
           </a:bodyPr>
           <a:lstStyle/>
@@ -3085,15 +3212,15 @@
         </p:nvSpPr>
         <p:spPr>
           <a:xfrm>
-            <a:off x="1451579" y="2015732"/>
-            <a:ext cx="9603275" cy="3450613"/>
+            <a:off x="1097280" y="1845734"/>
+            <a:ext cx="10058400" cy="4023360"/>
           </a:xfrm>
           <a:prstGeom prst="rect">
             <a:avLst/>
           </a:prstGeom>
         </p:spPr>
         <p:txBody>
-          <a:bodyPr vert="horz" lIns="91440" tIns="45720" rIns="91440" bIns="45720" rtlCol="0">
+          <a:bodyPr vert="horz" lIns="0" tIns="45720" rIns="0" bIns="45720" rtlCol="0">
             <a:normAutofit/>
           </a:bodyPr>
           <a:lstStyle/>
@@ -3147,8 +3274,8 @@
         </p:nvSpPr>
         <p:spPr>
           <a:xfrm>
-            <a:off x="7554138" y="330370"/>
-            <a:ext cx="3500715" cy="309201"/>
+            <a:off x="1097280" y="6459785"/>
+            <a:ext cx="2472271" cy="365125"/>
           </a:xfrm>
           <a:prstGeom prst="rect">
             <a:avLst/>
@@ -3157,12 +3284,10 @@
         <p:txBody>
           <a:bodyPr vert="horz" lIns="91440" tIns="45720" rIns="91440" bIns="45720" rtlCol="0" anchor="ctr"/>
           <a:lstStyle>
-            <a:lvl1pPr algn="r">
-              <a:defRPr sz="1000">
+            <a:lvl1pPr algn="l">
+              <a:defRPr sz="900">
                 <a:solidFill>
-                  <a:schemeClr val="tx1">
-                    <a:tint val="75000"/>
-                  </a:schemeClr>
+                  <a:srgbClr val="FFFFFF"/>
                 </a:solidFill>
               </a:defRPr>
             </a:lvl1pPr>
@@ -3170,7 +3295,7 @@
           <a:p>
             <a:fld id="{9934508E-F4F0-45DC-A7F4-4636DDC6725B}" type="datetimeFigureOut">
               <a:rPr lang="id-ID" smtClean="0"/>
-              <a:t>06/07/2026</a:t>
+              <a:t>14/07/2026</a:t>
             </a:fld>
             <a:endParaRPr lang="id-ID"/>
           </a:p>
@@ -3188,8 +3313,8 @@
         </p:nvSpPr>
         <p:spPr>
           <a:xfrm>
-            <a:off x="1451579" y="329307"/>
-            <a:ext cx="5938836" cy="309201"/>
+            <a:off x="3686185" y="6459785"/>
+            <a:ext cx="4822804" cy="365125"/>
           </a:xfrm>
           <a:prstGeom prst="rect">
             <a:avLst/>
@@ -3198,12 +3323,10 @@
         <p:txBody>
           <a:bodyPr vert="horz" lIns="91440" tIns="45720" rIns="91440" bIns="45720" rtlCol="0" anchor="ctr"/>
           <a:lstStyle>
-            <a:lvl1pPr algn="l">
-              <a:defRPr sz="1000">
+            <a:lvl1pPr algn="ctr">
+              <a:defRPr sz="900" cap="all" baseline="0">
                 <a:solidFill>
-                  <a:schemeClr val="tx1">
-                    <a:tint val="75000"/>
-                  </a:schemeClr>
+                  <a:srgbClr val="FFFFFF"/>
                 </a:solidFill>
               </a:defRPr>
             </a:lvl1pPr>
@@ -3225,20 +3348,20 @@
         </p:nvSpPr>
         <p:spPr>
           <a:xfrm>
-            <a:off x="480060" y="798973"/>
-            <a:ext cx="811019" cy="503578"/>
+            <a:off x="9900458" y="6459785"/>
+            <a:ext cx="1312025" cy="365125"/>
           </a:xfrm>
           <a:prstGeom prst="rect">
             <a:avLst/>
           </a:prstGeom>
         </p:spPr>
         <p:txBody>
-          <a:bodyPr vert="horz" lIns="91440" tIns="45720" rIns="91440" bIns="45720" rtlCol="0" anchor="t"/>
+          <a:bodyPr vert="horz" lIns="91440" tIns="45720" rIns="91440" bIns="45720" rtlCol="0" anchor="ctr"/>
           <a:lstStyle>
             <a:lvl1pPr algn="r">
-              <a:defRPr sz="2800">
+              <a:defRPr sz="1050">
                 <a:solidFill>
-                  <a:schemeClr val="accent1"/>
+                  <a:srgbClr val="FFFFFF"/>
                 </a:solidFill>
               </a:defRPr>
             </a:lvl1pPr>
@@ -3260,17 +3383,18 @@
         </p:nvCxnSpPr>
         <p:spPr>
           <a:xfrm>
-            <a:off x="0" y="6128413"/>
-            <a:ext cx="12192000" cy="0"/>
+            <a:off x="1193532" y="1737845"/>
+            <a:ext cx="9966960" cy="0"/>
           </a:xfrm>
           <a:prstGeom prst="line">
             <a:avLst/>
           </a:prstGeom>
-          <a:ln w="12700">
+          <a:ln w="6350">
             <a:solidFill>
-              <a:srgbClr val="000001">
-                <a:alpha val="20000"/>
-              </a:srgbClr>
+              <a:schemeClr val="tx1">
+                <a:lumMod val="50000"/>
+                <a:lumOff val="50000"/>
+              </a:schemeClr>
             </a:solidFill>
           </a:ln>
         </p:spPr>
@@ -3292,39 +3416,41 @@
     </p:spTree>
     <p:extLst>
       <p:ext uri="{BB962C8B-B14F-4D97-AF65-F5344CB8AC3E}">
-        <p14:creationId xmlns:p14="http://schemas.microsoft.com/office/powerpoint/2010/main" val="2522284502"/>
+        <p14:creationId xmlns:p14="http://schemas.microsoft.com/office/powerpoint/2010/main" val="1195582150"/>
       </p:ext>
     </p:extLst>
   </p:cSld>
   <p:clrMap bg1="lt1" tx1="dk1" bg2="lt2" tx2="dk2" accent1="accent1" accent2="accent2" accent3="accent3" accent4="accent4" accent5="accent5" accent6="accent6" hlink="hlink" folHlink="folHlink"/>
   <p:sldLayoutIdLst>
-    <p:sldLayoutId id="2147483661" r:id="rId1"/>
-    <p:sldLayoutId id="2147483662" r:id="rId2"/>
-    <p:sldLayoutId id="2147483663" r:id="rId3"/>
-    <p:sldLayoutId id="2147483664" r:id="rId4"/>
-    <p:sldLayoutId id="2147483665" r:id="rId5"/>
-    <p:sldLayoutId id="2147483666" r:id="rId6"/>
-    <p:sldLayoutId id="2147483667" r:id="rId7"/>
-    <p:sldLayoutId id="2147483668" r:id="rId8"/>
-    <p:sldLayoutId id="2147483669" r:id="rId9"/>
-    <p:sldLayoutId id="2147483670" r:id="rId10"/>
-    <p:sldLayoutId id="2147483671" r:id="rId11"/>
+    <p:sldLayoutId id="2147483685" r:id="rId1"/>
+    <p:sldLayoutId id="2147483686" r:id="rId2"/>
+    <p:sldLayoutId id="2147483687" r:id="rId3"/>
+    <p:sldLayoutId id="2147483688" r:id="rId4"/>
+    <p:sldLayoutId id="2147483689" r:id="rId5"/>
+    <p:sldLayoutId id="2147483690" r:id="rId6"/>
+    <p:sldLayoutId id="2147483691" r:id="rId7"/>
+    <p:sldLayoutId id="2147483692" r:id="rId8"/>
+    <p:sldLayoutId id="2147483693" r:id="rId9"/>
+    <p:sldLayoutId id="2147483694" r:id="rId10"/>
+    <p:sldLayoutId id="2147483695" r:id="rId11"/>
   </p:sldLayoutIdLst>
   <p:txStyles>
     <p:titleStyle>
       <a:lvl1pPr algn="l" defTabSz="914400" rtl="0" eaLnBrk="1" latinLnBrk="0" hangingPunct="1">
         <a:lnSpc>
-          <a:spcPct val="90000"/>
+          <a:spcPct val="85000"/>
         </a:lnSpc>
         <a:spcBef>
           <a:spcPct val="0"/>
         </a:spcBef>
         <a:buNone/>
-        <a:defRPr sz="3200" b="0" i="0" kern="1200" cap="all">
+        <a:defRPr sz="4800" kern="1200" spc="-50" baseline="0">
           <a:solidFill>
-            <a:schemeClr val="tx1"/>
+            <a:schemeClr val="tx1">
+              <a:lumMod val="75000"/>
+              <a:lumOff val="25000"/>
+            </a:schemeClr>
           </a:solidFill>
-          <a:effectLst/>
           <a:latin typeface="+mj-lt"/>
           <a:ea typeface="+mj-ea"/>
           <a:cs typeface="+mj-cs"/>
@@ -3332,208 +3458,245 @@
       </a:lvl1pPr>
     </p:titleStyle>
     <p:bodyStyle>
-      <a:lvl1pPr marL="228600" indent="-228600" algn="l" defTabSz="914400" rtl="0" eaLnBrk="1" latinLnBrk="0" hangingPunct="1">
+      <a:lvl1pPr marL="91440" indent="-91440" algn="l" defTabSz="914400" rtl="0" eaLnBrk="1" latinLnBrk="0" hangingPunct="1">
         <a:lnSpc>
-          <a:spcPct val="120000"/>
+          <a:spcPct val="90000"/>
         </a:lnSpc>
         <a:spcBef>
-          <a:spcPts val="1000"/>
+          <a:spcPts val="1200"/>
         </a:spcBef>
+        <a:spcAft>
+          <a:spcPts val="200"/>
+        </a:spcAft>
         <a:buClr>
           <a:schemeClr val="accent1"/>
         </a:buClr>
         <a:buSzPct val="100000"/>
-        <a:buFont typeface="Arial" panose="020B0604020202020204" pitchFamily="34" charset="0"/>
-        <a:buChar char="•"/>
+        <a:buFont typeface="Calibri" panose="020F0502020204030204" pitchFamily="34" charset="0"/>
+        <a:buChar char=" "/>
         <a:defRPr sz="2000" kern="1200">
           <a:solidFill>
-            <a:schemeClr val="tx1"/>
+            <a:schemeClr val="tx1">
+              <a:lumMod val="75000"/>
+              <a:lumOff val="25000"/>
+            </a:schemeClr>
           </a:solidFill>
-          <a:effectLst/>
           <a:latin typeface="+mn-lt"/>
           <a:ea typeface="+mn-ea"/>
           <a:cs typeface="+mn-cs"/>
         </a:defRPr>
       </a:lvl1pPr>
-      <a:lvl2pPr marL="685800" indent="-228600" algn="l" defTabSz="914400" rtl="0" eaLnBrk="1" latinLnBrk="0" hangingPunct="1">
+      <a:lvl2pPr marL="384048" indent="-182880" algn="l" defTabSz="914400" rtl="0" eaLnBrk="1" latinLnBrk="0" hangingPunct="1">
         <a:lnSpc>
-          <a:spcPct val="120000"/>
+          <a:spcPct val="90000"/>
         </a:lnSpc>
         <a:spcBef>
-          <a:spcPts val="500"/>
+          <a:spcPts val="200"/>
         </a:spcBef>
+        <a:spcAft>
+          <a:spcPts val="400"/>
+        </a:spcAft>
         <a:buClr>
           <a:schemeClr val="accent1"/>
         </a:buClr>
-        <a:buSzPct val="100000"/>
-        <a:buFont typeface="Arial" panose="020B0604020202020204" pitchFamily="34" charset="0"/>
-        <a:buChar char="•"/>
-        <a:defRPr sz="1800" kern="1200" cap="none" baseline="0">
+        <a:buFont typeface="Calibri" pitchFamily="34" charset="0"/>
+        <a:buChar char="◦"/>
+        <a:defRPr sz="1800" kern="1200">
           <a:solidFill>
-            <a:schemeClr val="tx1"/>
+            <a:schemeClr val="tx1">
+              <a:lumMod val="75000"/>
+              <a:lumOff val="25000"/>
+            </a:schemeClr>
           </a:solidFill>
-          <a:effectLst/>
           <a:latin typeface="+mn-lt"/>
           <a:ea typeface="+mn-ea"/>
           <a:cs typeface="+mn-cs"/>
         </a:defRPr>
       </a:lvl2pPr>
-      <a:lvl3pPr marL="1143000" indent="-228600" algn="l" defTabSz="914400" rtl="0" eaLnBrk="1" latinLnBrk="0" hangingPunct="1">
+      <a:lvl3pPr marL="566928" indent="-182880" algn="l" defTabSz="914400" rtl="0" eaLnBrk="1" latinLnBrk="0" hangingPunct="1">
         <a:lnSpc>
-          <a:spcPct val="120000"/>
+          <a:spcPct val="90000"/>
         </a:lnSpc>
         <a:spcBef>
-          <a:spcPts val="500"/>
+          <a:spcPts val="200"/>
         </a:spcBef>
+        <a:spcAft>
+          <a:spcPts val="400"/>
+        </a:spcAft>
         <a:buClr>
           <a:schemeClr val="accent1"/>
         </a:buClr>
-        <a:buSzPct val="100000"/>
-        <a:buFont typeface="Arial" panose="020B0604020202020204" pitchFamily="34" charset="0"/>
-        <a:buChar char="•"/>
-        <a:defRPr sz="1600" kern="1200">
+        <a:buFont typeface="Calibri" pitchFamily="34" charset="0"/>
+        <a:buChar char="◦"/>
+        <a:defRPr sz="1400" kern="1200">
           <a:solidFill>
-            <a:schemeClr val="tx1"/>
+            <a:schemeClr val="tx1">
+              <a:lumMod val="75000"/>
+              <a:lumOff val="25000"/>
+            </a:schemeClr>
           </a:solidFill>
-          <a:effectLst/>
           <a:latin typeface="+mn-lt"/>
           <a:ea typeface="+mn-ea"/>
           <a:cs typeface="+mn-cs"/>
         </a:defRPr>
       </a:lvl3pPr>
-      <a:lvl4pPr marL="1600200" indent="-228600" algn="l" defTabSz="914400" rtl="0" eaLnBrk="1" latinLnBrk="0" hangingPunct="1">
+      <a:lvl4pPr marL="749808" indent="-182880" algn="l" defTabSz="914400" rtl="0" eaLnBrk="1" latinLnBrk="0" hangingPunct="1">
         <a:lnSpc>
-          <a:spcPct val="120000"/>
+          <a:spcPct val="90000"/>
         </a:lnSpc>
         <a:spcBef>
-          <a:spcPts val="500"/>
+          <a:spcPts val="200"/>
         </a:spcBef>
+        <a:spcAft>
+          <a:spcPts val="400"/>
+        </a:spcAft>
         <a:buClr>
           <a:schemeClr val="accent1"/>
         </a:buClr>
-        <a:buSzPct val="100000"/>
-        <a:buFont typeface="Arial" panose="020B0604020202020204" pitchFamily="34" charset="0"/>
-        <a:buChar char="•"/>
-        <a:defRPr sz="1400" kern="1200" cap="none" baseline="0">
+        <a:buFont typeface="Calibri" pitchFamily="34" charset="0"/>
+        <a:buChar char="◦"/>
+        <a:defRPr sz="1400" kern="1200">
           <a:solidFill>
-            <a:schemeClr val="tx1"/>
+            <a:schemeClr val="tx1">
+              <a:lumMod val="75000"/>
+              <a:lumOff val="25000"/>
+            </a:schemeClr>
           </a:solidFill>
-          <a:effectLst/>
           <a:latin typeface="+mn-lt"/>
           <a:ea typeface="+mn-ea"/>
           <a:cs typeface="+mn-cs"/>
         </a:defRPr>
       </a:lvl4pPr>
-      <a:lvl5pPr marL="2057400" indent="-228600" algn="l" defTabSz="914400" rtl="0" eaLnBrk="1" latinLnBrk="0" hangingPunct="1">
+      <a:lvl5pPr marL="932688" indent="-182880" algn="l" defTabSz="914400" rtl="0" eaLnBrk="1" latinLnBrk="0" hangingPunct="1">
         <a:lnSpc>
-          <a:spcPct val="120000"/>
+          <a:spcPct val="90000"/>
         </a:lnSpc>
         <a:spcBef>
-          <a:spcPts val="500"/>
+          <a:spcPts val="200"/>
         </a:spcBef>
+        <a:spcAft>
+          <a:spcPts val="400"/>
+        </a:spcAft>
         <a:buClr>
           <a:schemeClr val="accent1"/>
         </a:buClr>
-        <a:buSzPct val="100000"/>
-        <a:buFont typeface="Arial" panose="020B0604020202020204" pitchFamily="34" charset="0"/>
-        <a:buChar char="•"/>
-        <a:defRPr sz="1200" kern="1200">
+        <a:buFont typeface="Calibri" pitchFamily="34" charset="0"/>
+        <a:buChar char="◦"/>
+        <a:defRPr sz="1400" kern="1200">
           <a:solidFill>
-            <a:schemeClr val="tx1"/>
+            <a:schemeClr val="tx1">
+              <a:lumMod val="75000"/>
+              <a:lumOff val="25000"/>
+            </a:schemeClr>
           </a:solidFill>
-          <a:effectLst/>
           <a:latin typeface="+mn-lt"/>
           <a:ea typeface="+mn-ea"/>
           <a:cs typeface="+mn-cs"/>
         </a:defRPr>
       </a:lvl5pPr>
-      <a:lvl6pPr marL="2514600" indent="-228600" algn="l" defTabSz="914400" rtl="0" eaLnBrk="1" latinLnBrk="0" hangingPunct="1">
+      <a:lvl6pPr marL="1100000" indent="-228600" algn="l" defTabSz="914400" rtl="0" eaLnBrk="1" latinLnBrk="0" hangingPunct="1">
         <a:lnSpc>
-          <a:spcPct val="120000"/>
+          <a:spcPct val="90000"/>
         </a:lnSpc>
         <a:spcBef>
-          <a:spcPts val="500"/>
+          <a:spcPts val="200"/>
         </a:spcBef>
+        <a:spcAft>
+          <a:spcPts val="400"/>
+        </a:spcAft>
         <a:buClr>
           <a:schemeClr val="accent1"/>
         </a:buClr>
-        <a:buSzPct val="100000"/>
-        <a:buFont typeface="Arial" panose="020B0604020202020204" pitchFamily="34" charset="0"/>
-        <a:buChar char="•"/>
-        <a:defRPr sz="1200" kern="1200">
+        <a:buFont typeface="Calibri" pitchFamily="34" charset="0"/>
+        <a:buChar char="◦"/>
+        <a:defRPr sz="1400" kern="1200">
           <a:solidFill>
-            <a:schemeClr val="tx1"/>
+            <a:schemeClr val="tx1">
+              <a:lumMod val="75000"/>
+              <a:lumOff val="25000"/>
+            </a:schemeClr>
           </a:solidFill>
-          <a:effectLst/>
           <a:latin typeface="+mn-lt"/>
           <a:ea typeface="+mn-ea"/>
           <a:cs typeface="+mn-cs"/>
         </a:defRPr>
       </a:lvl6pPr>
-      <a:lvl7pPr marL="2971800" indent="-228600" algn="l" defTabSz="914400" rtl="0" eaLnBrk="1" latinLnBrk="0" hangingPunct="1">
+      <a:lvl7pPr marL="1300000" indent="-228600" algn="l" defTabSz="914400" rtl="0" eaLnBrk="1" latinLnBrk="0" hangingPunct="1">
         <a:lnSpc>
-          <a:spcPct val="120000"/>
+          <a:spcPct val="90000"/>
         </a:lnSpc>
         <a:spcBef>
-          <a:spcPts val="500"/>
+          <a:spcPts val="200"/>
         </a:spcBef>
+        <a:spcAft>
+          <a:spcPts val="400"/>
+        </a:spcAft>
         <a:buClr>
           <a:schemeClr val="accent1"/>
         </a:buClr>
-        <a:buSzPct val="100000"/>
-        <a:buFont typeface="Arial" panose="020B0604020202020204" pitchFamily="34" charset="0"/>
-        <a:buChar char="•"/>
-        <a:defRPr sz="1200" kern="1200">
+        <a:buFont typeface="Calibri" pitchFamily="34" charset="0"/>
+        <a:buChar char="◦"/>
+        <a:defRPr sz="1400" kern="1200">
           <a:solidFill>
-            <a:schemeClr val="tx1"/>
+            <a:schemeClr val="tx1">
+              <a:lumMod val="75000"/>
+              <a:lumOff val="25000"/>
+            </a:schemeClr>
           </a:solidFill>
-          <a:effectLst/>
           <a:latin typeface="+mn-lt"/>
           <a:ea typeface="+mn-ea"/>
           <a:cs typeface="+mn-cs"/>
         </a:defRPr>
       </a:lvl7pPr>
-      <a:lvl8pPr marL="3429000" indent="-228600" algn="l" defTabSz="914400" rtl="0" eaLnBrk="1" latinLnBrk="0" hangingPunct="1">
+      <a:lvl8pPr marL="1500000" indent="-228600" algn="l" defTabSz="914400" rtl="0" eaLnBrk="1" latinLnBrk="0" hangingPunct="1">
         <a:lnSpc>
-          <a:spcPct val="120000"/>
+          <a:spcPct val="90000"/>
         </a:lnSpc>
         <a:spcBef>
-          <a:spcPts val="500"/>
+          <a:spcPts val="200"/>
         </a:spcBef>
+        <a:spcAft>
+          <a:spcPts val="400"/>
+        </a:spcAft>
         <a:buClr>
           <a:schemeClr val="accent1"/>
         </a:buClr>
-        <a:buSzPct val="100000"/>
-        <a:buFont typeface="Arial" panose="020B0604020202020204" pitchFamily="34" charset="0"/>
-        <a:buChar char="•"/>
-        <a:defRPr sz="1200" kern="1200" baseline="0">
+        <a:buFont typeface="Calibri" pitchFamily="34" charset="0"/>
+        <a:buChar char="◦"/>
+        <a:defRPr sz="1400" kern="1200">
           <a:solidFill>
-            <a:schemeClr val="tx1"/>
+            <a:schemeClr val="tx1">
+              <a:lumMod val="75000"/>
+              <a:lumOff val="25000"/>
+            </a:schemeClr>
           </a:solidFill>
-          <a:effectLst/>
           <a:latin typeface="+mn-lt"/>
           <a:ea typeface="+mn-ea"/>
           <a:cs typeface="+mn-cs"/>
         </a:defRPr>
       </a:lvl8pPr>
-      <a:lvl9pPr marL="3886200" indent="-228600" algn="l" defTabSz="914400" rtl="0" eaLnBrk="1" latinLnBrk="0" hangingPunct="1">
+      <a:lvl9pPr marL="1700000" indent="-228600" algn="l" defTabSz="914400" rtl="0" eaLnBrk="1" latinLnBrk="0" hangingPunct="1">
         <a:lnSpc>
-          <a:spcPct val="120000"/>
+          <a:spcPct val="90000"/>
         </a:lnSpc>
         <a:spcBef>
-          <a:spcPts val="500"/>
+          <a:spcPts val="200"/>
         </a:spcBef>
+        <a:spcAft>
+          <a:spcPts val="400"/>
+        </a:spcAft>
         <a:buClr>
           <a:schemeClr val="accent1"/>
         </a:buClr>
-        <a:buSzPct val="100000"/>
-        <a:buFont typeface="Arial" panose="020B0604020202020204" pitchFamily="34" charset="0"/>
-        <a:buChar char="•"/>
-        <a:defRPr sz="1200" kern="1200" baseline="0">
+        <a:buFont typeface="Calibri" pitchFamily="34" charset="0"/>
+        <a:buChar char="◦"/>
+        <a:defRPr sz="1400" kern="1200">
           <a:solidFill>
-            <a:schemeClr val="tx1"/>
+            <a:schemeClr val="tx1">
+              <a:lumMod val="75000"/>
+              <a:lumOff val="25000"/>
+            </a:schemeClr>
           </a:solidFill>
-          <a:effectLst/>
           <a:latin typeface="+mn-lt"/>
           <a:ea typeface="+mn-ea"/>
           <a:cs typeface="+mn-cs"/>
@@ -3674,23 +3837,18 @@
         </p:nvSpPr>
         <p:spPr/>
         <p:txBody>
-          <a:bodyPr/>
+          <a:bodyPr>
+            <a:normAutofit/>
+          </a:bodyPr>
           <a:lstStyle/>
           <a:p>
             <a:pPr algn="ctr"/>
             <a:r>
-              <a:rPr lang="id-ID" b="1" cap="none" dirty="0">
-                <a:ln w="0"/>
+              <a:rPr lang="id-ID" sz="4000" b="1" spc="0" dirty="0">
                 <a:solidFill>
-                  <a:schemeClr val="accent1"/>
+                  <a:srgbClr val="002060"/>
                 </a:solidFill>
-                <a:effectLst>
-                  <a:outerShdw blurRad="38100" dist="25400" dir="5400000" algn="ctr" rotWithShape="0">
-                    <a:srgbClr val="6E747A">
-                      <a:alpha val="43000"/>
-                    </a:srgbClr>
-                  </a:outerShdw>
-                </a:effectLst>
+                <a:latin typeface="Aptos" panose="020B0004020202020204" pitchFamily="34" charset="0"/>
               </a:rPr>
               <a:t>MENU PRESENTASI</a:t>
             </a:r>
@@ -3699,279 +3857,148 @@
       </p:sp>
       <p:sp>
         <p:nvSpPr>
-          <p:cNvPr id="19" name="TextBox 18">
+          <p:cNvPr id="3" name="Rectangle: Rounded Corners 2">
+            <a:hlinkClick r:id="rId2" action="ppaction://hlinksldjump"/>
             <a:extLst>
               <a:ext uri="{FF2B5EF4-FFF2-40B4-BE49-F238E27FC236}">
-                <a16:creationId xmlns:a16="http://schemas.microsoft.com/office/drawing/2014/main" id="{844C9642-6A2A-423B-2FCC-0019FFFD18B5}"/>
+                <a16:creationId xmlns:a16="http://schemas.microsoft.com/office/drawing/2014/main" id="{0C1B3322-913D-4417-732B-693BFBDB4E3B}"/>
               </a:ext>
             </a:extLst>
           </p:cNvPr>
-          <p:cNvSpPr txBox="1"/>
+          <p:cNvSpPr/>
           <p:nvPr/>
         </p:nvSpPr>
         <p:spPr>
           <a:xfrm>
-            <a:off x="1889074" y="3044279"/>
-            <a:ext cx="1914307" cy="769441"/>
-          </a:xfrm>
-          <a:prstGeom prst="rect">
+            <a:off x="3220224" y="3037566"/>
+            <a:ext cx="1395664" cy="523220"/>
+          </a:xfrm>
+          <a:prstGeom prst="roundRect">
             <a:avLst/>
           </a:prstGeom>
-          <a:noFill/>
-        </p:spPr>
-        <p:txBody>
-          <a:bodyPr wrap="none" rtlCol="0">
-            <a:spAutoFit/>
-          </a:bodyPr>
-          <a:lstStyle/>
-          <a:p>
-            <a:r>
-              <a:rPr lang="id-ID" sz="4400" b="1" spc="50" dirty="0">
-                <a:ln w="0"/>
-                <a:solidFill>
-                  <a:schemeClr val="bg2"/>
-                </a:solidFill>
-                <a:effectLst>
-                  <a:innerShdw blurRad="63500" dist="50800" dir="13500000">
-                    <a:srgbClr val="000000">
-                      <a:alpha val="50000"/>
-                    </a:srgbClr>
-                  </a:innerShdw>
-                </a:effectLst>
-                <a:hlinkClick r:id="rId3" action="ppaction://hlinksldjump"/>
-              </a:rPr>
+        </p:spPr>
+        <p:style>
+          <a:lnRef idx="2">
+            <a:schemeClr val="accent6"/>
+          </a:lnRef>
+          <a:fillRef idx="1">
+            <a:schemeClr val="lt1"/>
+          </a:fillRef>
+          <a:effectRef idx="0">
+            <a:schemeClr val="accent6"/>
+          </a:effectRef>
+          <a:fontRef idx="minor">
+            <a:schemeClr val="dk1"/>
+          </a:fontRef>
+        </p:style>
+        <p:txBody>
+          <a:bodyPr rtlCol="0" anchor="ctr"/>
+          <a:lstStyle/>
+          <a:p>
+            <a:pPr algn="ctr"/>
+            <a:r>
+              <a:rPr lang="en-US" sz="2400" b="1" dirty="0"/>
               <a:t>BAB 1</a:t>
             </a:r>
-            <a:endParaRPr lang="id-ID" sz="4400" b="1" spc="50" dirty="0">
-              <a:ln w="0"/>
-              <a:solidFill>
-                <a:schemeClr val="bg2"/>
-              </a:solidFill>
-              <a:effectLst>
-                <a:innerShdw blurRad="63500" dist="50800" dir="13500000">
-                  <a:srgbClr val="000000">
-                    <a:alpha val="50000"/>
-                  </a:srgbClr>
-                </a:innerShdw>
-              </a:effectLst>
-            </a:endParaRPr>
-          </a:p>
-        </p:txBody>
-      </p:sp>
-      <p:sp>
-        <p:nvSpPr>
-          <p:cNvPr id="20" name="TextBox 19">
+            <a:endParaRPr lang="id-ID" sz="2400" b="1" dirty="0"/>
+          </a:p>
+        </p:txBody>
+      </p:sp>
+      <p:sp>
+        <p:nvSpPr>
+          <p:cNvPr id="4" name="Rectangle: Rounded Corners 3">
+            <a:hlinkClick r:id="rId3" action="ppaction://hlinksldjump"/>
             <a:extLst>
               <a:ext uri="{FF2B5EF4-FFF2-40B4-BE49-F238E27FC236}">
-                <a16:creationId xmlns:a16="http://schemas.microsoft.com/office/drawing/2014/main" id="{D9AB5429-71CA-4B1F-0832-22EFE3C64473}"/>
+                <a16:creationId xmlns:a16="http://schemas.microsoft.com/office/drawing/2014/main" id="{8EADD27E-7D3E-F31C-CA2C-E733ED8DF8F5}"/>
               </a:ext>
             </a:extLst>
           </p:cNvPr>
-          <p:cNvSpPr txBox="1"/>
+          <p:cNvSpPr/>
           <p:nvPr/>
         </p:nvSpPr>
         <p:spPr>
           <a:xfrm>
-            <a:off x="5138846" y="3044279"/>
-            <a:ext cx="1914307" cy="769441"/>
-          </a:xfrm>
-          <a:prstGeom prst="rect">
+            <a:off x="5398168" y="3037566"/>
+            <a:ext cx="1395664" cy="523220"/>
+          </a:xfrm>
+          <a:prstGeom prst="roundRect">
             <a:avLst/>
           </a:prstGeom>
-          <a:noFill/>
-        </p:spPr>
-        <p:txBody>
-          <a:bodyPr wrap="none" rtlCol="0">
-            <a:spAutoFit/>
-          </a:bodyPr>
-          <a:lstStyle/>
-          <a:p>
-            <a:r>
-              <a:rPr lang="id-ID" sz="4400" b="1" spc="50" dirty="0">
-                <a:ln w="0"/>
-                <a:solidFill>
-                  <a:schemeClr val="bg2"/>
-                </a:solidFill>
-                <a:effectLst>
-                  <a:innerShdw blurRad="63500" dist="50800" dir="13500000">
-                    <a:srgbClr val="000000">
-                      <a:alpha val="50000"/>
-                    </a:srgbClr>
-                  </a:innerShdw>
-                </a:effectLst>
-                <a:hlinkClick r:id="rId4" action="ppaction://hlinksldjump"/>
-              </a:rPr>
-              <a:t>BAB </a:t>
-            </a:r>
-            <a:r>
-              <a:rPr lang="en-US" sz="4400" b="1" spc="50" dirty="0">
-                <a:ln w="0"/>
-                <a:solidFill>
-                  <a:schemeClr val="bg2"/>
-                </a:solidFill>
-                <a:effectLst>
-                  <a:innerShdw blurRad="63500" dist="50800" dir="13500000">
-                    <a:srgbClr val="000000">
-                      <a:alpha val="50000"/>
-                    </a:srgbClr>
-                  </a:innerShdw>
-                </a:effectLst>
-                <a:hlinkClick r:id="rId4" action="ppaction://hlinksldjump"/>
-              </a:rPr>
-              <a:t>2</a:t>
-            </a:r>
-            <a:endParaRPr lang="id-ID" sz="4400" b="1" spc="50" dirty="0">
-              <a:ln w="0"/>
-              <a:solidFill>
-                <a:schemeClr val="bg2"/>
-              </a:solidFill>
-              <a:effectLst>
-                <a:innerShdw blurRad="63500" dist="50800" dir="13500000">
-                  <a:srgbClr val="000000">
-                    <a:alpha val="50000"/>
-                  </a:srgbClr>
-                </a:innerShdw>
-              </a:effectLst>
-            </a:endParaRPr>
-          </a:p>
-        </p:txBody>
-      </p:sp>
-      <p:sp>
-        <p:nvSpPr>
-          <p:cNvPr id="21" name="TextBox 20">
+        </p:spPr>
+        <p:style>
+          <a:lnRef idx="2">
+            <a:schemeClr val="accent6"/>
+          </a:lnRef>
+          <a:fillRef idx="1">
+            <a:schemeClr val="lt1"/>
+          </a:fillRef>
+          <a:effectRef idx="0">
+            <a:schemeClr val="accent6"/>
+          </a:effectRef>
+          <a:fontRef idx="minor">
+            <a:schemeClr val="dk1"/>
+          </a:fontRef>
+        </p:style>
+        <p:txBody>
+          <a:bodyPr rtlCol="0" anchor="ctr"/>
+          <a:lstStyle/>
+          <a:p>
+            <a:pPr algn="ctr"/>
+            <a:r>
+              <a:rPr lang="en-US" sz="2400" b="1" dirty="0"/>
+              <a:t>BAB 2</a:t>
+            </a:r>
+            <a:endParaRPr lang="id-ID" sz="2400" b="1" dirty="0"/>
+          </a:p>
+        </p:txBody>
+      </p:sp>
+      <p:sp>
+        <p:nvSpPr>
+          <p:cNvPr id="5" name="Rectangle: Rounded Corners 4">
+            <a:hlinkClick r:id="rId4" action="ppaction://hlinksldjump"/>
             <a:extLst>
               <a:ext uri="{FF2B5EF4-FFF2-40B4-BE49-F238E27FC236}">
-                <a16:creationId xmlns:a16="http://schemas.microsoft.com/office/drawing/2014/main" id="{EBDD7832-C77A-8928-6322-B36068BE0E58}"/>
+                <a16:creationId xmlns:a16="http://schemas.microsoft.com/office/drawing/2014/main" id="{B635B04E-93F6-A62A-A882-AB42E21A6CD3}"/>
               </a:ext>
             </a:extLst>
           </p:cNvPr>
-          <p:cNvSpPr txBox="1"/>
+          <p:cNvSpPr/>
           <p:nvPr/>
         </p:nvSpPr>
         <p:spPr>
           <a:xfrm>
-            <a:off x="8388619" y="3044279"/>
-            <a:ext cx="1914307" cy="769441"/>
-          </a:xfrm>
-          <a:prstGeom prst="rect">
+            <a:off x="7576112" y="3037566"/>
+            <a:ext cx="1395664" cy="523220"/>
+          </a:xfrm>
+          <a:prstGeom prst="roundRect">
             <a:avLst/>
           </a:prstGeom>
-          <a:noFill/>
-        </p:spPr>
-        <p:txBody>
-          <a:bodyPr wrap="none" rtlCol="0">
-            <a:spAutoFit/>
-          </a:bodyPr>
-          <a:lstStyle/>
-          <a:p>
-            <a:r>
-              <a:rPr lang="id-ID" sz="4400" b="1" spc="50" dirty="0">
-                <a:ln w="0"/>
-                <a:solidFill>
-                  <a:schemeClr val="bg2"/>
-                </a:solidFill>
-                <a:effectLst>
-                  <a:innerShdw blurRad="63500" dist="50800" dir="13500000">
-                    <a:srgbClr val="000000">
-                      <a:alpha val="50000"/>
-                    </a:srgbClr>
-                  </a:innerShdw>
-                </a:effectLst>
-                <a:hlinkClick r:id="rId5" action="ppaction://hlinksldjump"/>
-              </a:rPr>
-              <a:t>BAB </a:t>
-            </a:r>
-            <a:r>
-              <a:rPr lang="en-US" sz="4400" b="1" spc="50" dirty="0">
-                <a:ln w="0"/>
-                <a:solidFill>
-                  <a:schemeClr val="bg2"/>
-                </a:solidFill>
-                <a:effectLst>
-                  <a:innerShdw blurRad="63500" dist="50800" dir="13500000">
-                    <a:srgbClr val="000000">
-                      <a:alpha val="50000"/>
-                    </a:srgbClr>
-                  </a:innerShdw>
-                </a:effectLst>
-                <a:hlinkClick r:id="rId5" action="ppaction://hlinksldjump"/>
-              </a:rPr>
-              <a:t>3</a:t>
-            </a:r>
-            <a:endParaRPr lang="id-ID" sz="4400" b="1" spc="50" dirty="0">
-              <a:ln w="0"/>
-              <a:solidFill>
-                <a:schemeClr val="bg2"/>
-              </a:solidFill>
-              <a:effectLst>
-                <a:innerShdw blurRad="63500" dist="50800" dir="13500000">
-                  <a:srgbClr val="000000">
-                    <a:alpha val="50000"/>
-                  </a:srgbClr>
-                </a:innerShdw>
-              </a:effectLst>
-            </a:endParaRPr>
-          </a:p>
-        </p:txBody>
-      </p:sp>
-      <p:sp>
-        <p:nvSpPr>
-          <p:cNvPr id="2" name="TextBox 1">
-            <a:extLst>
-              <a:ext uri="{FF2B5EF4-FFF2-40B4-BE49-F238E27FC236}">
-                <a16:creationId xmlns:a16="http://schemas.microsoft.com/office/drawing/2014/main" id="{23178DF5-42F3-6975-EC48-C851EA0DB851}"/>
-              </a:ext>
-            </a:extLst>
-          </p:cNvPr>
-          <p:cNvSpPr txBox="1"/>
-          <p:nvPr/>
-        </p:nvSpPr>
-        <p:spPr>
-          <a:xfrm>
-            <a:off x="5138846" y="4619524"/>
-            <a:ext cx="2113079" cy="769441"/>
-          </a:xfrm>
-          <a:prstGeom prst="rect">
-            <a:avLst/>
-          </a:prstGeom>
-          <a:noFill/>
-        </p:spPr>
-        <p:txBody>
-          <a:bodyPr wrap="none" rtlCol="0">
-            <a:spAutoFit/>
-          </a:bodyPr>
-          <a:lstStyle/>
-          <a:p>
-            <a:r>
-              <a:rPr lang="en-US" sz="4400" b="1" spc="50" dirty="0">
-                <a:ln w="0"/>
-                <a:solidFill>
-                  <a:schemeClr val="bg2"/>
-                </a:solidFill>
-                <a:effectLst>
-                  <a:innerShdw blurRad="63500" dist="50800" dir="13500000">
-                    <a:srgbClr val="000000">
-                      <a:alpha val="50000"/>
-                    </a:srgbClr>
-                  </a:innerShdw>
-                </a:effectLst>
-                <a:hlinkClick r:id="rId6" action="ppaction://hlinksldjump"/>
-              </a:rPr>
-              <a:t>VIDEO</a:t>
-            </a:r>
-            <a:endParaRPr lang="id-ID" sz="4400" b="1" spc="50" dirty="0">
-              <a:ln w="0"/>
-              <a:solidFill>
-                <a:schemeClr val="bg2"/>
-              </a:solidFill>
-              <a:effectLst>
-                <a:innerShdw blurRad="63500" dist="50800" dir="13500000">
-                  <a:srgbClr val="000000">
-                    <a:alpha val="50000"/>
-                  </a:srgbClr>
-                </a:innerShdw>
-              </a:effectLst>
-            </a:endParaRPr>
+        </p:spPr>
+        <p:style>
+          <a:lnRef idx="2">
+            <a:schemeClr val="accent6"/>
+          </a:lnRef>
+          <a:fillRef idx="1">
+            <a:schemeClr val="lt1"/>
+          </a:fillRef>
+          <a:effectRef idx="0">
+            <a:schemeClr val="accent6"/>
+          </a:effectRef>
+          <a:fontRef idx="minor">
+            <a:schemeClr val="dk1"/>
+          </a:fontRef>
+        </p:style>
+        <p:txBody>
+          <a:bodyPr rtlCol="0" anchor="ctr"/>
+          <a:lstStyle/>
+          <a:p>
+            <a:pPr algn="ctr"/>
+            <a:r>
+              <a:rPr lang="en-US" sz="2400" b="1" dirty="0"/>
+              <a:t>BAB 3</a:t>
+            </a:r>
+            <a:endParaRPr lang="id-ID" sz="2400" b="1" dirty="0"/>
           </a:p>
         </p:txBody>
       </p:sp>
@@ -3985,11 +4012,6 @@
   <p:clrMapOvr>
     <a:masterClrMapping/>
   </p:clrMapOvr>
-  <p:extLst>
-    <p:ext uri="{6950BFC3-D8DA-4A85-94F7-54DA5524770B}">
-      <p188:commentRel xmlns:p188="http://schemas.microsoft.com/office/powerpoint/2018/8/main" r:id="rId2"/>
-    </p:ext>
-  </p:extLst>
 </p:sld>
 </file>
 
@@ -4028,12 +4050,14 @@
         </p:nvSpPr>
         <p:spPr/>
         <p:txBody>
-          <a:bodyPr/>
+          <a:bodyPr>
+            <a:normAutofit/>
+          </a:bodyPr>
           <a:lstStyle/>
           <a:p>
             <a:pPr algn="ctr"/>
             <a:r>
-              <a:rPr lang="id-ID" b="1" dirty="0">
+              <a:rPr lang="id-ID" sz="4000" b="1" dirty="0">
                 <a:ln w="0"/>
                 <a:solidFill>
                   <a:schemeClr val="accent1"/>
@@ -4045,11 +4069,12 @@
                     </a:srgbClr>
                   </a:outerShdw>
                 </a:effectLst>
+                <a:latin typeface="Aptos" panose="020B0004020202020204" pitchFamily="34" charset="0"/>
               </a:rPr>
               <a:t>BAB 1</a:t>
             </a:r>
             <a:br>
-              <a:rPr lang="en-US" b="1" dirty="0">
+              <a:rPr lang="en-US" sz="4000" b="1" dirty="0">
                 <a:ln w="0"/>
                 <a:solidFill>
                   <a:schemeClr val="accent1"/>
@@ -4061,10 +4086,11 @@
                     </a:srgbClr>
                   </a:outerShdw>
                 </a:effectLst>
+                <a:latin typeface="Aptos" panose="020B0004020202020204" pitchFamily="34" charset="0"/>
               </a:rPr>
             </a:br>
             <a:r>
-              <a:rPr lang="id-ID" b="1" dirty="0">
+              <a:rPr lang="id-ID" sz="4000" b="1" dirty="0">
                 <a:ln w="0"/>
                 <a:solidFill>
                   <a:schemeClr val="accent1"/>
@@ -4076,6 +4102,7 @@
                     </a:srgbClr>
                   </a:outerShdw>
                 </a:effectLst>
+                <a:latin typeface="Aptos" panose="020B0004020202020204" pitchFamily="34" charset="0"/>
               </a:rPr>
               <a:t>PENDAHULUAN</a:t>
             </a:r>
@@ -4085,7 +4112,7 @@
       <p:sp>
         <p:nvSpPr>
           <p:cNvPr id="5" name="Action Button: Go Home 4">
-            <a:hlinkClick r:id="rId2" action="ppaction://hlinksldjump" highlightClick="1"/>
+            <a:hlinkClick r:id="rId2" action="ppaction://hlinksldjump"/>
             <a:extLst>
               <a:ext uri="{FF2B5EF4-FFF2-40B4-BE49-F238E27FC236}">
                 <a16:creationId xmlns:a16="http://schemas.microsoft.com/office/drawing/2014/main" id="{D3DC79DE-9C63-E570-2CD0-50AC04C6B319}"/>
@@ -4097,16 +4124,14 @@
         </p:nvSpPr>
         <p:spPr>
           <a:xfrm>
-            <a:off x="11527197" y="6215338"/>
+            <a:off x="10615680" y="5347404"/>
             <a:ext cx="540000" cy="540000"/>
           </a:xfrm>
           <a:prstGeom prst="actionButtonHome">
             <a:avLst/>
           </a:prstGeom>
           <a:solidFill>
-            <a:schemeClr val="bg1">
-              <a:alpha val="0"/>
-            </a:schemeClr>
+            <a:schemeClr val="bg1"/>
           </a:solidFill>
           <a:ln>
             <a:solidFill>
@@ -4231,12 +4256,14 @@
         </p:nvSpPr>
         <p:spPr/>
         <p:txBody>
-          <a:bodyPr/>
+          <a:bodyPr>
+            <a:normAutofit/>
+          </a:bodyPr>
           <a:lstStyle/>
           <a:p>
             <a:pPr algn="ctr"/>
             <a:r>
-              <a:rPr lang="id-ID" b="1" dirty="0">
+              <a:rPr lang="id-ID" sz="4000" b="1" dirty="0">
                 <a:ln w="0"/>
                 <a:solidFill>
                   <a:schemeClr val="accent1"/>
@@ -4248,11 +4275,12 @@
                     </a:srgbClr>
                   </a:outerShdw>
                 </a:effectLst>
+                <a:latin typeface="Aptos" panose="020B0004020202020204" pitchFamily="34" charset="0"/>
               </a:rPr>
               <a:t>BAB 2</a:t>
             </a:r>
             <a:br>
-              <a:rPr lang="en-US" b="1" dirty="0">
+              <a:rPr lang="en-US" sz="4000" b="1" dirty="0">
                 <a:ln w="0"/>
                 <a:solidFill>
                   <a:schemeClr val="accent1"/>
@@ -4264,10 +4292,11 @@
                     </a:srgbClr>
                   </a:outerShdw>
                 </a:effectLst>
+                <a:latin typeface="Aptos" panose="020B0004020202020204" pitchFamily="34" charset="0"/>
               </a:rPr>
             </a:br>
             <a:r>
-              <a:rPr lang="id-ID" b="1" dirty="0">
+              <a:rPr lang="id-ID" sz="4000" b="1" dirty="0">
                 <a:ln w="0"/>
                 <a:solidFill>
                   <a:schemeClr val="accent1"/>
@@ -4279,6 +4308,7 @@
                     </a:srgbClr>
                   </a:outerShdw>
                 </a:effectLst>
+                <a:latin typeface="Aptos" panose="020B0004020202020204" pitchFamily="34" charset="0"/>
               </a:rPr>
               <a:t>MATERI</a:t>
             </a:r>
@@ -4287,11 +4317,55 @@
       </p:sp>
       <p:sp>
         <p:nvSpPr>
-          <p:cNvPr id="7" name="Action Button: Go Home 6">
+          <p:cNvPr id="9" name="TextBox 8">
+            <a:extLst>
+              <a:ext uri="{FF2B5EF4-FFF2-40B4-BE49-F238E27FC236}">
+                <a16:creationId xmlns:a16="http://schemas.microsoft.com/office/drawing/2014/main" id="{DB9B9BAB-D4E0-0551-989E-0DFF8CAECD99}"/>
+              </a:ext>
+            </a:extLst>
+          </p:cNvPr>
+          <p:cNvSpPr txBox="1"/>
+          <p:nvPr/>
+        </p:nvSpPr>
+        <p:spPr>
+          <a:xfrm>
+            <a:off x="1451579" y="2203554"/>
+            <a:ext cx="9603275" cy="2677656"/>
+          </a:xfrm>
+          <a:prstGeom prst="rect">
+            <a:avLst/>
+          </a:prstGeom>
+          <a:noFill/>
+        </p:spPr>
+        <p:txBody>
+          <a:bodyPr wrap="square" rtlCol="0">
+            <a:spAutoFit/>
+          </a:bodyPr>
+          <a:lstStyle/>
+          <a:p>
+            <a:r>
+              <a:rPr lang="id-ID" sz="1400" dirty="0"/>
+              <a:t>Lorem ipsum dolor sit amet, consectetur adipiscing elit. Quisque venenatis ante nibh, in hendrerit neque hendrerit nec. Vivamus mattis pellentesque lectus, vitae condimentum velit aliquam sit amet. Integer risus urna, feugiat a justo vitae, consequat suscipit dui. In ut ornare lectus. Proin vitae lacus pulvinar, fermentum nulla et, pulvinar erat. Donec rutrum tincidunt faucibus. Nam euismod ex eget sapien egestas, in auctor eros pretium. Fusce posuere ultrices lectus at venenatis. Etiam maximus vel velit et fringilla. Vestibulum interdum vulputate nibh, sit amet blandit justo fermentum venenatis. Maecenas mattis pulvinar diam, id imperdiet augue sagittis nec. Suspendisse vitae facilisis nulla. Nam rutrum nisi dolor, a porta sapien porttitor a. Orci varius natoque penatibus et magnis dis parturient montes, nascetur ridiculus mus. Cras sit amet libero porta, ultrices felis vel, dictum leo.</a:t>
+            </a:r>
+          </a:p>
+          <a:p>
+            <a:endParaRPr lang="id-ID" sz="1400" dirty="0"/>
+          </a:p>
+          <a:p>
+            <a:r>
+              <a:rPr lang="id-ID" sz="1400" dirty="0"/>
+              <a:t>Nunc id urna pulvinar, venenatis lorem eu, malesuada nunc. Donec id eros eget augue vulputate pharetra eget non nisi. Praesent vitae hendrerit libero, sed elementum risus. Nam in tellus accumsan augue condimentum lobortis. Sed quis est maximus, tincidunt erat et, posuere neque. In congue, elit eu facilisis porttitor, elit odio dapibus tortor, sollicitudin laoreet lorem libero tincidunt ipsum. Duis eleifend ante eget velit vestibulum malesuada.</a:t>
+            </a:r>
+          </a:p>
+        </p:txBody>
+      </p:sp>
+      <p:sp>
+        <p:nvSpPr>
+          <p:cNvPr id="4" name="Action Button: Go Home 3">
             <a:hlinkClick r:id="rId2" action="ppaction://hlinksldjump" highlightClick="1"/>
             <a:extLst>
               <a:ext uri="{FF2B5EF4-FFF2-40B4-BE49-F238E27FC236}">
-                <a16:creationId xmlns:a16="http://schemas.microsoft.com/office/drawing/2014/main" id="{415312D9-3213-8489-8004-73F5FDFA8994}"/>
+                <a16:creationId xmlns:a16="http://schemas.microsoft.com/office/drawing/2014/main" id="{CBE344A6-13FA-769F-8FBC-97745E589CF2}"/>
               </a:ext>
             </a:extLst>
           </p:cNvPr>
@@ -4300,16 +4374,14 @@
         </p:nvSpPr>
         <p:spPr>
           <a:xfrm>
-            <a:off x="11527197" y="6215338"/>
+            <a:off x="10615680" y="5347404"/>
             <a:ext cx="540000" cy="540000"/>
           </a:xfrm>
           <a:prstGeom prst="actionButtonHome">
             <a:avLst/>
           </a:prstGeom>
           <a:solidFill>
-            <a:schemeClr val="bg1">
-              <a:alpha val="0"/>
-            </a:schemeClr>
+            <a:schemeClr val="bg1"/>
           </a:solidFill>
           <a:ln>
             <a:solidFill>
@@ -4339,50 +4411,6 @@
           <a:p>
             <a:pPr algn="ctr"/>
             <a:endParaRPr lang="id-ID"/>
-          </a:p>
-        </p:txBody>
-      </p:sp>
-      <p:sp>
-        <p:nvSpPr>
-          <p:cNvPr id="9" name="TextBox 8">
-            <a:extLst>
-              <a:ext uri="{FF2B5EF4-FFF2-40B4-BE49-F238E27FC236}">
-                <a16:creationId xmlns:a16="http://schemas.microsoft.com/office/drawing/2014/main" id="{DB9B9BAB-D4E0-0551-989E-0DFF8CAECD99}"/>
-              </a:ext>
-            </a:extLst>
-          </p:cNvPr>
-          <p:cNvSpPr txBox="1"/>
-          <p:nvPr/>
-        </p:nvSpPr>
-        <p:spPr>
-          <a:xfrm>
-            <a:off x="1451579" y="2203554"/>
-            <a:ext cx="9603275" cy="2677656"/>
-          </a:xfrm>
-          <a:prstGeom prst="rect">
-            <a:avLst/>
-          </a:prstGeom>
-          <a:noFill/>
-        </p:spPr>
-        <p:txBody>
-          <a:bodyPr wrap="square" rtlCol="0">
-            <a:spAutoFit/>
-          </a:bodyPr>
-          <a:lstStyle/>
-          <a:p>
-            <a:r>
-              <a:rPr lang="id-ID" sz="1400" dirty="0"/>
-              <a:t>Lorem ipsum dolor sit amet, consectetur adipiscing elit. Quisque venenatis ante nibh, in hendrerit neque hendrerit nec. Vivamus mattis pellentesque lectus, vitae condimentum velit aliquam sit amet. Integer risus urna, feugiat a justo vitae, consequat suscipit dui. In ut ornare lectus. Proin vitae lacus pulvinar, fermentum nulla et, pulvinar erat. Donec rutrum tincidunt faucibus. Nam euismod ex eget sapien egestas, in auctor eros pretium. Fusce posuere ultrices lectus at venenatis. Etiam maximus vel velit et fringilla. Vestibulum interdum vulputate nibh, sit amet blandit justo fermentum venenatis. Maecenas mattis pulvinar diam, id imperdiet augue sagittis nec. Suspendisse vitae facilisis nulla. Nam rutrum nisi dolor, a porta sapien porttitor a. Orci varius natoque penatibus et magnis dis parturient montes, nascetur ridiculus mus. Cras sit amet libero porta, ultrices felis vel, dictum leo.</a:t>
-            </a:r>
-          </a:p>
-          <a:p>
-            <a:endParaRPr lang="id-ID" sz="1400" dirty="0"/>
-          </a:p>
-          <a:p>
-            <a:r>
-              <a:rPr lang="id-ID" sz="1400" dirty="0"/>
-              <a:t>Nunc id urna pulvinar, venenatis lorem eu, malesuada nunc. Donec id eros eget augue vulputate pharetra eget non nisi. Praesent vitae hendrerit libero, sed elementum risus. Nam in tellus accumsan augue condimentum lobortis. Sed quis est maximus, tincidunt erat et, posuere neque. In congue, elit eu facilisis porttitor, elit odio dapibus tortor, sollicitudin laoreet lorem libero tincidunt ipsum. Duis eleifend ante eget velit vestibulum malesuada.</a:t>
-            </a:r>
           </a:p>
         </p:txBody>
       </p:sp>
@@ -4434,12 +4462,14 @@
         </p:nvSpPr>
         <p:spPr/>
         <p:txBody>
-          <a:bodyPr/>
+          <a:bodyPr>
+            <a:normAutofit/>
+          </a:bodyPr>
           <a:lstStyle/>
           <a:p>
             <a:pPr algn="ctr"/>
             <a:r>
-              <a:rPr lang="id-ID" b="1" dirty="0">
+              <a:rPr lang="id-ID" sz="4000" b="1" dirty="0">
                 <a:ln w="0"/>
                 <a:solidFill>
                   <a:schemeClr val="accent1"/>
@@ -4451,11 +4481,12 @@
                     </a:srgbClr>
                   </a:outerShdw>
                 </a:effectLst>
+                <a:latin typeface="Aptos" panose="020B0004020202020204" pitchFamily="34" charset="0"/>
               </a:rPr>
               <a:t>BAB 3</a:t>
             </a:r>
             <a:br>
-              <a:rPr lang="en-US" b="1" dirty="0">
+              <a:rPr lang="en-US" sz="4000" b="1" dirty="0">
                 <a:ln w="0"/>
                 <a:solidFill>
                   <a:schemeClr val="accent1"/>
@@ -4467,10 +4498,11 @@
                     </a:srgbClr>
                   </a:outerShdw>
                 </a:effectLst>
+                <a:latin typeface="Aptos" panose="020B0004020202020204" pitchFamily="34" charset="0"/>
               </a:rPr>
             </a:br>
             <a:r>
-              <a:rPr lang="id-ID" b="1" dirty="0">
+              <a:rPr lang="id-ID" sz="4000" b="1" dirty="0">
                 <a:ln w="0"/>
                 <a:solidFill>
                   <a:schemeClr val="accent1"/>
@@ -4482,6 +4514,7 @@
                     </a:srgbClr>
                   </a:outerShdw>
                 </a:effectLst>
+                <a:latin typeface="Aptos" panose="020B0004020202020204" pitchFamily="34" charset="0"/>
               </a:rPr>
               <a:t>KESIMPULAN</a:t>
             </a:r>
@@ -4490,11 +4523,55 @@
       </p:sp>
       <p:sp>
         <p:nvSpPr>
-          <p:cNvPr id="7" name="Action Button: Go Home 6">
+          <p:cNvPr id="9" name="TextBox 8">
+            <a:extLst>
+              <a:ext uri="{FF2B5EF4-FFF2-40B4-BE49-F238E27FC236}">
+                <a16:creationId xmlns:a16="http://schemas.microsoft.com/office/drawing/2014/main" id="{EDD36F41-1F6A-9D2E-D46E-F58908B5BF79}"/>
+              </a:ext>
+            </a:extLst>
+          </p:cNvPr>
+          <p:cNvSpPr txBox="1"/>
+          <p:nvPr/>
+        </p:nvSpPr>
+        <p:spPr>
+          <a:xfrm>
+            <a:off x="1451579" y="2203554"/>
+            <a:ext cx="9603275" cy="2677656"/>
+          </a:xfrm>
+          <a:prstGeom prst="rect">
+            <a:avLst/>
+          </a:prstGeom>
+          <a:noFill/>
+        </p:spPr>
+        <p:txBody>
+          <a:bodyPr wrap="square" rtlCol="0">
+            <a:spAutoFit/>
+          </a:bodyPr>
+          <a:lstStyle/>
+          <a:p>
+            <a:r>
+              <a:rPr lang="id-ID" sz="1400" dirty="0"/>
+              <a:t>Lorem ipsum dolor sit amet, consectetur adipiscing elit. Quisque venenatis ante nibh, in hendrerit neque hendrerit nec. Vivamus mattis pellentesque lectus, vitae condimentum velit aliquam sit amet. Integer risus urna, feugiat a justo vitae, consequat suscipit dui. In ut ornare lectus. Proin vitae lacus pulvinar, fermentum nulla et, pulvinar erat. Donec rutrum tincidunt faucibus. Nam euismod ex eget sapien egestas, in auctor eros pretium. Fusce posuere ultrices lectus at venenatis. Etiam maximus vel velit et fringilla. Vestibulum interdum vulputate nibh, sit amet blandit justo fermentum venenatis. Maecenas mattis pulvinar diam, id imperdiet augue sagittis nec. Suspendisse vitae facilisis nulla. Nam rutrum nisi dolor, a porta sapien porttitor a. Orci varius natoque penatibus et magnis dis parturient montes, nascetur ridiculus mus. Cras sit amet libero porta, ultrices felis vel, dictum leo.</a:t>
+            </a:r>
+          </a:p>
+          <a:p>
+            <a:endParaRPr lang="id-ID" sz="1400" dirty="0"/>
+          </a:p>
+          <a:p>
+            <a:r>
+              <a:rPr lang="id-ID" sz="1400" dirty="0"/>
+              <a:t>Nunc id urna pulvinar, venenatis lorem eu, malesuada nunc. Donec id eros eget augue vulputate pharetra eget non nisi. Praesent vitae hendrerit libero, sed elementum risus. Nam in tellus accumsan augue condimentum lobortis. Sed quis est maximus, tincidunt erat et, posuere neque. In congue, elit eu facilisis porttitor, elit odio dapibus tortor, sollicitudin laoreet lorem libero tincidunt ipsum. Duis eleifend ante eget velit vestibulum malesuada.</a:t>
+            </a:r>
+          </a:p>
+        </p:txBody>
+      </p:sp>
+      <p:sp>
+        <p:nvSpPr>
+          <p:cNvPr id="4" name="Action Button: Go Home 3">
             <a:hlinkClick r:id="rId2" action="ppaction://hlinksldjump" highlightClick="1"/>
             <a:extLst>
               <a:ext uri="{FF2B5EF4-FFF2-40B4-BE49-F238E27FC236}">
-                <a16:creationId xmlns:a16="http://schemas.microsoft.com/office/drawing/2014/main" id="{3BFFB4FA-7F36-01A5-BC89-3A8B471E12A3}"/>
+                <a16:creationId xmlns:a16="http://schemas.microsoft.com/office/drawing/2014/main" id="{A791A0C2-74BC-0276-4336-4B2572D4B1BA}"/>
               </a:ext>
             </a:extLst>
           </p:cNvPr>
@@ -4503,16 +4580,14 @@
         </p:nvSpPr>
         <p:spPr>
           <a:xfrm>
-            <a:off x="11527197" y="6215338"/>
+            <a:off x="10615680" y="5347404"/>
             <a:ext cx="540000" cy="540000"/>
           </a:xfrm>
           <a:prstGeom prst="actionButtonHome">
             <a:avLst/>
           </a:prstGeom>
           <a:solidFill>
-            <a:schemeClr val="bg1">
-              <a:alpha val="0"/>
-            </a:schemeClr>
+            <a:schemeClr val="bg1"/>
           </a:solidFill>
           <a:ln>
             <a:solidFill>
@@ -4542,50 +4617,6 @@
           <a:p>
             <a:pPr algn="ctr"/>
             <a:endParaRPr lang="id-ID"/>
-          </a:p>
-        </p:txBody>
-      </p:sp>
-      <p:sp>
-        <p:nvSpPr>
-          <p:cNvPr id="9" name="TextBox 8">
-            <a:extLst>
-              <a:ext uri="{FF2B5EF4-FFF2-40B4-BE49-F238E27FC236}">
-                <a16:creationId xmlns:a16="http://schemas.microsoft.com/office/drawing/2014/main" id="{EDD36F41-1F6A-9D2E-D46E-F58908B5BF79}"/>
-              </a:ext>
-            </a:extLst>
-          </p:cNvPr>
-          <p:cNvSpPr txBox="1"/>
-          <p:nvPr/>
-        </p:nvSpPr>
-        <p:spPr>
-          <a:xfrm>
-            <a:off x="1451579" y="2203554"/>
-            <a:ext cx="9603275" cy="2677656"/>
-          </a:xfrm>
-          <a:prstGeom prst="rect">
-            <a:avLst/>
-          </a:prstGeom>
-          <a:noFill/>
-        </p:spPr>
-        <p:txBody>
-          <a:bodyPr wrap="square" rtlCol="0">
-            <a:spAutoFit/>
-          </a:bodyPr>
-          <a:lstStyle/>
-          <a:p>
-            <a:r>
-              <a:rPr lang="id-ID" sz="1400" dirty="0"/>
-              <a:t>Lorem ipsum dolor sit amet, consectetur adipiscing elit. Quisque venenatis ante nibh, in hendrerit neque hendrerit nec. Vivamus mattis pellentesque lectus, vitae condimentum velit aliquam sit amet. Integer risus urna, feugiat a justo vitae, consequat suscipit dui. In ut ornare lectus. Proin vitae lacus pulvinar, fermentum nulla et, pulvinar erat. Donec rutrum tincidunt faucibus. Nam euismod ex eget sapien egestas, in auctor eros pretium. Fusce posuere ultrices lectus at venenatis. Etiam maximus vel velit et fringilla. Vestibulum interdum vulputate nibh, sit amet blandit justo fermentum venenatis. Maecenas mattis pulvinar diam, id imperdiet augue sagittis nec. Suspendisse vitae facilisis nulla. Nam rutrum nisi dolor, a porta sapien porttitor a. Orci varius natoque penatibus et magnis dis parturient montes, nascetur ridiculus mus. Cras sit amet libero porta, ultrices felis vel, dictum leo.</a:t>
-            </a:r>
-          </a:p>
-          <a:p>
-            <a:endParaRPr lang="id-ID" sz="1400" dirty="0"/>
-          </a:p>
-          <a:p>
-            <a:r>
-              <a:rPr lang="id-ID" sz="1400" dirty="0"/>
-              <a:t>Nunc id urna pulvinar, venenatis lorem eu, malesuada nunc. Donec id eros eget augue vulputate pharetra eget non nisi. Praesent vitae hendrerit libero, sed elementum risus. Nam in tellus accumsan augue condimentum lobortis. Sed quis est maximus, tincidunt erat et, posuere neque. In congue, elit eu facilisis porttitor, elit odio dapibus tortor, sollicitudin laoreet lorem libero tincidunt ipsum. Duis eleifend ante eget velit vestibulum malesuada.</a:t>
-            </a:r>
           </a:p>
         </p:txBody>
       </p:sp>
@@ -4637,12 +4668,14 @@
         </p:nvSpPr>
         <p:spPr/>
         <p:txBody>
-          <a:bodyPr/>
+          <a:bodyPr>
+            <a:normAutofit/>
+          </a:bodyPr>
           <a:lstStyle/>
           <a:p>
             <a:pPr algn="ctr"/>
             <a:r>
-              <a:rPr lang="id-ID" b="1" dirty="0">
+              <a:rPr lang="id-ID" sz="4000" b="1" dirty="0">
                 <a:ln w="0"/>
                 <a:solidFill>
                   <a:schemeClr val="accent1"/>
@@ -4654,6 +4687,7 @@
                     </a:srgbClr>
                   </a:outerShdw>
                 </a:effectLst>
+                <a:latin typeface="Aptos" panose="020B0004020202020204" pitchFamily="34" charset="0"/>
               </a:rPr>
               <a:t>VIDEO</a:t>
             </a:r>
@@ -4662,11 +4696,11 @@
       </p:sp>
       <p:pic>
         <p:nvPicPr>
-          <p:cNvPr id="5" name="Online Media 4" title="Kecelakaan pada Lap Pemanasan MotoGP Le Mans, Prancis 2019">
+          <p:cNvPr id="4" name="Online Media 3" title="Teks diatas background gambar">
             <a:hlinkClick r:id="" action="ppaction://media"/>
             <a:extLst>
               <a:ext uri="{FF2B5EF4-FFF2-40B4-BE49-F238E27FC236}">
-                <a16:creationId xmlns:a16="http://schemas.microsoft.com/office/drawing/2014/main" id="{2B795F7F-B7F9-312D-124A-C45CD9254956}"/>
+                <a16:creationId xmlns:a16="http://schemas.microsoft.com/office/drawing/2014/main" id="{8E6D19C8-031E-34B5-2E66-F0D9037D199C}"/>
               </a:ext>
             </a:extLst>
           </p:cNvPr>
@@ -4685,71 +4719,14 @@
         </p:blipFill>
         <p:spPr>
           <a:xfrm>
-            <a:off x="1451579" y="2020472"/>
-            <a:ext cx="9603275" cy="3911600"/>
+            <a:off x="2454592" y="1971206"/>
+            <a:ext cx="7282816" cy="4114800"/>
           </a:xfrm>
           <a:prstGeom prst="rect">
             <a:avLst/>
           </a:prstGeom>
         </p:spPr>
       </p:pic>
-      <p:sp>
-        <p:nvSpPr>
-          <p:cNvPr id="6" name="Action Button: Go Home 5">
-            <a:hlinkClick r:id="rId4" action="ppaction://hlinksldjump" highlightClick="1"/>
-            <a:extLst>
-              <a:ext uri="{FF2B5EF4-FFF2-40B4-BE49-F238E27FC236}">
-                <a16:creationId xmlns:a16="http://schemas.microsoft.com/office/drawing/2014/main" id="{551C8003-175D-142D-00D8-0BE6338166D7}"/>
-              </a:ext>
-            </a:extLst>
-          </p:cNvPr>
-          <p:cNvSpPr/>
-          <p:nvPr/>
-        </p:nvSpPr>
-        <p:spPr>
-          <a:xfrm>
-            <a:off x="11527197" y="6215338"/>
-            <a:ext cx="540000" cy="540000"/>
-          </a:xfrm>
-          <a:prstGeom prst="actionButtonHome">
-            <a:avLst/>
-          </a:prstGeom>
-          <a:solidFill>
-            <a:schemeClr val="bg1">
-              <a:alpha val="0"/>
-            </a:schemeClr>
-          </a:solidFill>
-          <a:ln>
-            <a:solidFill>
-              <a:schemeClr val="bg1"/>
-            </a:solidFill>
-          </a:ln>
-        </p:spPr>
-        <p:style>
-          <a:lnRef idx="2">
-            <a:schemeClr val="accent1">
-              <a:shade val="15000"/>
-            </a:schemeClr>
-          </a:lnRef>
-          <a:fillRef idx="1">
-            <a:schemeClr val="accent1"/>
-          </a:fillRef>
-          <a:effectRef idx="0">
-            <a:schemeClr val="accent1"/>
-          </a:effectRef>
-          <a:fontRef idx="minor">
-            <a:schemeClr val="lt1"/>
-          </a:fontRef>
-        </p:style>
-        <p:txBody>
-          <a:bodyPr rtlCol="0" anchor="ctr"/>
-          <a:lstStyle/>
-          <a:p>
-            <a:pPr algn="ctr"/>
-            <a:endParaRPr lang="id-ID"/>
-          </a:p>
-        </p:txBody>
-      </p:sp>
     </p:spTree>
     <p:extLst>
       <p:ext uri="{BB962C8B-B14F-4D97-AF65-F5344CB8AC3E}">
@@ -4793,7 +4770,7 @@
                                       <p:cBhvr>
                                         <p:cTn id="6" dur="1" fill="hold"/>
                                         <p:tgtEl>
-                                          <p:spTgt spid="5"/>
+                                          <p:spTgt spid="4"/>
                                         </p:tgtEl>
                                       </p:cBhvr>
                                     </p:cmd>
@@ -4831,7 +4808,7 @@
                   </p:stCondLst>
                 </p:cTn>
                 <p:tgtEl>
-                  <p:spTgt spid="5"/>
+                  <p:spTgt spid="4"/>
                 </p:tgtEl>
               </p:cMediaNode>
             </p:video>
@@ -4840,7 +4817,7 @@
                 <p:stCondLst>
                   <p:cond evt="onClick" delay="0">
                     <p:tgtEl>
-                      <p:spTgt spid="5"/>
+                      <p:spTgt spid="4"/>
                     </p:tgtEl>
                   </p:cond>
                 </p:stCondLst>
@@ -4870,7 +4847,7 @@
                                       <p:cBhvr>
                                         <p:cTn id="12" dur="1" fill="hold"/>
                                         <p:tgtEl>
-                                          <p:spTgt spid="5"/>
+                                          <p:spTgt spid="4"/>
                                         </p:tgtEl>
                                       </p:cBhvr>
                                     </p:cmd>
@@ -4888,7 +4865,7 @@
               <p:nextCondLst>
                 <p:cond evt="onClick" delay="0">
                   <p:tgtEl>
-                    <p:spTgt spid="5"/>
+                    <p:spTgt spid="4"/>
                   </p:tgtEl>
                 </p:cond>
               </p:nextCondLst>
@@ -4902,54 +4879,54 @@
 </file>
 
 <file path=ppt/theme/theme1.xml><?xml version="1.0" encoding="utf-8"?>
-<a:theme xmlns:a="http://schemas.openxmlformats.org/drawingml/2006/main" name="Gallery">
+<a:theme xmlns:a="http://schemas.openxmlformats.org/drawingml/2006/main" name="Retrospect">
   <a:themeElements>
-    <a:clrScheme name="Gallery">
+    <a:clrScheme name="Retrospect">
       <a:dk1>
-        <a:sysClr val="windowText" lastClr="000000"/>
+        <a:srgbClr val="000000"/>
       </a:dk1>
       <a:lt1>
         <a:sysClr val="window" lastClr="FFFFFF"/>
       </a:lt1>
       <a:dk2>
-        <a:srgbClr val="454545"/>
+        <a:srgbClr val="637052"/>
       </a:dk2>
       <a:lt2>
-        <a:srgbClr val="DFDBD5"/>
+        <a:srgbClr val="CCDDEA"/>
       </a:lt2>
       <a:accent1>
-        <a:srgbClr val="B71E42"/>
+        <a:srgbClr val="E48312"/>
       </a:accent1>
       <a:accent2>
-        <a:srgbClr val="DE478E"/>
+        <a:srgbClr val="BD582C"/>
       </a:accent2>
       <a:accent3>
-        <a:srgbClr val="BC72F0"/>
+        <a:srgbClr val="865640"/>
       </a:accent3>
       <a:accent4>
-        <a:srgbClr val="795FAF"/>
+        <a:srgbClr val="9B8357"/>
       </a:accent4>
       <a:accent5>
-        <a:srgbClr val="586EA6"/>
+        <a:srgbClr val="C2BC80"/>
       </a:accent5>
       <a:accent6>
-        <a:srgbClr val="6892A0"/>
+        <a:srgbClr val="94A088"/>
       </a:accent6>
       <a:hlink>
-        <a:srgbClr val="FA2B5C"/>
+        <a:srgbClr val="2998E3"/>
       </a:hlink>
       <a:folHlink>
-        <a:srgbClr val="BC658E"/>
+        <a:srgbClr val="8C8C8C"/>
       </a:folHlink>
     </a:clrScheme>
-    <a:fontScheme name="Gallery">
+    <a:fontScheme name="Retrospect">
       <a:majorFont>
-        <a:latin typeface="Gill Sans MT" panose="020B0502020104020203"/>
+        <a:latin typeface="Calibri Light" panose="020F0302020204030204"/>
         <a:ea typeface=""/>
         <a:cs typeface=""/>
-        <a:font script="Jpan" typeface="游ゴシック Light"/>
+        <a:font script="Jpan" typeface="ＭＳ Ｐゴシック"/>
         <a:font script="Hang" typeface="맑은 고딕"/>
-        <a:font script="Hans" typeface="等线 Light"/>
+        <a:font script="Hans" typeface="宋体"/>
         <a:font script="Hant" typeface="新細明體"/>
         <a:font script="Arab" typeface="Times New Roman"/>
         <a:font script="Hebr" typeface="Times New Roman"/>
@@ -4979,12 +4956,12 @@
         <a:font script="Geor" typeface="Sylfaen"/>
       </a:majorFont>
       <a:minorFont>
-        <a:latin typeface="Gill Sans MT" panose="020B0502020104020203"/>
+        <a:latin typeface="Calibri" panose="020F0502020204030204"/>
         <a:ea typeface=""/>
         <a:cs typeface=""/>
-        <a:font script="Jpan" typeface="游ゴシック"/>
+        <a:font script="Jpan" typeface="ＭＳ Ｐゴシック"/>
         <a:font script="Hang" typeface="맑은 고딕"/>
-        <a:font script="Hans" typeface="等线"/>
+        <a:font script="Hans" typeface="宋体"/>
         <a:font script="Hant" typeface="新細明體"/>
         <a:font script="Arab" typeface="Arial"/>
         <a:font script="Hebr" typeface="Arial"/>
@@ -5014,7 +4991,7 @@
         <a:font script="Geor" typeface="Sylfaen"/>
       </a:minorFont>
     </a:fontScheme>
-    <a:fmtScheme name="Gallery">
+    <a:fmtScheme name="Retrospect">
       <a:fillStyleLst>
         <a:solidFill>
           <a:schemeClr val="phClr"/>
@@ -5023,52 +5000,65 @@
           <a:gsLst>
             <a:gs pos="0">
               <a:schemeClr val="phClr">
-                <a:tint val="54000"/>
-                <a:alpha val="100000"/>
-                <a:satMod val="105000"/>
-                <a:lumMod val="110000"/>
+                <a:tint val="65000"/>
+                <a:shade val="92000"/>
+                <a:satMod val="130000"/>
+              </a:schemeClr>
+            </a:gs>
+            <a:gs pos="45000">
+              <a:schemeClr val="phClr">
+                <a:tint val="60000"/>
+                <a:shade val="99000"/>
+                <a:satMod val="120000"/>
               </a:schemeClr>
             </a:gs>
             <a:gs pos="100000">
               <a:schemeClr val="phClr">
-                <a:tint val="78000"/>
-                <a:alpha val="92000"/>
-                <a:satMod val="109000"/>
-                <a:lumMod val="100000"/>
+                <a:tint val="55000"/>
+                <a:satMod val="140000"/>
               </a:schemeClr>
             </a:gs>
           </a:gsLst>
-          <a:lin ang="5400000" scaled="0"/>
+          <a:path path="circle">
+            <a:fillToRect l="100000" t="100000" r="100000" b="100000"/>
+          </a:path>
         </a:gradFill>
         <a:gradFill rotWithShape="1">
           <a:gsLst>
             <a:gs pos="0">
               <a:schemeClr val="phClr">
-                <a:tint val="98000"/>
-                <a:satMod val="110000"/>
-                <a:lumMod val="104000"/>
+                <a:shade val="85000"/>
+                <a:satMod val="130000"/>
               </a:schemeClr>
             </a:gs>
-            <a:gs pos="69000">
+            <a:gs pos="34000">
               <a:schemeClr val="phClr">
-                <a:shade val="88000"/>
+                <a:shade val="87000"/>
+                <a:satMod val="125000"/>
+              </a:schemeClr>
+            </a:gs>
+            <a:gs pos="70000">
+              <a:schemeClr val="phClr">
+                <a:tint val="100000"/>
+                <a:shade val="90000"/>
                 <a:satMod val="130000"/>
-                <a:lumMod val="92000"/>
               </a:schemeClr>
             </a:gs>
             <a:gs pos="100000">
               <a:schemeClr val="phClr">
-                <a:shade val="78000"/>
-                <a:satMod val="130000"/>
-                <a:lumMod val="92000"/>
+                <a:tint val="100000"/>
+                <a:shade val="100000"/>
+                <a:satMod val="110000"/>
               </a:schemeClr>
             </a:gs>
           </a:gsLst>
-          <a:lin ang="5400000" scaled="0"/>
+          <a:path path="circle">
+            <a:fillToRect l="100000" t="100000" r="100000" b="100000"/>
+          </a:path>
         </a:gradFill>
       </a:fillStyleLst>
       <a:lnStyleLst>
-        <a:ln w="9525" cap="flat" cmpd="sng" algn="ctr">
+        <a:ln w="12700" cap="flat" cmpd="sng" algn="ctr">
           <a:solidFill>
             <a:schemeClr val="phClr"/>
           </a:solidFill>
@@ -5080,7 +5070,7 @@
           </a:solidFill>
           <a:prstDash val="solid"/>
         </a:ln>
-        <a:ln w="22225" cap="flat" cmpd="sng" algn="ctr">
+        <a:ln w="25400" cap="flat" cmpd="sng" algn="ctr">
           <a:solidFill>
             <a:schemeClr val="phClr"/>
           </a:solidFill>
@@ -5092,13 +5082,19 @@
           <a:effectLst/>
         </a:effectStyle>
         <a:effectStyle>
-          <a:effectLst/>
+          <a:effectLst>
+            <a:outerShdw blurRad="38100" dist="25400" dir="2700000" algn="br" rotWithShape="0">
+              <a:srgbClr val="000000">
+                <a:alpha val="60000"/>
+              </a:srgbClr>
+            </a:outerShdw>
+          </a:effectLst>
         </a:effectStyle>
         <a:effectStyle>
           <a:effectLst>
-            <a:outerShdw blurRad="50800" dist="50800" dir="5400000" sx="96000" sy="96000" rotWithShape="0">
+            <a:outerShdw blurRad="44450" dist="25400" dir="2700000" algn="br" rotWithShape="0">
               <a:srgbClr val="000000">
-                <a:alpha val="48000"/>
+                <a:alpha val="60000"/>
               </a:srgbClr>
             </a:outerShdw>
           </a:effectLst>
@@ -5106,12 +5102,12 @@
             <a:camera prst="orthographicFront">
               <a:rot lat="0" lon="0" rev="0"/>
             </a:camera>
-            <a:lightRig rig="balanced" dir="t">
-              <a:rot lat="0" lon="0" rev="1080000"/>
+            <a:lightRig rig="threePt" dir="t">
+              <a:rot lat="0" lon="0" rev="19800000"/>
             </a:lightRig>
           </a:scene3d>
-          <a:sp3d>
-            <a:bevelT w="38100" h="12700" prst="softRound"/>
+          <a:sp3d prstMaterial="flat">
+            <a:bevelT w="25400" h="31750"/>
           </a:sp3d>
         </a:effectStyle>
       </a:effectStyleLst>
@@ -5120,26 +5116,37 @@
           <a:schemeClr val="phClr"/>
         </a:solidFill>
         <a:solidFill>
-          <a:schemeClr val="phClr"/>
+          <a:schemeClr val="phClr">
+            <a:tint val="90000"/>
+            <a:shade val="97000"/>
+            <a:satMod val="130000"/>
+          </a:schemeClr>
         </a:solidFill>
         <a:gradFill rotWithShape="1">
           <a:gsLst>
             <a:gs pos="0">
               <a:schemeClr val="phClr">
-                <a:tint val="94000"/>
-                <a:satMod val="80000"/>
-                <a:lumMod val="106000"/>
+                <a:tint val="96000"/>
+                <a:shade val="99000"/>
+                <a:satMod val="140000"/>
+              </a:schemeClr>
+            </a:gs>
+            <a:gs pos="65000">
+              <a:schemeClr val="phClr">
+                <a:tint val="100000"/>
+                <a:shade val="80000"/>
+                <a:satMod val="130000"/>
               </a:schemeClr>
             </a:gs>
             <a:gs pos="100000">
               <a:schemeClr val="phClr">
-                <a:shade val="80000"/>
+                <a:tint val="100000"/>
+                <a:shade val="48000"/>
+                <a:satMod val="120000"/>
               </a:schemeClr>
             </a:gs>
           </a:gsLst>
-          <a:path path="circle">
-            <a:fillToRect l="50000" t="50000" r="50000" b="50000"/>
-          </a:path>
+          <a:lin ang="16200000" scaled="0"/>
         </a:gradFill>
       </a:bgFillStyleLst>
     </a:fmtScheme>
@@ -5148,7 +5155,7 @@
   <a:extraClrSchemeLst/>
   <a:extLst>
     <a:ext uri="{05A4C25C-085E-4340-85A3-A5531E510DB2}">
-      <thm15:themeFamily xmlns:thm15="http://schemas.microsoft.com/office/thememl/2012/main" name="Gallery" id="{BBFCD31E-59A1-489D-B089-A3EAD7CAE12E}" vid="{F5E91637-A7B6-4E27-B710-77DA7014EE1E}"/>
+      <thm15:themeFamily xmlns:thm15="http://schemas.microsoft.com/office/thememl/2012/main" name="Retrospect" id="{5F128B03-DCCA-4EEB-AB3B-CF2899314A46}" vid="{3F1AAB62-24C6-49D2-8E01-B56FAC9A3DCD}"/>
     </a:ext>
   </a:extLst>
 </a:theme>
